--- a/Agent_AI_Pitch_Deck.pptx
+++ b/Agent_AI_Pitch_Deck.pptx
@@ -19,9 +19,12 @@
     <p:sldId id="267" r:id="rId13"/>
     <p:sldId id="268" r:id="rId14"/>
     <p:sldId id="269" r:id="rId15"/>
+    <p:sldId id="270" r:id="rId16"/>
+    <p:sldId id="271" r:id="rId17"/>
+    <p:sldId id="272" r:id="rId18"/>
   </p:sldIdLst>
   <p:notesMasterIdLst>
-    <p:notesMasterId r:id="rId16"/>
+    <p:notesMasterId r:id="rId19"/>
   </p:notesMasterIdLst>
   <p:sldSz cx="12192000" cy="6858000"/>
   <p:notesSz cx="6858000" cy="12192000"/>
@@ -955,7 +958,7 @@
           <a:p>
             <a:r>
               <a:rPr lang="en-US" dirty="0"/>
-              <a:t>This is your moment! Agent AI is the most exciting field in tech right now, and it's still early enough that a college student can build something that competes with professional products. Start small — one agent, one tool. Then add complexity. The frameworks are free, the APIs have free tiers, and the community is incredibly supportive. Go build something amazing!</a:t>
+              <a:t>This is a real example of how you build an agent from scratch. Start with the problem, ask what a human expert would do, and each step becomes an agent task or tool. The system prompt is your agent's brain — write it like instructions for a new employee. The output is structured JSON so your app can display it nicely.</a:t>
             </a:r>
             <a:endParaRPr lang="en-US" dirty="0"/>
           </a:p>
@@ -979,6 +982,270 @@
             <a:fld id="{F7021451-1387-4CA6-816F-3879F97B5CBC}" type="slidenum">
               <a:rPr lang="en-US"/>
               <a:t>14</a:t>
+            </a:fld>
+            <a:endParaRPr lang="en-US"/>
+          </a:p>
+        </p:txBody>
+      </p:sp>
+    </p:spTree>
+    <p:extLst>
+      <p:ext uri="{BB962C8B-B14F-4D97-AF65-F5344CB8AC3E}">
+        <p14:creationId xmlns:p14="http://schemas.microsoft.com/office/powerpoint/2010/main" val="1024086991"/>
+      </p:ext>
+    </p:extLst>
+  </p:cSld>
+  <p:clrMapOvr>
+    <a:masterClrMapping/>
+  </p:clrMapOvr>
+</p:notes>
+</file>
+
+<file path=ppt/notesSlides/notesSlide15.xml><?xml version="1.0" encoding="utf-8"?>
+<p:notes xmlns:a="http://schemas.openxmlformats.org/drawingml/2006/main" xmlns:r="http://schemas.openxmlformats.org/officeDocument/2006/relationships" xmlns:p="http://schemas.openxmlformats.org/presentationml/2006/main">
+  <p:cSld>
+    <p:spTree>
+      <p:nvGrpSpPr>
+        <p:cNvPr id="1" name=""/>
+        <p:cNvGrpSpPr/>
+        <p:nvPr/>
+      </p:nvGrpSpPr>
+      <p:grpSpPr>
+        <a:xfrm>
+          <a:off x="0" y="0"/>
+          <a:ext cx="0" cy="0"/>
+          <a:chOff x="0" y="0"/>
+          <a:chExt cx="0" cy="0"/>
+        </a:xfrm>
+      </p:grpSpPr>
+      <p:sp>
+        <p:nvSpPr>
+          <p:cNvPr id="2" name="Slide Image Placeholder 1"/>
+          <p:cNvSpPr>
+            <a:spLocks noGrp="1" noRot="1" noChangeAspect="1"/>
+          </p:cNvSpPr>
+          <p:nvPr>
+            <p:ph type="sldImg"/>
+          </p:nvPr>
+        </p:nvSpPr>
+        <p:spPr/>
+      </p:sp>
+      <p:sp>
+        <p:nvSpPr>
+          <p:cNvPr id="3" name="Notes Placeholder 2"/>
+          <p:cNvSpPr>
+            <a:spLocks noGrp="1"/>
+          </p:cNvSpPr>
+          <p:nvPr>
+            <p:ph type="body" idx="1"/>
+          </p:nvPr>
+        </p:nvSpPr>
+        <p:spPr/>
+        <p:txBody>
+          <a:bodyPr/>
+          <a:lstStyle/>
+          <a:p>
+            <a:r>
+              <a:rPr lang="en-US" dirty="0"/>
+              <a:t>This shows the ACTUAL flow of data through our pipeline. Each agent builds on all previous work. The CEO takes 30 seconds, the Engineer takes 3 minutes because it generates a full codebase. Total time: 5-8 minutes. Total cost: about $0.26. The output is a complete downloadable project.</a:t>
+            </a:r>
+            <a:endParaRPr lang="en-US" dirty="0"/>
+          </a:p>
+        </p:txBody>
+      </p:sp>
+      <p:sp>
+        <p:nvSpPr>
+          <p:cNvPr id="4" name="Slide Number Placeholder 3"/>
+          <p:cNvSpPr>
+            <a:spLocks noGrp="1"/>
+          </p:cNvSpPr>
+          <p:nvPr>
+            <p:ph type="sldNum" sz="quarter" idx="10"/>
+          </p:nvPr>
+        </p:nvSpPr>
+        <p:spPr/>
+        <p:txBody>
+          <a:bodyPr/>
+          <a:lstStyle/>
+          <a:p>
+            <a:fld id="{F7021451-1387-4CA6-816F-3879F97B5CBC}" type="slidenum">
+              <a:rPr lang="en-US"/>
+              <a:t>15</a:t>
+            </a:fld>
+            <a:endParaRPr lang="en-US"/>
+          </a:p>
+        </p:txBody>
+      </p:sp>
+    </p:spTree>
+    <p:extLst>
+      <p:ext uri="{BB962C8B-B14F-4D97-AF65-F5344CB8AC3E}">
+        <p14:creationId xmlns:p14="http://schemas.microsoft.com/office/powerpoint/2010/main" val="1024086991"/>
+      </p:ext>
+    </p:extLst>
+  </p:cSld>
+  <p:clrMapOvr>
+    <a:masterClrMapping/>
+  </p:clrMapOvr>
+</p:notes>
+</file>
+
+<file path=ppt/notesSlides/notesSlide16.xml><?xml version="1.0" encoding="utf-8"?>
+<p:notes xmlns:a="http://schemas.openxmlformats.org/drawingml/2006/main" xmlns:r="http://schemas.openxmlformats.org/officeDocument/2006/relationships" xmlns:p="http://schemas.openxmlformats.org/presentationml/2006/main">
+  <p:cSld>
+    <p:spTree>
+      <p:nvGrpSpPr>
+        <p:cNvPr id="1" name=""/>
+        <p:cNvGrpSpPr/>
+        <p:nvPr/>
+      </p:nvGrpSpPr>
+      <p:grpSpPr>
+        <a:xfrm>
+          <a:off x="0" y="0"/>
+          <a:ext cx="0" cy="0"/>
+          <a:chOff x="0" y="0"/>
+          <a:chExt cx="0" cy="0"/>
+        </a:xfrm>
+      </p:grpSpPr>
+      <p:sp>
+        <p:nvSpPr>
+          <p:cNvPr id="2" name="Slide Image Placeholder 1"/>
+          <p:cNvSpPr>
+            <a:spLocks noGrp="1" noRot="1" noChangeAspect="1"/>
+          </p:cNvSpPr>
+          <p:nvPr>
+            <p:ph type="sldImg"/>
+          </p:nvPr>
+        </p:nvSpPr>
+        <p:spPr/>
+      </p:sp>
+      <p:sp>
+        <p:nvSpPr>
+          <p:cNvPr id="3" name="Notes Placeholder 2"/>
+          <p:cNvSpPr>
+            <a:spLocks noGrp="1"/>
+          </p:cNvSpPr>
+          <p:nvPr>
+            <p:ph type="body" idx="1"/>
+          </p:nvPr>
+        </p:nvSpPr>
+        <p:spPr/>
+        <p:txBody>
+          <a:bodyPr/>
+          <a:lstStyle/>
+          <a:p>
+            <a:r>
+              <a:rPr lang="en-US" dirty="0"/>
+              <a:t>Each agent is a specialist. The CEO is like a startup founder who creates the vision. The BA turns that into actionable requirements. The Researcher goes out to the real internet to ground everything in facts. The Architect designs the system. The Engineer writes actual, runnable code using Claude Sonnet 4 — the most expensive but most capable model. And the PPT agent creates the presentation. Notice: 5 agents use the free Gemma model, only the Engineer uses paid Claude — that's why it costs just $0.26 per run.</a:t>
+            </a:r>
+            <a:endParaRPr lang="en-US" dirty="0"/>
+          </a:p>
+        </p:txBody>
+      </p:sp>
+      <p:sp>
+        <p:nvSpPr>
+          <p:cNvPr id="4" name="Slide Number Placeholder 3"/>
+          <p:cNvSpPr>
+            <a:spLocks noGrp="1"/>
+          </p:cNvSpPr>
+          <p:nvPr>
+            <p:ph type="sldNum" sz="quarter" idx="10"/>
+          </p:nvPr>
+        </p:nvSpPr>
+        <p:spPr/>
+        <p:txBody>
+          <a:bodyPr/>
+          <a:lstStyle/>
+          <a:p>
+            <a:fld id="{F7021451-1387-4CA6-816F-3879F97B5CBC}" type="slidenum">
+              <a:rPr lang="en-US"/>
+              <a:t>16</a:t>
+            </a:fld>
+            <a:endParaRPr lang="en-US"/>
+          </a:p>
+        </p:txBody>
+      </p:sp>
+    </p:spTree>
+    <p:extLst>
+      <p:ext uri="{BB962C8B-B14F-4D97-AF65-F5344CB8AC3E}">
+        <p14:creationId xmlns:p14="http://schemas.microsoft.com/office/powerpoint/2010/main" val="1024086991"/>
+      </p:ext>
+    </p:extLst>
+  </p:cSld>
+  <p:clrMapOvr>
+    <a:masterClrMapping/>
+  </p:clrMapOvr>
+</p:notes>
+</file>
+
+<file path=ppt/notesSlides/notesSlide17.xml><?xml version="1.0" encoding="utf-8"?>
+<p:notes xmlns:a="http://schemas.openxmlformats.org/drawingml/2006/main" xmlns:r="http://schemas.openxmlformats.org/officeDocument/2006/relationships" xmlns:p="http://schemas.openxmlformats.org/presentationml/2006/main">
+  <p:cSld>
+    <p:spTree>
+      <p:nvGrpSpPr>
+        <p:cNvPr id="1" name=""/>
+        <p:cNvGrpSpPr/>
+        <p:nvPr/>
+      </p:nvGrpSpPr>
+      <p:grpSpPr>
+        <a:xfrm>
+          <a:off x="0" y="0"/>
+          <a:ext cx="0" cy="0"/>
+          <a:chOff x="0" y="0"/>
+          <a:chExt cx="0" cy="0"/>
+        </a:xfrm>
+      </p:grpSpPr>
+      <p:sp>
+        <p:nvSpPr>
+          <p:cNvPr id="2" name="Slide Image Placeholder 1"/>
+          <p:cNvSpPr>
+            <a:spLocks noGrp="1" noRot="1" noChangeAspect="1"/>
+          </p:cNvSpPr>
+          <p:nvPr>
+            <p:ph type="sldImg"/>
+          </p:nvPr>
+        </p:nvSpPr>
+        <p:spPr/>
+      </p:sp>
+      <p:sp>
+        <p:nvSpPr>
+          <p:cNvPr id="3" name="Notes Placeholder 2"/>
+          <p:cNvSpPr>
+            <a:spLocks noGrp="1"/>
+          </p:cNvSpPr>
+          <p:nvPr>
+            <p:ph type="body" idx="1"/>
+          </p:nvPr>
+        </p:nvSpPr>
+        <p:spPr/>
+        <p:txBody>
+          <a:bodyPr/>
+          <a:lstStyle/>
+          <a:p>
+            <a:r>
+              <a:rPr lang="en-US" dirty="0"/>
+              <a:t>This is your moment! Agent AI is the most exciting field in tech right now, and it's still early enough that a college student can build something that competes with professional products. Start small — one agent, one tool. Then add complexity. The frameworks are free, the APIs have free tiers, and the community is incredibly supportive. Go build something amazing!</a:t>
+            </a:r>
+            <a:endParaRPr lang="en-US" dirty="0"/>
+          </a:p>
+        </p:txBody>
+      </p:sp>
+      <p:sp>
+        <p:nvSpPr>
+          <p:cNvPr id="4" name="Slide Number Placeholder 3"/>
+          <p:cNvSpPr>
+            <a:spLocks noGrp="1"/>
+          </p:cNvSpPr>
+          <p:nvPr>
+            <p:ph type="sldNum" sz="quarter" idx="10"/>
+          </p:nvPr>
+        </p:nvSpPr>
+        <p:spPr/>
+        <p:txBody>
+          <a:bodyPr/>
+          <a:lstStyle/>
+          <a:p>
+            <a:fld id="{F7021451-1387-4CA6-816F-3879F97B5CBC}" type="slidenum">
+              <a:rPr lang="en-US"/>
+              <a:t>17</a:t>
             </a:fld>
             <a:endParaRPr lang="en-US"/>
           </a:p>
@@ -2589,7 +2856,7 @@
                 <a:ea typeface="Arial" pitchFamily="34" charset="-122"/>
                 <a:cs typeface="Arial" pitchFamily="34" charset="-120"/>
               </a:rPr>
-              <a:t>10/14</a:t>
+              <a:t>10/17</a:t>
             </a:r>
             <a:endParaRPr lang="en-US" sz="900" dirty="0"/>
           </a:p>
@@ -3783,7 +4050,7 @@
                 <a:ea typeface="Arial" pitchFamily="34" charset="-122"/>
                 <a:cs typeface="Arial" pitchFamily="34" charset="-120"/>
               </a:rPr>
-              <a:t>11/14</a:t>
+              <a:t>11/17</a:t>
             </a:r>
             <a:endParaRPr lang="en-US" sz="900" dirty="0"/>
           </a:p>
@@ -5396,7 +5663,7 @@
                 <a:ea typeface="Arial" pitchFamily="34" charset="-122"/>
                 <a:cs typeface="Arial" pitchFamily="34" charset="-120"/>
               </a:rPr>
-              <a:t>12/14</a:t>
+              <a:t>12/17</a:t>
             </a:r>
             <a:endParaRPr lang="en-US" sz="900" dirty="0"/>
           </a:p>
@@ -6926,7 +7193,7 @@
                 <a:ea typeface="Arial" pitchFamily="34" charset="-122"/>
                 <a:cs typeface="Arial" pitchFamily="34" charset="-120"/>
               </a:rPr>
-              <a:t>13/14</a:t>
+              <a:t>13/17</a:t>
             </a:r>
             <a:endParaRPr lang="en-US" sz="900" dirty="0"/>
           </a:p>
@@ -9212,7 +9479,6017 @@
                 <a:ea typeface="Arial" pitchFamily="34" charset="-122"/>
                 <a:cs typeface="Arial" pitchFamily="34" charset="-120"/>
               </a:rPr>
-              <a:t>14/14</a:t>
+              <a:t>14/17</a:t>
+            </a:r>
+            <a:endParaRPr lang="en-US" sz="900" dirty="0"/>
+          </a:p>
+        </p:txBody>
+      </p:sp>
+      <p:sp>
+        <p:nvSpPr>
+          <p:cNvPr id="3" name="Text 1"/>
+          <p:cNvSpPr/>
+          <p:nvPr/>
+        </p:nvSpPr>
+        <p:spPr>
+          <a:xfrm>
+            <a:off x="640080" y="228600"/>
+            <a:ext cx="10881360" cy="594360"/>
+          </a:xfrm>
+          <a:prstGeom prst="rect">
+            <a:avLst/>
+          </a:prstGeom>
+          <a:noFill/>
+          <a:ln/>
+        </p:spPr>
+        <p:txBody>
+          <a:bodyPr wrap="square" lIns="0" tIns="0" rIns="0" bIns="0" rtlCol="0" anchor="ctr"/>
+          <a:lstStyle/>
+          <a:p>
+            <a:pPr indent="0" marL="0">
+              <a:buNone/>
+            </a:pPr>
+            <a:r>
+              <a:rPr lang="en-US" sz="3600" b="1" dirty="0">
+                <a:solidFill>
+                  <a:srgbClr val="FFFFFF"/>
+                </a:solidFill>
+                <a:latin typeface="Calibri" pitchFamily="34" charset="0"/>
+                <a:ea typeface="Calibri" pitchFamily="34" charset="-122"/>
+                <a:cs typeface="Calibri" pitchFamily="34" charset="-120"/>
+              </a:rPr>
+              <a:t>Building a Crop Disease Agent</a:t>
+            </a:r>
+            <a:endParaRPr lang="en-US" sz="3600" dirty="0"/>
+          </a:p>
+        </p:txBody>
+      </p:sp>
+      <p:sp>
+        <p:nvSpPr>
+          <p:cNvPr id="4" name="Text 2"/>
+          <p:cNvSpPr/>
+          <p:nvPr/>
+        </p:nvSpPr>
+        <p:spPr>
+          <a:xfrm>
+            <a:off x="640080" y="822960"/>
+            <a:ext cx="10881360" cy="320040"/>
+          </a:xfrm>
+          <a:prstGeom prst="rect">
+            <a:avLst/>
+          </a:prstGeom>
+          <a:noFill/>
+          <a:ln/>
+        </p:spPr>
+        <p:txBody>
+          <a:bodyPr wrap="square" lIns="0" tIns="0" rIns="0" bIns="0" rtlCol="0" anchor="ctr"/>
+          <a:lstStyle/>
+          <a:p>
+            <a:pPr indent="0" marL="0">
+              <a:buNone/>
+            </a:pPr>
+            <a:r>
+              <a:rPr lang="en-US" sz="1300" dirty="0">
+                <a:solidFill>
+                  <a:srgbClr val="94A3B8"/>
+                </a:solidFill>
+                <a:latin typeface="Arial" pitchFamily="34" charset="0"/>
+                <a:ea typeface="Arial" pitchFamily="34" charset="-122"/>
+                <a:cs typeface="Arial" pitchFamily="34" charset="-120"/>
+              </a:rPr>
+              <a:t>Process example: from problem statement to working agent in 7 steps</a:t>
+            </a:r>
+            <a:endParaRPr lang="en-US" sz="1300" dirty="0"/>
+          </a:p>
+        </p:txBody>
+      </p:sp>
+      <p:sp>
+        <p:nvSpPr>
+          <p:cNvPr id="5" name="Shape 3"/>
+          <p:cNvSpPr/>
+          <p:nvPr/>
+        </p:nvSpPr>
+        <p:spPr>
+          <a:xfrm>
+            <a:off x="457200" y="1280160"/>
+            <a:ext cx="5577840" cy="1097280"/>
+          </a:xfrm>
+          <a:prstGeom prst="roundRect">
+            <a:avLst>
+              <a:gd name="adj" fmla="val 10000"/>
+            </a:avLst>
+          </a:prstGeom>
+          <a:solidFill>
+            <a:srgbClr val="1A1A2E"/>
+          </a:solidFill>
+          <a:ln w="19050">
+            <a:solidFill>
+              <a:srgbClr val="EF4444"/>
+            </a:solidFill>
+            <a:prstDash val="solid"/>
+          </a:ln>
+          <a:effectLst>
+            <a:outerShdw sx="100000" sy="100000" kx="0" ky="0" algn="bl" rotWithShape="0" blurRad="76200" dist="38100" dir="18900000">
+              <a:srgbClr val="000000">
+                <a:alpha val="25000"/>
+              </a:srgbClr>
+            </a:outerShdw>
+          </a:effectLst>
+        </p:spPr>
+      </p:sp>
+      <p:sp>
+        <p:nvSpPr>
+          <p:cNvPr id="6" name="Text 4"/>
+          <p:cNvSpPr/>
+          <p:nvPr/>
+        </p:nvSpPr>
+        <p:spPr>
+          <a:xfrm>
+            <a:off x="640080" y="1371600"/>
+            <a:ext cx="1371600" cy="320040"/>
+          </a:xfrm>
+          <a:prstGeom prst="rect">
+            <a:avLst/>
+          </a:prstGeom>
+          <a:noFill/>
+          <a:ln/>
+        </p:spPr>
+        <p:txBody>
+          <a:bodyPr wrap="square" lIns="0" tIns="0" rIns="0" bIns="0" rtlCol="0" anchor="ctr"/>
+          <a:lstStyle/>
+          <a:p>
+            <a:pPr indent="0" marL="0">
+              <a:buNone/>
+            </a:pPr>
+            <a:r>
+              <a:rPr lang="en-US" sz="1400" b="1" dirty="0">
+                <a:solidFill>
+                  <a:srgbClr val="EF4444"/>
+                </a:solidFill>
+                <a:latin typeface="Calibri" pitchFamily="34" charset="0"/>
+                <a:ea typeface="Calibri" pitchFamily="34" charset="-122"/>
+                <a:cs typeface="Calibri" pitchFamily="34" charset="-120"/>
+              </a:rPr>
+              <a:t>PROBLEM</a:t>
+            </a:r>
+            <a:endParaRPr lang="en-US" sz="1400" dirty="0"/>
+          </a:p>
+        </p:txBody>
+      </p:sp>
+      <p:sp>
+        <p:nvSpPr>
+          <p:cNvPr id="7" name="Text 5"/>
+          <p:cNvSpPr/>
+          <p:nvPr/>
+        </p:nvSpPr>
+        <p:spPr>
+          <a:xfrm>
+            <a:off x="640080" y="1691640"/>
+            <a:ext cx="5212080" cy="502920"/>
+          </a:xfrm>
+          <a:prstGeom prst="rect">
+            <a:avLst/>
+          </a:prstGeom>
+          <a:noFill/>
+          <a:ln/>
+        </p:spPr>
+        <p:txBody>
+          <a:bodyPr wrap="square" lIns="0" tIns="0" rIns="0" bIns="0" rtlCol="0" anchor="ctr"/>
+          <a:lstStyle/>
+          <a:p>
+            <a:pPr indent="0" marL="0">
+              <a:buNone/>
+            </a:pPr>
+            <a:r>
+              <a:rPr lang="en-US" sz="1300" i="1" dirty="0">
+                <a:solidFill>
+                  <a:srgbClr val="FFFFFF"/>
+                </a:solidFill>
+                <a:latin typeface="Arial" pitchFamily="34" charset="0"/>
+                <a:ea typeface="Arial" pitchFamily="34" charset="-122"/>
+                <a:cs typeface="Arial" pitchFamily="34" charset="-120"/>
+              </a:rPr>
+              <a:t>"Farmers in rural India struggle to identify crop diseases and find treatments"</a:t>
+            </a:r>
+            <a:endParaRPr lang="en-US" sz="1300" dirty="0"/>
+          </a:p>
+        </p:txBody>
+      </p:sp>
+      <p:sp>
+        <p:nvSpPr>
+          <p:cNvPr id="8" name="Text 6"/>
+          <p:cNvSpPr/>
+          <p:nvPr/>
+        </p:nvSpPr>
+        <p:spPr>
+          <a:xfrm>
+            <a:off x="457200" y="2606040"/>
+            <a:ext cx="5577840" cy="320040"/>
+          </a:xfrm>
+          <a:prstGeom prst="rect">
+            <a:avLst/>
+          </a:prstGeom>
+          <a:noFill/>
+          <a:ln/>
+        </p:spPr>
+        <p:txBody>
+          <a:bodyPr wrap="square" lIns="0" tIns="0" rIns="0" bIns="0" rtlCol="0" anchor="ctr"/>
+          <a:lstStyle/>
+          <a:p>
+            <a:pPr indent="0" marL="0">
+              <a:buNone/>
+            </a:pPr>
+            <a:r>
+              <a:rPr lang="en-US" sz="1300" b="1" dirty="0">
+                <a:solidFill>
+                  <a:srgbClr val="00D4FF"/>
+                </a:solidFill>
+                <a:latin typeface="Calibri" pitchFamily="34" charset="0"/>
+                <a:ea typeface="Calibri" pitchFamily="34" charset="-122"/>
+                <a:cs typeface="Calibri" pitchFamily="34" charset="-120"/>
+              </a:rPr>
+              <a:t>Step 1: Decompose — What would a human expert do?</a:t>
+            </a:r>
+            <a:endParaRPr lang="en-US" sz="1300" dirty="0"/>
+          </a:p>
+        </p:txBody>
+      </p:sp>
+      <p:sp>
+        <p:nvSpPr>
+          <p:cNvPr id="9" name="Text 7"/>
+          <p:cNvSpPr/>
+          <p:nvPr/>
+        </p:nvSpPr>
+        <p:spPr>
+          <a:xfrm>
+            <a:off x="640080" y="2971800"/>
+            <a:ext cx="5212080" cy="320040"/>
+          </a:xfrm>
+          <a:prstGeom prst="rect">
+            <a:avLst/>
+          </a:prstGeom>
+          <a:noFill/>
+          <a:ln/>
+        </p:spPr>
+        <p:txBody>
+          <a:bodyPr wrap="square" lIns="0" tIns="0" rIns="0" bIns="0" rtlCol="0" anchor="ctr"/>
+          <a:lstStyle/>
+          <a:p>
+            <a:pPr indent="0" marL="0">
+              <a:buNone/>
+            </a:pPr>
+            <a:r>
+              <a:rPr lang="en-US" sz="1150" dirty="0">
+                <a:solidFill>
+                  <a:srgbClr val="CBD5E1"/>
+                </a:solidFill>
+                <a:latin typeface="Arial" pitchFamily="34" charset="0"/>
+                <a:ea typeface="Arial" pitchFamily="34" charset="-122"/>
+                <a:cs typeface="Arial" pitchFamily="34" charset="-120"/>
+              </a:rPr>
+              <a:t>1. Accept a photo of the crop</a:t>
+            </a:r>
+            <a:endParaRPr lang="en-US" sz="1150" dirty="0"/>
+          </a:p>
+        </p:txBody>
+      </p:sp>
+      <p:sp>
+        <p:nvSpPr>
+          <p:cNvPr id="10" name="Text 8"/>
+          <p:cNvSpPr/>
+          <p:nvPr/>
+        </p:nvSpPr>
+        <p:spPr>
+          <a:xfrm>
+            <a:off x="640080" y="3319272"/>
+            <a:ext cx="5212080" cy="320040"/>
+          </a:xfrm>
+          <a:prstGeom prst="rect">
+            <a:avLst/>
+          </a:prstGeom>
+          <a:noFill/>
+          <a:ln/>
+        </p:spPr>
+        <p:txBody>
+          <a:bodyPr wrap="square" lIns="0" tIns="0" rIns="0" bIns="0" rtlCol="0" anchor="ctr"/>
+          <a:lstStyle/>
+          <a:p>
+            <a:pPr indent="0" marL="0">
+              <a:buNone/>
+            </a:pPr>
+            <a:r>
+              <a:rPr lang="en-US" sz="1150" dirty="0">
+                <a:solidFill>
+                  <a:srgbClr val="CBD5E1"/>
+                </a:solidFill>
+                <a:latin typeface="Arial" pitchFamily="34" charset="0"/>
+                <a:ea typeface="Arial" pitchFamily="34" charset="-122"/>
+                <a:cs typeface="Arial" pitchFamily="34" charset="-120"/>
+              </a:rPr>
+              <a:t>2. Identify the disease from symptoms</a:t>
+            </a:r>
+            <a:endParaRPr lang="en-US" sz="1150" dirty="0"/>
+          </a:p>
+        </p:txBody>
+      </p:sp>
+      <p:sp>
+        <p:nvSpPr>
+          <p:cNvPr id="11" name="Text 9"/>
+          <p:cNvSpPr/>
+          <p:nvPr/>
+        </p:nvSpPr>
+        <p:spPr>
+          <a:xfrm>
+            <a:off x="640080" y="3666744"/>
+            <a:ext cx="5212080" cy="320040"/>
+          </a:xfrm>
+          <a:prstGeom prst="rect">
+            <a:avLst/>
+          </a:prstGeom>
+          <a:noFill/>
+          <a:ln/>
+        </p:spPr>
+        <p:txBody>
+          <a:bodyPr wrap="square" lIns="0" tIns="0" rIns="0" bIns="0" rtlCol="0" anchor="ctr"/>
+          <a:lstStyle/>
+          <a:p>
+            <a:pPr indent="0" marL="0">
+              <a:buNone/>
+            </a:pPr>
+            <a:r>
+              <a:rPr lang="en-US" sz="1150" dirty="0">
+                <a:solidFill>
+                  <a:srgbClr val="CBD5E1"/>
+                </a:solidFill>
+                <a:latin typeface="Arial" pitchFamily="34" charset="0"/>
+                <a:ea typeface="Arial" pitchFamily="34" charset="-122"/>
+                <a:cs typeface="Arial" pitchFamily="34" charset="-120"/>
+              </a:rPr>
+              <a:t>3. Search for treatments</a:t>
+            </a:r>
+            <a:endParaRPr lang="en-US" sz="1150" dirty="0"/>
+          </a:p>
+        </p:txBody>
+      </p:sp>
+      <p:sp>
+        <p:nvSpPr>
+          <p:cNvPr id="12" name="Text 10"/>
+          <p:cNvSpPr/>
+          <p:nvPr/>
+        </p:nvSpPr>
+        <p:spPr>
+          <a:xfrm>
+            <a:off x="640080" y="4014216"/>
+            <a:ext cx="5212080" cy="320040"/>
+          </a:xfrm>
+          <a:prstGeom prst="rect">
+            <a:avLst/>
+          </a:prstGeom>
+          <a:noFill/>
+          <a:ln/>
+        </p:spPr>
+        <p:txBody>
+          <a:bodyPr wrap="square" lIns="0" tIns="0" rIns="0" bIns="0" rtlCol="0" anchor="ctr"/>
+          <a:lstStyle/>
+          <a:p>
+            <a:pPr indent="0" marL="0">
+              <a:buNone/>
+            </a:pPr>
+            <a:r>
+              <a:rPr lang="en-US" sz="1150" dirty="0">
+                <a:solidFill>
+                  <a:srgbClr val="CBD5E1"/>
+                </a:solidFill>
+                <a:latin typeface="Arial" pitchFamily="34" charset="0"/>
+                <a:ea typeface="Arial" pitchFamily="34" charset="-122"/>
+                <a:cs typeface="Arial" pitchFamily="34" charset="-120"/>
+              </a:rPr>
+              <a:t>4. Find locally available pesticides</a:t>
+            </a:r>
+            <a:endParaRPr lang="en-US" sz="1150" dirty="0"/>
+          </a:p>
+        </p:txBody>
+      </p:sp>
+      <p:sp>
+        <p:nvSpPr>
+          <p:cNvPr id="13" name="Text 11"/>
+          <p:cNvSpPr/>
+          <p:nvPr/>
+        </p:nvSpPr>
+        <p:spPr>
+          <a:xfrm>
+            <a:off x="640080" y="4361688"/>
+            <a:ext cx="5212080" cy="320040"/>
+          </a:xfrm>
+          <a:prstGeom prst="rect">
+            <a:avLst/>
+          </a:prstGeom>
+          <a:noFill/>
+          <a:ln/>
+        </p:spPr>
+        <p:txBody>
+          <a:bodyPr wrap="square" lIns="0" tIns="0" rIns="0" bIns="0" rtlCol="0" anchor="ctr"/>
+          <a:lstStyle/>
+          <a:p>
+            <a:pPr indent="0" marL="0">
+              <a:buNone/>
+            </a:pPr>
+            <a:r>
+              <a:rPr lang="en-US" sz="1150" dirty="0">
+                <a:solidFill>
+                  <a:srgbClr val="CBD5E1"/>
+                </a:solidFill>
+                <a:latin typeface="Arial" pitchFamily="34" charset="0"/>
+                <a:ea typeface="Arial" pitchFamily="34" charset="-122"/>
+                <a:cs typeface="Arial" pitchFamily="34" charset="-120"/>
+              </a:rPr>
+              <a:t>5. Respond in the farmer's language</a:t>
+            </a:r>
+            <a:endParaRPr lang="en-US" sz="1150" dirty="0"/>
+          </a:p>
+        </p:txBody>
+      </p:sp>
+      <p:sp>
+        <p:nvSpPr>
+          <p:cNvPr id="14" name="Text 12"/>
+          <p:cNvSpPr/>
+          <p:nvPr/>
+        </p:nvSpPr>
+        <p:spPr>
+          <a:xfrm>
+            <a:off x="457200" y="4800600"/>
+            <a:ext cx="2743200" cy="274320"/>
+          </a:xfrm>
+          <a:prstGeom prst="rect">
+            <a:avLst/>
+          </a:prstGeom>
+          <a:noFill/>
+          <a:ln/>
+        </p:spPr>
+        <p:txBody>
+          <a:bodyPr wrap="square" lIns="0" tIns="0" rIns="0" bIns="0" rtlCol="0" anchor="ctr"/>
+          <a:lstStyle/>
+          <a:p>
+            <a:pPr indent="0" marL="0">
+              <a:buNone/>
+            </a:pPr>
+            <a:r>
+              <a:rPr lang="en-US" sz="1300" b="1" dirty="0">
+                <a:solidFill>
+                  <a:srgbClr val="10B981"/>
+                </a:solidFill>
+                <a:latin typeface="Calibri" pitchFamily="34" charset="0"/>
+                <a:ea typeface="Calibri" pitchFamily="34" charset="-122"/>
+                <a:cs typeface="Calibri" pitchFamily="34" charset="-120"/>
+              </a:rPr>
+              <a:t>Step 2: Architecture</a:t>
+            </a:r>
+            <a:endParaRPr lang="en-US" sz="1300" dirty="0"/>
+          </a:p>
+        </p:txBody>
+      </p:sp>
+      <p:sp>
+        <p:nvSpPr>
+          <p:cNvPr id="15" name="Text 13"/>
+          <p:cNvSpPr/>
+          <p:nvPr/>
+        </p:nvSpPr>
+        <p:spPr>
+          <a:xfrm>
+            <a:off x="640080" y="5074920"/>
+            <a:ext cx="2560320" cy="228600"/>
+          </a:xfrm>
+          <a:prstGeom prst="rect">
+            <a:avLst/>
+          </a:prstGeom>
+          <a:noFill/>
+          <a:ln/>
+        </p:spPr>
+        <p:txBody>
+          <a:bodyPr wrap="square" lIns="0" tIns="0" rIns="0" bIns="0" rtlCol="0" anchor="ctr"/>
+          <a:lstStyle/>
+          <a:p>
+            <a:pPr indent="0" marL="0">
+              <a:buNone/>
+            </a:pPr>
+            <a:r>
+              <a:rPr lang="en-US" sz="1100" dirty="0">
+                <a:solidFill>
+                  <a:srgbClr val="CBD5E1"/>
+                </a:solidFill>
+                <a:latin typeface="Arial" pitchFamily="34" charset="0"/>
+                <a:ea typeface="Arial" pitchFamily="34" charset="-122"/>
+                <a:cs typeface="Arial" pitchFamily="34" charset="-120"/>
+              </a:rPr>
+              <a:t>Single agent + 3 tools</a:t>
+            </a:r>
+            <a:endParaRPr lang="en-US" sz="1100" dirty="0"/>
+          </a:p>
+        </p:txBody>
+      </p:sp>
+      <p:sp>
+        <p:nvSpPr>
+          <p:cNvPr id="16" name="Text 14"/>
+          <p:cNvSpPr/>
+          <p:nvPr/>
+        </p:nvSpPr>
+        <p:spPr>
+          <a:xfrm>
+            <a:off x="3200400" y="4800600"/>
+            <a:ext cx="2743200" cy="274320"/>
+          </a:xfrm>
+          <a:prstGeom prst="rect">
+            <a:avLst/>
+          </a:prstGeom>
+          <a:noFill/>
+          <a:ln/>
+        </p:spPr>
+        <p:txBody>
+          <a:bodyPr wrap="square" lIns="0" tIns="0" rIns="0" bIns="0" rtlCol="0" anchor="ctr"/>
+          <a:lstStyle/>
+          <a:p>
+            <a:pPr indent="0" marL="0">
+              <a:buNone/>
+            </a:pPr>
+            <a:r>
+              <a:rPr lang="en-US" sz="1300" b="1" dirty="0">
+                <a:solidFill>
+                  <a:srgbClr val="F59E0B"/>
+                </a:solidFill>
+                <a:latin typeface="Calibri" pitchFamily="34" charset="0"/>
+                <a:ea typeface="Calibri" pitchFamily="34" charset="-122"/>
+                <a:cs typeface="Calibri" pitchFamily="34" charset="-120"/>
+              </a:rPr>
+              <a:t>Step 3: Tools</a:t>
+            </a:r>
+            <a:endParaRPr lang="en-US" sz="1300" dirty="0"/>
+          </a:p>
+        </p:txBody>
+      </p:sp>
+      <p:sp>
+        <p:nvSpPr>
+          <p:cNvPr id="17" name="Text 15"/>
+          <p:cNvSpPr/>
+          <p:nvPr/>
+        </p:nvSpPr>
+        <p:spPr>
+          <a:xfrm>
+            <a:off x="3383280" y="5074920"/>
+            <a:ext cx="2560320" cy="228600"/>
+          </a:xfrm>
+          <a:prstGeom prst="rect">
+            <a:avLst/>
+          </a:prstGeom>
+          <a:noFill/>
+          <a:ln/>
+        </p:spPr>
+        <p:txBody>
+          <a:bodyPr wrap="square" lIns="0" tIns="0" rIns="0" bIns="0" rtlCol="0" anchor="ctr"/>
+          <a:lstStyle/>
+          <a:p>
+            <a:pPr indent="0" marL="0">
+              <a:buNone/>
+            </a:pPr>
+            <a:r>
+              <a:rPr lang="en-US" sz="1100" dirty="0">
+                <a:solidFill>
+                  <a:srgbClr val="CBD5E1"/>
+                </a:solidFill>
+                <a:latin typeface="Arial" pitchFamily="34" charset="0"/>
+                <a:ea typeface="Arial" pitchFamily="34" charset="-122"/>
+                <a:cs typeface="Arial" pitchFamily="34" charset="-120"/>
+              </a:rPr>
+              <a:t>Vision API + Web Search + DB</a:t>
+            </a:r>
+            <a:endParaRPr lang="en-US" sz="1100" dirty="0"/>
+          </a:p>
+        </p:txBody>
+      </p:sp>
+      <p:sp>
+        <p:nvSpPr>
+          <p:cNvPr id="18" name="Shape 16"/>
+          <p:cNvSpPr/>
+          <p:nvPr/>
+        </p:nvSpPr>
+        <p:spPr>
+          <a:xfrm>
+            <a:off x="6309360" y="1280160"/>
+            <a:ext cx="5394960" cy="2560320"/>
+          </a:xfrm>
+          <a:prstGeom prst="roundRect">
+            <a:avLst>
+              <a:gd name="adj" fmla="val 4286"/>
+            </a:avLst>
+          </a:prstGeom>
+          <a:solidFill>
+            <a:srgbClr val="0D1117"/>
+          </a:solidFill>
+          <a:ln w="19050">
+            <a:solidFill>
+              <a:srgbClr val="7C3AED"/>
+            </a:solidFill>
+            <a:prstDash val="solid"/>
+          </a:ln>
+          <a:effectLst>
+            <a:outerShdw sx="100000" sy="100000" kx="0" ky="0" algn="bl" rotWithShape="0" blurRad="76200" dist="38100" dir="18900000">
+              <a:srgbClr val="000000">
+                <a:alpha val="25000"/>
+              </a:srgbClr>
+            </a:outerShdw>
+          </a:effectLst>
+        </p:spPr>
+      </p:sp>
+      <p:sp>
+        <p:nvSpPr>
+          <p:cNvPr id="19" name="Text 17"/>
+          <p:cNvSpPr/>
+          <p:nvPr/>
+        </p:nvSpPr>
+        <p:spPr>
+          <a:xfrm>
+            <a:off x="6492240" y="1371600"/>
+            <a:ext cx="5029200" cy="274320"/>
+          </a:xfrm>
+          <a:prstGeom prst="rect">
+            <a:avLst/>
+          </a:prstGeom>
+          <a:noFill/>
+          <a:ln/>
+        </p:spPr>
+        <p:txBody>
+          <a:bodyPr wrap="square" lIns="0" tIns="0" rIns="0" bIns="0" rtlCol="0" anchor="ctr"/>
+          <a:lstStyle/>
+          <a:p>
+            <a:pPr indent="0" marL="0">
+              <a:buNone/>
+            </a:pPr>
+            <a:r>
+              <a:rPr lang="en-US" sz="1300" b="1" dirty="0">
+                <a:solidFill>
+                  <a:srgbClr val="7C3AED"/>
+                </a:solidFill>
+                <a:latin typeface="Calibri" pitchFamily="34" charset="0"/>
+                <a:ea typeface="Calibri" pitchFamily="34" charset="-122"/>
+                <a:cs typeface="Calibri" pitchFamily="34" charset="-120"/>
+              </a:rPr>
+              <a:t>Step 4: System Prompt</a:t>
+            </a:r>
+            <a:endParaRPr lang="en-US" sz="1300" dirty="0"/>
+          </a:p>
+        </p:txBody>
+      </p:sp>
+      <p:sp>
+        <p:nvSpPr>
+          <p:cNvPr id="20" name="Text 18"/>
+          <p:cNvSpPr/>
+          <p:nvPr/>
+        </p:nvSpPr>
+        <p:spPr>
+          <a:xfrm>
+            <a:off x="6492240" y="1691640"/>
+            <a:ext cx="5029200" cy="2011680"/>
+          </a:xfrm>
+          <a:prstGeom prst="rect">
+            <a:avLst/>
+          </a:prstGeom>
+          <a:noFill/>
+          <a:ln/>
+        </p:spPr>
+        <p:txBody>
+          <a:bodyPr wrap="square" lIns="0" tIns="0" rIns="0" bIns="0" rtlCol="0" anchor="ctr"/>
+          <a:lstStyle/>
+          <a:p>
+            <a:pPr indent="0" marL="0">
+              <a:lnSpc>
+                <a:spcPct val="105000"/>
+              </a:lnSpc>
+              <a:buNone/>
+            </a:pPr>
+            <a:r>
+              <a:rPr lang="en-US" sz="1000" dirty="0">
+                <a:solidFill>
+                  <a:srgbClr val="CBD5E1"/>
+                </a:solidFill>
+                <a:latin typeface="Courier New" pitchFamily="34" charset="0"/>
+                <a:ea typeface="Courier New" pitchFamily="34" charset="-122"/>
+                <a:cs typeface="Courier New" pitchFamily="34" charset="-120"/>
+              </a:rPr>
+              <a:t>You are an agricultural expert AI</a:t>
+            </a:r>
+            <a:endParaRPr lang="en-US" sz="1000" dirty="0"/>
+          </a:p>
+          <a:p>
+            <a:pPr indent="0" marL="0">
+              <a:lnSpc>
+                <a:spcPct val="105000"/>
+              </a:lnSpc>
+              <a:buNone/>
+            </a:pPr>
+            <a:r>
+              <a:rPr lang="en-US" sz="1000" dirty="0">
+                <a:solidFill>
+                  <a:srgbClr val="CBD5E1"/>
+                </a:solidFill>
+                <a:latin typeface="Courier New" pitchFamily="34" charset="0"/>
+                <a:ea typeface="Courier New" pitchFamily="34" charset="-122"/>
+                <a:cs typeface="Courier New" pitchFamily="34" charset="-120"/>
+              </a:rPr>
+              <a:t>specializing in Indian crop diseases.</a:t>
+            </a:r>
+            <a:endParaRPr lang="en-US" sz="1000" dirty="0"/>
+          </a:p>
+          <a:p>
+            <a:pPr indent="0" marL="0">
+              <a:lnSpc>
+                <a:spcPct val="105000"/>
+              </a:lnSpc>
+              <a:buNone/>
+            </a:pPr>
+            <a:endParaRPr lang="en-US" sz="1000" dirty="0"/>
+          </a:p>
+          <a:p>
+            <a:pPr indent="0" marL="0">
+              <a:lnSpc>
+                <a:spcPct val="105000"/>
+              </a:lnSpc>
+              <a:buNone/>
+            </a:pPr>
+            <a:r>
+              <a:rPr lang="en-US" sz="1000" dirty="0">
+                <a:solidFill>
+                  <a:srgbClr val="CBD5E1"/>
+                </a:solidFill>
+                <a:latin typeface="Courier New" pitchFamily="34" charset="0"/>
+                <a:ea typeface="Courier New" pitchFamily="34" charset="-122"/>
+                <a:cs typeface="Courier New" pitchFamily="34" charset="-120"/>
+              </a:rPr>
+              <a:t>Goal: Identify diseases from photos</a:t>
+            </a:r>
+            <a:endParaRPr lang="en-US" sz="1000" dirty="0"/>
+          </a:p>
+          <a:p>
+            <a:pPr indent="0" marL="0">
+              <a:lnSpc>
+                <a:spcPct val="105000"/>
+              </a:lnSpc>
+              <a:buNone/>
+            </a:pPr>
+            <a:r>
+              <a:rPr lang="en-US" sz="1000" dirty="0">
+                <a:solidFill>
+                  <a:srgbClr val="CBD5E1"/>
+                </a:solidFill>
+                <a:latin typeface="Courier New" pitchFamily="34" charset="0"/>
+                <a:ea typeface="Courier New" pitchFamily="34" charset="-122"/>
+                <a:cs typeface="Courier New" pitchFamily="34" charset="-120"/>
+              </a:rPr>
+              <a:t>and recommend local treatments.</a:t>
+            </a:r>
+            <a:endParaRPr lang="en-US" sz="1000" dirty="0"/>
+          </a:p>
+          <a:p>
+            <a:pPr indent="0" marL="0">
+              <a:lnSpc>
+                <a:spcPct val="105000"/>
+              </a:lnSpc>
+              <a:buNone/>
+            </a:pPr>
+            <a:endParaRPr lang="en-US" sz="1000" dirty="0"/>
+          </a:p>
+          <a:p>
+            <a:pPr indent="0" marL="0">
+              <a:lnSpc>
+                <a:spcPct val="105000"/>
+              </a:lnSpc>
+              <a:buNone/>
+            </a:pPr>
+            <a:r>
+              <a:rPr lang="en-US" sz="1000" dirty="0">
+                <a:solidFill>
+                  <a:srgbClr val="CBD5E1"/>
+                </a:solidFill>
+                <a:latin typeface="Courier New" pitchFamily="34" charset="0"/>
+                <a:ea typeface="Courier New" pitchFamily="34" charset="-122"/>
+                <a:cs typeface="Courier New" pitchFamily="34" charset="-120"/>
+              </a:rPr>
+              <a:t>Tools: vision_api, web_search,</a:t>
+            </a:r>
+            <a:endParaRPr lang="en-US" sz="1000" dirty="0"/>
+          </a:p>
+          <a:p>
+            <a:pPr indent="0" marL="0">
+              <a:lnSpc>
+                <a:spcPct val="105000"/>
+              </a:lnSpc>
+              <a:buNone/>
+            </a:pPr>
+            <a:r>
+              <a:rPr lang="en-US" sz="1000" dirty="0">
+                <a:solidFill>
+                  <a:srgbClr val="CBD5E1"/>
+                </a:solidFill>
+                <a:latin typeface="Courier New" pitchFamily="34" charset="0"/>
+                <a:ea typeface="Courier New" pitchFamily="34" charset="-122"/>
+                <a:cs typeface="Courier New" pitchFamily="34" charset="-120"/>
+              </a:rPr>
+              <a:t>       pesticide_database</a:t>
+            </a:r>
+            <a:endParaRPr lang="en-US" sz="1000" dirty="0"/>
+          </a:p>
+          <a:p>
+            <a:pPr indent="0" marL="0">
+              <a:lnSpc>
+                <a:spcPct val="105000"/>
+              </a:lnSpc>
+              <a:buNone/>
+            </a:pPr>
+            <a:endParaRPr lang="en-US" sz="1000" dirty="0"/>
+          </a:p>
+          <a:p>
+            <a:pPr indent="0" marL="0">
+              <a:lnSpc>
+                <a:spcPct val="105000"/>
+              </a:lnSpc>
+              <a:buNone/>
+            </a:pPr>
+            <a:r>
+              <a:rPr lang="en-US" sz="1000" dirty="0">
+                <a:solidFill>
+                  <a:srgbClr val="CBD5E1"/>
+                </a:solidFill>
+                <a:latin typeface="Courier New" pitchFamily="34" charset="0"/>
+                <a:ea typeface="Courier New" pitchFamily="34" charset="-122"/>
+                <a:cs typeface="Courier New" pitchFamily="34" charset="-120"/>
+              </a:rPr>
+              <a:t>Rules:</a:t>
+            </a:r>
+            <a:endParaRPr lang="en-US" sz="1000" dirty="0"/>
+          </a:p>
+          <a:p>
+            <a:pPr indent="0" marL="0">
+              <a:lnSpc>
+                <a:spcPct val="105000"/>
+              </a:lnSpc>
+              <a:buNone/>
+            </a:pPr>
+            <a:r>
+              <a:rPr lang="en-US" sz="1000" dirty="0">
+                <a:solidFill>
+                  <a:srgbClr val="CBD5E1"/>
+                </a:solidFill>
+                <a:latin typeface="Courier New" pitchFamily="34" charset="0"/>
+                <a:ea typeface="Courier New" pitchFamily="34" charset="-122"/>
+                <a:cs typeface="Courier New" pitchFamily="34" charset="-120"/>
+              </a:rPr>
+              <a:t>- Only recommend Indian-approved products</a:t>
+            </a:r>
+            <a:endParaRPr lang="en-US" sz="1000" dirty="0"/>
+          </a:p>
+          <a:p>
+            <a:pPr indent="0" marL="0">
+              <a:lnSpc>
+                <a:spcPct val="105000"/>
+              </a:lnSpc>
+              <a:buNone/>
+            </a:pPr>
+            <a:r>
+              <a:rPr lang="en-US" sz="1000" dirty="0">
+                <a:solidFill>
+                  <a:srgbClr val="CBD5E1"/>
+                </a:solidFill>
+                <a:latin typeface="Courier New" pitchFamily="34" charset="0"/>
+                <a:ea typeface="Courier New" pitchFamily="34" charset="-122"/>
+                <a:cs typeface="Courier New" pitchFamily="34" charset="-120"/>
+              </a:rPr>
+              <a:t>- If unsure, suggest consulting local KVK</a:t>
+            </a:r>
+            <a:endParaRPr lang="en-US" sz="1000" dirty="0"/>
+          </a:p>
+          <a:p>
+            <a:pPr indent="0" marL="0">
+              <a:lnSpc>
+                <a:spcPct val="105000"/>
+              </a:lnSpc>
+              <a:buNone/>
+            </a:pPr>
+            <a:r>
+              <a:rPr lang="en-US" sz="1000" dirty="0">
+                <a:solidFill>
+                  <a:srgbClr val="CBD5E1"/>
+                </a:solidFill>
+                <a:latin typeface="Courier New" pitchFamily="34" charset="0"/>
+                <a:ea typeface="Courier New" pitchFamily="34" charset="-122"/>
+                <a:cs typeface="Courier New" pitchFamily="34" charset="-120"/>
+              </a:rPr>
+              <a:t>- Respond in simple language</a:t>
+            </a:r>
+            <a:endParaRPr lang="en-US" sz="1000" dirty="0"/>
+          </a:p>
+        </p:txBody>
+      </p:sp>
+      <p:sp>
+        <p:nvSpPr>
+          <p:cNvPr id="21" name="Shape 19"/>
+          <p:cNvSpPr/>
+          <p:nvPr/>
+        </p:nvSpPr>
+        <p:spPr>
+          <a:xfrm>
+            <a:off x="6309360" y="4069080"/>
+            <a:ext cx="5394960" cy="2286000"/>
+          </a:xfrm>
+          <a:prstGeom prst="roundRect">
+            <a:avLst>
+              <a:gd name="adj" fmla="val 4800"/>
+            </a:avLst>
+          </a:prstGeom>
+          <a:solidFill>
+            <a:srgbClr val="0D1117"/>
+          </a:solidFill>
+          <a:ln w="19050">
+            <a:solidFill>
+              <a:srgbClr val="F59E0B"/>
+            </a:solidFill>
+            <a:prstDash val="solid"/>
+          </a:ln>
+          <a:effectLst>
+            <a:outerShdw sx="100000" sy="100000" kx="0" ky="0" algn="bl" rotWithShape="0" blurRad="76200" dist="38100" dir="18900000">
+              <a:srgbClr val="000000">
+                <a:alpha val="25000"/>
+              </a:srgbClr>
+            </a:outerShdw>
+          </a:effectLst>
+        </p:spPr>
+      </p:sp>
+      <p:sp>
+        <p:nvSpPr>
+          <p:cNvPr id="22" name="Text 20"/>
+          <p:cNvSpPr/>
+          <p:nvPr/>
+        </p:nvSpPr>
+        <p:spPr>
+          <a:xfrm>
+            <a:off x="6492240" y="4160520"/>
+            <a:ext cx="5029200" cy="274320"/>
+          </a:xfrm>
+          <a:prstGeom prst="rect">
+            <a:avLst/>
+          </a:prstGeom>
+          <a:noFill/>
+          <a:ln/>
+        </p:spPr>
+        <p:txBody>
+          <a:bodyPr wrap="square" lIns="0" tIns="0" rIns="0" bIns="0" rtlCol="0" anchor="ctr"/>
+          <a:lstStyle/>
+          <a:p>
+            <a:pPr indent="0" marL="0">
+              <a:buNone/>
+            </a:pPr>
+            <a:r>
+              <a:rPr lang="en-US" sz="1300" b="1" dirty="0">
+                <a:solidFill>
+                  <a:srgbClr val="F59E0B"/>
+                </a:solidFill>
+                <a:latin typeface="Calibri" pitchFamily="34" charset="0"/>
+                <a:ea typeface="Calibri" pitchFamily="34" charset="-122"/>
+                <a:cs typeface="Calibri" pitchFamily="34" charset="-120"/>
+              </a:rPr>
+              <a:t>Step 5-7: Agent Loop + Output</a:t>
+            </a:r>
+            <a:endParaRPr lang="en-US" sz="1300" dirty="0"/>
+          </a:p>
+        </p:txBody>
+      </p:sp>
+      <p:sp>
+        <p:nvSpPr>
+          <p:cNvPr id="23" name="Text 21"/>
+          <p:cNvSpPr/>
+          <p:nvPr/>
+        </p:nvSpPr>
+        <p:spPr>
+          <a:xfrm>
+            <a:off x="6492240" y="4480560"/>
+            <a:ext cx="5029200" cy="1737360"/>
+          </a:xfrm>
+          <a:prstGeom prst="rect">
+            <a:avLst/>
+          </a:prstGeom>
+          <a:noFill/>
+          <a:ln/>
+        </p:spPr>
+        <p:txBody>
+          <a:bodyPr wrap="square" lIns="0" tIns="0" rIns="0" bIns="0" rtlCol="0" anchor="ctr"/>
+          <a:lstStyle/>
+          <a:p>
+            <a:pPr indent="0" marL="0">
+              <a:lnSpc>
+                <a:spcPct val="100000"/>
+              </a:lnSpc>
+              <a:buNone/>
+            </a:pPr>
+            <a:r>
+              <a:rPr lang="en-US" sz="1000" dirty="0">
+                <a:solidFill>
+                  <a:srgbClr val="CBD5E1"/>
+                </a:solidFill>
+                <a:latin typeface="Courier New" pitchFamily="34" charset="0"/>
+                <a:ea typeface="Courier New" pitchFamily="34" charset="-122"/>
+                <a:cs typeface="Courier New" pitchFamily="34" charset="-120"/>
+              </a:rPr>
+              <a:t>{</a:t>
+            </a:r>
+            <a:endParaRPr lang="en-US" sz="1000" dirty="0"/>
+          </a:p>
+          <a:p>
+            <a:pPr indent="0" marL="0">
+              <a:lnSpc>
+                <a:spcPct val="100000"/>
+              </a:lnSpc>
+              <a:buNone/>
+            </a:pPr>
+            <a:r>
+              <a:rPr lang="en-US" sz="1000" dirty="0">
+                <a:solidFill>
+                  <a:srgbClr val="CBD5E1"/>
+                </a:solidFill>
+                <a:latin typeface="Courier New" pitchFamily="34" charset="0"/>
+                <a:ea typeface="Courier New" pitchFamily="34" charset="-122"/>
+                <a:cs typeface="Courier New" pitchFamily="34" charset="-120"/>
+              </a:rPr>
+              <a:t>  "disease": "Late Blight (Phytophthora)",</a:t>
+            </a:r>
+            <a:endParaRPr lang="en-US" sz="1000" dirty="0"/>
+          </a:p>
+          <a:p>
+            <a:pPr indent="0" marL="0">
+              <a:lnSpc>
+                <a:spcPct val="100000"/>
+              </a:lnSpc>
+              <a:buNone/>
+            </a:pPr>
+            <a:r>
+              <a:rPr lang="en-US" sz="1000" dirty="0">
+                <a:solidFill>
+                  <a:srgbClr val="CBD5E1"/>
+                </a:solidFill>
+                <a:latin typeface="Courier New" pitchFamily="34" charset="0"/>
+                <a:ea typeface="Courier New" pitchFamily="34" charset="-122"/>
+                <a:cs typeface="Courier New" pitchFamily="34" charset="-120"/>
+              </a:rPr>
+              <a:t>  "confidence": "high",</a:t>
+            </a:r>
+            <a:endParaRPr lang="en-US" sz="1000" dirty="0"/>
+          </a:p>
+          <a:p>
+            <a:pPr indent="0" marL="0">
+              <a:lnSpc>
+                <a:spcPct val="100000"/>
+              </a:lnSpc>
+              <a:buNone/>
+            </a:pPr>
+            <a:r>
+              <a:rPr lang="en-US" sz="1000" dirty="0">
+                <a:solidFill>
+                  <a:srgbClr val="CBD5E1"/>
+                </a:solidFill>
+                <a:latin typeface="Courier New" pitchFamily="34" charset="0"/>
+                <a:ea typeface="Courier New" pitchFamily="34" charset="-122"/>
+                <a:cs typeface="Courier New" pitchFamily="34" charset="-120"/>
+              </a:rPr>
+              <a:t>  "treatment": "Copper oxychloride spray",</a:t>
+            </a:r>
+            <a:endParaRPr lang="en-US" sz="1000" dirty="0"/>
+          </a:p>
+          <a:p>
+            <a:pPr indent="0" marL="0">
+              <a:lnSpc>
+                <a:spcPct val="100000"/>
+              </a:lnSpc>
+              <a:buNone/>
+            </a:pPr>
+            <a:r>
+              <a:rPr lang="en-US" sz="1000" dirty="0">
+                <a:solidFill>
+                  <a:srgbClr val="CBD5E1"/>
+                </a:solidFill>
+                <a:latin typeface="Courier New" pitchFamily="34" charset="0"/>
+                <a:ea typeface="Courier New" pitchFamily="34" charset="-122"/>
+                <a:cs typeface="Courier New" pitchFamily="34" charset="-120"/>
+              </a:rPr>
+              <a:t>  "pesticide": {</a:t>
+            </a:r>
+            <a:endParaRPr lang="en-US" sz="1000" dirty="0"/>
+          </a:p>
+          <a:p>
+            <a:pPr indent="0" marL="0">
+              <a:lnSpc>
+                <a:spcPct val="100000"/>
+              </a:lnSpc>
+              <a:buNone/>
+            </a:pPr>
+            <a:r>
+              <a:rPr lang="en-US" sz="1000" dirty="0">
+                <a:solidFill>
+                  <a:srgbClr val="CBD5E1"/>
+                </a:solidFill>
+                <a:latin typeface="Courier New" pitchFamily="34" charset="0"/>
+                <a:ea typeface="Courier New" pitchFamily="34" charset="-122"/>
+                <a:cs typeface="Courier New" pitchFamily="34" charset="-120"/>
+              </a:rPr>
+              <a:t>    "name": "Blitox-50",</a:t>
+            </a:r>
+            <a:endParaRPr lang="en-US" sz="1000" dirty="0"/>
+          </a:p>
+          <a:p>
+            <a:pPr indent="0" marL="0">
+              <a:lnSpc>
+                <a:spcPct val="100000"/>
+              </a:lnSpc>
+              <a:buNone/>
+            </a:pPr>
+            <a:r>
+              <a:rPr lang="en-US" sz="1000" dirty="0">
+                <a:solidFill>
+                  <a:srgbClr val="CBD5E1"/>
+                </a:solidFill>
+                <a:latin typeface="Courier New" pitchFamily="34" charset="0"/>
+                <a:ea typeface="Courier New" pitchFamily="34" charset="-122"/>
+                <a:cs typeface="Courier New" pitchFamily="34" charset="-120"/>
+              </a:rPr>
+              <a:t>    "dosage": "3g per liter",</a:t>
+            </a:r>
+            <a:endParaRPr lang="en-US" sz="1000" dirty="0"/>
+          </a:p>
+          <a:p>
+            <a:pPr indent="0" marL="0">
+              <a:lnSpc>
+                <a:spcPct val="100000"/>
+              </a:lnSpc>
+              <a:buNone/>
+            </a:pPr>
+            <a:r>
+              <a:rPr lang="en-US" sz="1000" dirty="0">
+                <a:solidFill>
+                  <a:srgbClr val="CBD5E1"/>
+                </a:solidFill>
+                <a:latin typeface="Courier New" pitchFamily="34" charset="0"/>
+                <a:ea typeface="Courier New" pitchFamily="34" charset="-122"/>
+                <a:cs typeface="Courier New" pitchFamily="34" charset="-120"/>
+              </a:rPr>
+              <a:t>    "cost": "Rs 250 per kg"</a:t>
+            </a:r>
+            <a:endParaRPr lang="en-US" sz="1000" dirty="0"/>
+          </a:p>
+          <a:p>
+            <a:pPr indent="0" marL="0">
+              <a:lnSpc>
+                <a:spcPct val="100000"/>
+              </a:lnSpc>
+              <a:buNone/>
+            </a:pPr>
+            <a:r>
+              <a:rPr lang="en-US" sz="1000" dirty="0">
+                <a:solidFill>
+                  <a:srgbClr val="CBD5E1"/>
+                </a:solidFill>
+                <a:latin typeface="Courier New" pitchFamily="34" charset="0"/>
+                <a:ea typeface="Courier New" pitchFamily="34" charset="-122"/>
+                <a:cs typeface="Courier New" pitchFamily="34" charset="-120"/>
+              </a:rPr>
+              <a:t>  },</a:t>
+            </a:r>
+            <a:endParaRPr lang="en-US" sz="1000" dirty="0"/>
+          </a:p>
+          <a:p>
+            <a:pPr indent="0" marL="0">
+              <a:lnSpc>
+                <a:spcPct val="100000"/>
+              </a:lnSpc>
+              <a:buNone/>
+            </a:pPr>
+            <a:r>
+              <a:rPr lang="en-US" sz="1000" dirty="0">
+                <a:solidFill>
+                  <a:srgbClr val="CBD5E1"/>
+                </a:solidFill>
+                <a:latin typeface="Courier New" pitchFamily="34" charset="0"/>
+                <a:ea typeface="Courier New" pitchFamily="34" charset="-122"/>
+                <a:cs typeface="Courier New" pitchFamily="34" charset="-120"/>
+              </a:rPr>
+              <a:t>  "prevention": "Crop rotation, avoid</a:t>
+            </a:r>
+            <a:endParaRPr lang="en-US" sz="1000" dirty="0"/>
+          </a:p>
+          <a:p>
+            <a:pPr indent="0" marL="0">
+              <a:lnSpc>
+                <a:spcPct val="100000"/>
+              </a:lnSpc>
+              <a:buNone/>
+            </a:pPr>
+            <a:r>
+              <a:rPr lang="en-US" sz="1000" dirty="0">
+                <a:solidFill>
+                  <a:srgbClr val="CBD5E1"/>
+                </a:solidFill>
+                <a:latin typeface="Courier New" pitchFamily="34" charset="0"/>
+                <a:ea typeface="Courier New" pitchFamily="34" charset="-122"/>
+                <a:cs typeface="Courier New" pitchFamily="34" charset="-120"/>
+              </a:rPr>
+              <a:t>                 overhead irrigation"</a:t>
+            </a:r>
+            <a:endParaRPr lang="en-US" sz="1000" dirty="0"/>
+          </a:p>
+          <a:p>
+            <a:pPr indent="0" marL="0">
+              <a:lnSpc>
+                <a:spcPct val="100000"/>
+              </a:lnSpc>
+              <a:buNone/>
+            </a:pPr>
+            <a:r>
+              <a:rPr lang="en-US" sz="1000" dirty="0">
+                <a:solidFill>
+                  <a:srgbClr val="CBD5E1"/>
+                </a:solidFill>
+                <a:latin typeface="Courier New" pitchFamily="34" charset="0"/>
+                <a:ea typeface="Courier New" pitchFamily="34" charset="-122"/>
+                <a:cs typeface="Courier New" pitchFamily="34" charset="-120"/>
+              </a:rPr>
+              <a:t>}</a:t>
+            </a:r>
+            <a:endParaRPr lang="en-US" sz="1000" dirty="0"/>
+          </a:p>
+        </p:txBody>
+      </p:sp>
+      <p:sp>
+        <p:nvSpPr>
+          <p:cNvPr id="24" name="Shape 22"/>
+          <p:cNvSpPr/>
+          <p:nvPr/>
+        </p:nvSpPr>
+        <p:spPr>
+          <a:xfrm>
+            <a:off x="457200" y="5577840"/>
+            <a:ext cx="5577840" cy="777240"/>
+          </a:xfrm>
+          <a:prstGeom prst="roundRect">
+            <a:avLst>
+              <a:gd name="adj" fmla="val 14118"/>
+            </a:avLst>
+          </a:prstGeom>
+          <a:solidFill>
+            <a:srgbClr val="252547"/>
+          </a:solidFill>
+          <a:ln w="19050">
+            <a:solidFill>
+              <a:srgbClr val="00D4FF"/>
+            </a:solidFill>
+            <a:prstDash val="solid"/>
+          </a:ln>
+          <a:effectLst>
+            <a:outerShdw sx="100000" sy="100000" kx="0" ky="0" algn="bl" rotWithShape="0" blurRad="76200" dist="38100" dir="18900000">
+              <a:srgbClr val="000000">
+                <a:alpha val="25000"/>
+              </a:srgbClr>
+            </a:outerShdw>
+          </a:effectLst>
+        </p:spPr>
+      </p:sp>
+      <p:sp>
+        <p:nvSpPr>
+          <p:cNvPr id="25" name="Text 23"/>
+          <p:cNvSpPr/>
+          <p:nvPr/>
+        </p:nvSpPr>
+        <p:spPr>
+          <a:xfrm>
+            <a:off x="640080" y="5623560"/>
+            <a:ext cx="5212080" cy="640080"/>
+          </a:xfrm>
+          <a:prstGeom prst="rect">
+            <a:avLst/>
+          </a:prstGeom>
+          <a:noFill/>
+          <a:ln/>
+        </p:spPr>
+        <p:txBody>
+          <a:bodyPr wrap="square" lIns="0" tIns="0" rIns="0" bIns="0" rtlCol="0" anchor="ctr"/>
+          <a:lstStyle/>
+          <a:p>
+            <a:pPr indent="0" marL="0">
+              <a:buNone/>
+            </a:pPr>
+            <a:r>
+              <a:rPr lang="en-US" sz="1200" b="1" dirty="0">
+                <a:solidFill>
+                  <a:srgbClr val="00D4FF"/>
+                </a:solidFill>
+                <a:latin typeface="Arial" pitchFamily="34" charset="0"/>
+                <a:ea typeface="Arial" pitchFamily="34" charset="-122"/>
+                <a:cs typeface="Arial" pitchFamily="34" charset="-120"/>
+              </a:rPr>
+              <a:t>Build time: </a:t>
+            </a:r>
+            <a:pPr indent="0" marL="0">
+              <a:buNone/>
+            </a:pPr>
+            <a:r>
+              <a:rPr lang="en-US" sz="1200" dirty="0">
+                <a:solidFill>
+                  <a:srgbClr val="CBD5E1"/>
+                </a:solidFill>
+                <a:latin typeface="Arial" pitchFamily="34" charset="0"/>
+                <a:ea typeface="Arial" pitchFamily="34" charset="-122"/>
+                <a:cs typeface="Arial" pitchFamily="34" charset="-120"/>
+              </a:rPr>
+              <a:t>2-3 hours. Same 7-step process works for any problem. Each step maps directly to agent components.</a:t>
+            </a:r>
+            <a:endParaRPr lang="en-US" sz="1200" dirty="0"/>
+          </a:p>
+        </p:txBody>
+      </p:sp>
+    </p:spTree>
+  </p:cSld>
+  <p:clrMapOvr>
+    <a:masterClrMapping/>
+  </p:clrMapOvr>
+</p:sld>
+</file>
+
+<file path=ppt/slides/slide15.xml><?xml version="1.0" encoding="utf-8"?>
+<p:sld xmlns:a="http://schemas.openxmlformats.org/drawingml/2006/main" xmlns:r="http://schemas.openxmlformats.org/officeDocument/2006/relationships" xmlns:p="http://schemas.openxmlformats.org/presentationml/2006/main">
+  <p:cSld name="Slide 15">
+    <p:bg>
+      <p:bgPr>
+        <a:solidFill>
+          <a:srgbClr val="0F0F23"/>
+        </a:solidFill>
+      </p:bgPr>
+    </p:bg>
+    <p:spTree>
+      <p:nvGrpSpPr>
+        <p:cNvPr id="1" name=""/>
+        <p:cNvGrpSpPr/>
+        <p:nvPr/>
+      </p:nvGrpSpPr>
+      <p:grpSpPr>
+        <a:xfrm>
+          <a:off x="0" y="0"/>
+          <a:ext cx="0" cy="0"/>
+          <a:chOff x="0" y="0"/>
+          <a:chExt cx="0" cy="0"/>
+        </a:xfrm>
+      </p:grpSpPr>
+      <p:sp>
+        <p:nvSpPr>
+          <p:cNvPr id="2" name="Text 0"/>
+          <p:cNvSpPr/>
+          <p:nvPr/>
+        </p:nvSpPr>
+        <p:spPr>
+          <a:xfrm>
+            <a:off x="10972800" y="6492240"/>
+            <a:ext cx="731520" cy="228600"/>
+          </a:xfrm>
+          <a:prstGeom prst="rect">
+            <a:avLst/>
+          </a:prstGeom>
+          <a:noFill/>
+          <a:ln/>
+        </p:spPr>
+        <p:txBody>
+          <a:bodyPr wrap="square" lIns="0" tIns="0" rIns="0" bIns="0" rtlCol="0" anchor="ctr"/>
+          <a:lstStyle/>
+          <a:p>
+            <a:pPr algn="r" indent="0" marL="0">
+              <a:buNone/>
+            </a:pPr>
+            <a:r>
+              <a:rPr lang="en-US" sz="900" dirty="0">
+                <a:solidFill>
+                  <a:srgbClr val="64748B"/>
+                </a:solidFill>
+                <a:latin typeface="Arial" pitchFamily="34" charset="0"/>
+                <a:ea typeface="Arial" pitchFamily="34" charset="-122"/>
+                <a:cs typeface="Arial" pitchFamily="34" charset="-120"/>
+              </a:rPr>
+              <a:t>15/17</a:t>
+            </a:r>
+            <a:endParaRPr lang="en-US" sz="900" dirty="0"/>
+          </a:p>
+        </p:txBody>
+      </p:sp>
+      <p:sp>
+        <p:nvSpPr>
+          <p:cNvPr id="3" name="Text 1"/>
+          <p:cNvSpPr/>
+          <p:nvPr/>
+        </p:nvSpPr>
+        <p:spPr>
+          <a:xfrm>
+            <a:off x="640080" y="228600"/>
+            <a:ext cx="10881360" cy="594360"/>
+          </a:xfrm>
+          <a:prstGeom prst="rect">
+            <a:avLst/>
+          </a:prstGeom>
+          <a:noFill/>
+          <a:ln/>
+        </p:spPr>
+        <p:txBody>
+          <a:bodyPr wrap="square" lIns="0" tIns="0" rIns="0" bIns="0" rtlCol="0" anchor="ctr"/>
+          <a:lstStyle/>
+          <a:p>
+            <a:pPr indent="0" marL="0">
+              <a:buNone/>
+            </a:pPr>
+            <a:r>
+              <a:rPr lang="en-US" sz="3600" b="1" dirty="0">
+                <a:solidFill>
+                  <a:srgbClr val="FFFFFF"/>
+                </a:solidFill>
+                <a:latin typeface="Calibri" pitchFamily="34" charset="0"/>
+                <a:ea typeface="Calibri" pitchFamily="34" charset="-122"/>
+                <a:cs typeface="Calibri" pitchFamily="34" charset="-120"/>
+              </a:rPr>
+              <a:t>Our Pipeline in Action</a:t>
+            </a:r>
+            <a:endParaRPr lang="en-US" sz="3600" dirty="0"/>
+          </a:p>
+        </p:txBody>
+      </p:sp>
+      <p:sp>
+        <p:nvSpPr>
+          <p:cNvPr id="4" name="Text 2"/>
+          <p:cNvSpPr/>
+          <p:nvPr/>
+        </p:nvSpPr>
+        <p:spPr>
+          <a:xfrm>
+            <a:off x="640080" y="822960"/>
+            <a:ext cx="10881360" cy="320040"/>
+          </a:xfrm>
+          <a:prstGeom prst="rect">
+            <a:avLst/>
+          </a:prstGeom>
+          <a:noFill/>
+          <a:ln/>
+        </p:spPr>
+        <p:txBody>
+          <a:bodyPr wrap="square" lIns="0" tIns="0" rIns="0" bIns="0" rtlCol="0" anchor="ctr"/>
+          <a:lstStyle/>
+          <a:p>
+            <a:pPr indent="0" marL="0">
+              <a:buNone/>
+            </a:pPr>
+            <a:r>
+              <a:rPr lang="en-US" sz="1300" dirty="0">
+                <a:solidFill>
+                  <a:srgbClr val="94A3B8"/>
+                </a:solidFill>
+                <a:latin typeface="Arial" pitchFamily="34" charset="0"/>
+                <a:ea typeface="Arial" pitchFamily="34" charset="-122"/>
+                <a:cs typeface="Arial" pitchFamily="34" charset="-120"/>
+              </a:rPr>
+              <a:t>What happens when you type: "Smart waste management system"</a:t>
+            </a:r>
+            <a:endParaRPr lang="en-US" sz="1300" dirty="0"/>
+          </a:p>
+        </p:txBody>
+      </p:sp>
+      <p:sp>
+        <p:nvSpPr>
+          <p:cNvPr id="5" name="Shape 3"/>
+          <p:cNvSpPr/>
+          <p:nvPr/>
+        </p:nvSpPr>
+        <p:spPr>
+          <a:xfrm>
+            <a:off x="457200" y="1280160"/>
+            <a:ext cx="11247120" cy="640080"/>
+          </a:xfrm>
+          <a:prstGeom prst="roundRect">
+            <a:avLst>
+              <a:gd name="adj" fmla="val 17143"/>
+            </a:avLst>
+          </a:prstGeom>
+          <a:solidFill>
+            <a:srgbClr val="1A1A2E"/>
+          </a:solidFill>
+          <a:ln w="19050">
+            <a:solidFill>
+              <a:srgbClr val="F59E0B"/>
+            </a:solidFill>
+            <a:prstDash val="solid"/>
+          </a:ln>
+          <a:effectLst>
+            <a:outerShdw sx="100000" sy="100000" kx="0" ky="0" algn="bl" rotWithShape="0" blurRad="76200" dist="38100" dir="18900000">
+              <a:srgbClr val="000000">
+                <a:alpha val="25000"/>
+              </a:srgbClr>
+            </a:outerShdw>
+          </a:effectLst>
+        </p:spPr>
+      </p:sp>
+      <p:sp>
+        <p:nvSpPr>
+          <p:cNvPr id="6" name="Text 4"/>
+          <p:cNvSpPr/>
+          <p:nvPr/>
+        </p:nvSpPr>
+        <p:spPr>
+          <a:xfrm>
+            <a:off x="731520" y="1325880"/>
+            <a:ext cx="10698480" cy="502920"/>
+          </a:xfrm>
+          <a:prstGeom prst="rect">
+            <a:avLst/>
+          </a:prstGeom>
+          <a:noFill/>
+          <a:ln/>
+        </p:spPr>
+        <p:txBody>
+          <a:bodyPr wrap="square" lIns="0" tIns="0" rIns="0" bIns="0" rtlCol="0" anchor="ctr"/>
+          <a:lstStyle/>
+          <a:p>
+            <a:pPr indent="0" marL="0">
+              <a:buNone/>
+            </a:pPr>
+            <a:r>
+              <a:rPr lang="en-US" sz="1300" b="1" dirty="0">
+                <a:solidFill>
+                  <a:srgbClr val="F59E0B"/>
+                </a:solidFill>
+                <a:latin typeface="Arial" pitchFamily="34" charset="0"/>
+                <a:ea typeface="Arial" pitchFamily="34" charset="-122"/>
+                <a:cs typeface="Arial" pitchFamily="34" charset="-120"/>
+              </a:rPr>
+              <a:t>Input: </a:t>
+            </a:r>
+            <a:pPr indent="0" marL="0">
+              <a:buNone/>
+            </a:pPr>
+            <a:r>
+              <a:rPr lang="en-US" sz="1300" i="1" dirty="0">
+                <a:solidFill>
+                  <a:srgbClr val="FFFFFF"/>
+                </a:solidFill>
+                <a:latin typeface="Arial" pitchFamily="34" charset="0"/>
+                <a:ea typeface="Arial" pitchFamily="34" charset="-122"/>
+                <a:cs typeface="Arial" pitchFamily="34" charset="-120"/>
+              </a:rPr>
+              <a:t>"Smart waste management system for Indian cities"</a:t>
+            </a:r>
+            <a:endParaRPr lang="en-US" sz="1300" dirty="0"/>
+          </a:p>
+        </p:txBody>
+      </p:sp>
+      <p:sp>
+        <p:nvSpPr>
+          <p:cNvPr id="7" name="Shape 5"/>
+          <p:cNvSpPr/>
+          <p:nvPr/>
+        </p:nvSpPr>
+        <p:spPr>
+          <a:xfrm>
+            <a:off x="457200" y="2103120"/>
+            <a:ext cx="1508760" cy="749808"/>
+          </a:xfrm>
+          <a:prstGeom prst="roundRect">
+            <a:avLst>
+              <a:gd name="adj" fmla="val 14634"/>
+            </a:avLst>
+          </a:prstGeom>
+          <a:solidFill>
+            <a:srgbClr val="1A1A2E"/>
+          </a:solidFill>
+          <a:ln w="19050">
+            <a:solidFill>
+              <a:srgbClr val="F59E0B"/>
+            </a:solidFill>
+            <a:prstDash val="solid"/>
+          </a:ln>
+          <a:effectLst>
+            <a:outerShdw sx="100000" sy="100000" kx="0" ky="0" algn="bl" rotWithShape="0" blurRad="76200" dist="38100" dir="18900000">
+              <a:srgbClr val="000000">
+                <a:alpha val="25000"/>
+              </a:srgbClr>
+            </a:outerShdw>
+          </a:effectLst>
+        </p:spPr>
+      </p:sp>
+      <p:pic>
+        <p:nvPicPr>
+          <p:cNvPr id="8" name="Image 0" descr="preencoded.png">    </p:cNvPr>
+          <p:cNvPicPr>
+            <a:picLocks noChangeAspect="1"/>
+          </p:cNvPicPr>
+          <p:nvPr/>
+        </p:nvPicPr>
+        <p:blipFill>
+          <a:blip r:embed="rId1"/>
+          <a:stretch>
+            <a:fillRect/>
+          </a:stretch>
+        </p:blipFill>
+        <p:spPr>
+          <a:xfrm>
+            <a:off x="594360" y="2176272"/>
+            <a:ext cx="320040" cy="320040"/>
+          </a:xfrm>
+          <a:prstGeom prst="rect">
+            <a:avLst/>
+          </a:prstGeom>
+        </p:spPr>
+      </p:pic>
+      <p:sp>
+        <p:nvSpPr>
+          <p:cNvPr id="9" name="Text 6"/>
+          <p:cNvSpPr/>
+          <p:nvPr/>
+        </p:nvSpPr>
+        <p:spPr>
+          <a:xfrm>
+            <a:off x="960120" y="2148840"/>
+            <a:ext cx="914400" cy="320040"/>
+          </a:xfrm>
+          <a:prstGeom prst="rect">
+            <a:avLst/>
+          </a:prstGeom>
+          <a:noFill/>
+          <a:ln/>
+        </p:spPr>
+        <p:txBody>
+          <a:bodyPr wrap="square" lIns="0" tIns="0" rIns="0" bIns="0" rtlCol="0" anchor="ctr"/>
+          <a:lstStyle/>
+          <a:p>
+            <a:pPr indent="0" marL="0">
+              <a:buNone/>
+            </a:pPr>
+            <a:r>
+              <a:rPr lang="en-US" sz="1100" b="1" dirty="0">
+                <a:solidFill>
+                  <a:srgbClr val="F59E0B"/>
+                </a:solidFill>
+                <a:latin typeface="Calibri" pitchFamily="34" charset="0"/>
+                <a:ea typeface="Calibri" pitchFamily="34" charset="-122"/>
+                <a:cs typeface="Calibri" pitchFamily="34" charset="-120"/>
+              </a:rPr>
+              <a:t>CEO</a:t>
+            </a:r>
+            <a:endParaRPr lang="en-US" sz="1100" dirty="0"/>
+          </a:p>
+        </p:txBody>
+      </p:sp>
+      <p:sp>
+        <p:nvSpPr>
+          <p:cNvPr id="10" name="Text 7"/>
+          <p:cNvSpPr/>
+          <p:nvPr/>
+        </p:nvSpPr>
+        <p:spPr>
+          <a:xfrm>
+            <a:off x="548640" y="2514600"/>
+            <a:ext cx="1325880" cy="228600"/>
+          </a:xfrm>
+          <a:prstGeom prst="rect">
+            <a:avLst/>
+          </a:prstGeom>
+          <a:noFill/>
+          <a:ln/>
+        </p:spPr>
+        <p:txBody>
+          <a:bodyPr wrap="square" lIns="0" tIns="0" rIns="0" bIns="0" rtlCol="0" anchor="ctr"/>
+          <a:lstStyle/>
+          <a:p>
+            <a:pPr algn="ctr" indent="0" marL="0">
+              <a:buNone/>
+            </a:pPr>
+            <a:r>
+              <a:rPr lang="en-US" sz="900" dirty="0">
+                <a:solidFill>
+                  <a:srgbClr val="94A3B8"/>
+                </a:solidFill>
+                <a:latin typeface="Arial" pitchFamily="34" charset="0"/>
+                <a:ea typeface="Arial" pitchFamily="34" charset="-122"/>
+                <a:cs typeface="Arial" pitchFamily="34" charset="-120"/>
+              </a:rPr>
+              <a:t>~30s</a:t>
+            </a:r>
+            <a:endParaRPr lang="en-US" sz="900" dirty="0"/>
+          </a:p>
+        </p:txBody>
+      </p:sp>
+      <p:sp>
+        <p:nvSpPr>
+          <p:cNvPr id="11" name="Text 8"/>
+          <p:cNvSpPr/>
+          <p:nvPr/>
+        </p:nvSpPr>
+        <p:spPr>
+          <a:xfrm>
+            <a:off x="1965960" y="2240280"/>
+            <a:ext cx="274320" cy="365760"/>
+          </a:xfrm>
+          <a:prstGeom prst="rect">
+            <a:avLst/>
+          </a:prstGeom>
+          <a:noFill/>
+          <a:ln/>
+        </p:spPr>
+        <p:txBody>
+          <a:bodyPr wrap="square" lIns="0" tIns="0" rIns="0" bIns="0" rtlCol="0" anchor="ctr"/>
+          <a:lstStyle/>
+          <a:p>
+            <a:pPr algn="ctr" indent="0" marL="0">
+              <a:buNone/>
+            </a:pPr>
+            <a:r>
+              <a:rPr lang="en-US" sz="1600" dirty="0">
+                <a:solidFill>
+                  <a:srgbClr val="64748B"/>
+                </a:solidFill>
+                <a:latin typeface="Arial" pitchFamily="34" charset="0"/>
+                <a:ea typeface="Arial" pitchFamily="34" charset="-122"/>
+                <a:cs typeface="Arial" pitchFamily="34" charset="-120"/>
+              </a:rPr>
+              <a:t>→</a:t>
+            </a:r>
+            <a:endParaRPr lang="en-US" sz="1600" dirty="0"/>
+          </a:p>
+        </p:txBody>
+      </p:sp>
+      <p:sp>
+        <p:nvSpPr>
+          <p:cNvPr id="12" name="Text 9"/>
+          <p:cNvSpPr/>
+          <p:nvPr/>
+        </p:nvSpPr>
+        <p:spPr>
+          <a:xfrm>
+            <a:off x="2286000" y="2194560"/>
+            <a:ext cx="2286000" cy="566928"/>
+          </a:xfrm>
+          <a:prstGeom prst="rect">
+            <a:avLst/>
+          </a:prstGeom>
+          <a:noFill/>
+          <a:ln/>
+        </p:spPr>
+        <p:txBody>
+          <a:bodyPr wrap="square" lIns="0" tIns="0" rIns="0" bIns="0" rtlCol="0" anchor="ctr"/>
+          <a:lstStyle/>
+          <a:p>
+            <a:pPr indent="0" marL="0">
+              <a:buNone/>
+            </a:pPr>
+            <a:r>
+              <a:rPr lang="en-US" sz="950" dirty="0">
+                <a:solidFill>
+                  <a:srgbClr val="94A3B8"/>
+                </a:solidFill>
+                <a:latin typeface="Arial" pitchFamily="34" charset="0"/>
+                <a:ea typeface="Arial" pitchFamily="34" charset="-122"/>
+                <a:cs typeface="Arial" pitchFamily="34" charset="-120"/>
+              </a:rPr>
+              <a:t>Raw problem statement</a:t>
+            </a:r>
+            <a:endParaRPr lang="en-US" sz="950" dirty="0"/>
+          </a:p>
+        </p:txBody>
+      </p:sp>
+      <p:sp>
+        <p:nvSpPr>
+          <p:cNvPr id="13" name="Text 10"/>
+          <p:cNvSpPr/>
+          <p:nvPr/>
+        </p:nvSpPr>
+        <p:spPr>
+          <a:xfrm>
+            <a:off x="4572000" y="2240280"/>
+            <a:ext cx="274320" cy="365760"/>
+          </a:xfrm>
+          <a:prstGeom prst="rect">
+            <a:avLst/>
+          </a:prstGeom>
+          <a:noFill/>
+          <a:ln/>
+        </p:spPr>
+        <p:txBody>
+          <a:bodyPr wrap="square" lIns="0" tIns="0" rIns="0" bIns="0" rtlCol="0" anchor="ctr"/>
+          <a:lstStyle/>
+          <a:p>
+            <a:pPr algn="ctr" indent="0" marL="0">
+              <a:buNone/>
+            </a:pPr>
+            <a:r>
+              <a:rPr lang="en-US" sz="1600" dirty="0">
+                <a:solidFill>
+                  <a:srgbClr val="64748B"/>
+                </a:solidFill>
+                <a:latin typeface="Arial" pitchFamily="34" charset="0"/>
+                <a:ea typeface="Arial" pitchFamily="34" charset="-122"/>
+                <a:cs typeface="Arial" pitchFamily="34" charset="-120"/>
+              </a:rPr>
+              <a:t>→</a:t>
+            </a:r>
+            <a:endParaRPr lang="en-US" sz="1600" dirty="0"/>
+          </a:p>
+        </p:txBody>
+      </p:sp>
+      <p:sp>
+        <p:nvSpPr>
+          <p:cNvPr id="14" name="Shape 11"/>
+          <p:cNvSpPr/>
+          <p:nvPr/>
+        </p:nvSpPr>
+        <p:spPr>
+          <a:xfrm>
+            <a:off x="4892040" y="2103120"/>
+            <a:ext cx="6812280" cy="749808"/>
+          </a:xfrm>
+          <a:prstGeom prst="roundRect">
+            <a:avLst>
+              <a:gd name="adj" fmla="val 14634"/>
+            </a:avLst>
+          </a:prstGeom>
+          <a:solidFill>
+            <a:srgbClr val="0D1117"/>
+          </a:solidFill>
+          <a:ln w="6350">
+            <a:solidFill>
+              <a:srgbClr val="252547"/>
+            </a:solidFill>
+            <a:prstDash val="solid"/>
+          </a:ln>
+          <a:effectLst>
+            <a:outerShdw sx="100000" sy="100000" kx="0" ky="0" algn="bl" rotWithShape="0" blurRad="76200" dist="38100" dir="18900000">
+              <a:srgbClr val="000000">
+                <a:alpha val="25000"/>
+              </a:srgbClr>
+            </a:outerShdw>
+          </a:effectLst>
+        </p:spPr>
+      </p:sp>
+      <p:sp>
+        <p:nvSpPr>
+          <p:cNvPr id="15" name="Text 12"/>
+          <p:cNvSpPr/>
+          <p:nvPr/>
+        </p:nvSpPr>
+        <p:spPr>
+          <a:xfrm>
+            <a:off x="5029200" y="2148840"/>
+            <a:ext cx="6537960" cy="658368"/>
+          </a:xfrm>
+          <a:prstGeom prst="rect">
+            <a:avLst/>
+          </a:prstGeom>
+          <a:noFill/>
+          <a:ln/>
+        </p:spPr>
+        <p:txBody>
+          <a:bodyPr wrap="square" lIns="0" tIns="0" rIns="0" bIns="0" rtlCol="0" anchor="ctr"/>
+          <a:lstStyle/>
+          <a:p>
+            <a:pPr indent="0" marL="0">
+              <a:lnSpc>
+                <a:spcPct val="100000"/>
+              </a:lnSpc>
+              <a:buNone/>
+            </a:pPr>
+            <a:r>
+              <a:rPr lang="en-US" sz="900" dirty="0">
+                <a:solidFill>
+                  <a:srgbClr val="CBD5E1"/>
+                </a:solidFill>
+                <a:latin typeface="Courier New" pitchFamily="34" charset="0"/>
+                <a:ea typeface="Courier New" pitchFamily="34" charset="-122"/>
+                <a:cs typeface="Courier New" pitchFamily="34" charset="-120"/>
+              </a:rPr>
+              <a:t>Project brief: "IoT Smart Bins + Route</a:t>
+            </a:r>
+            <a:endParaRPr lang="en-US" sz="900" dirty="0"/>
+          </a:p>
+          <a:p>
+            <a:pPr indent="0" marL="0">
+              <a:lnSpc>
+                <a:spcPct val="100000"/>
+              </a:lnSpc>
+              <a:buNone/>
+            </a:pPr>
+            <a:r>
+              <a:rPr lang="en-US" sz="900" dirty="0">
+                <a:solidFill>
+                  <a:srgbClr val="CBD5E1"/>
+                </a:solidFill>
+                <a:latin typeface="Courier New" pitchFamily="34" charset="0"/>
+                <a:ea typeface="Courier New" pitchFamily="34" charset="-122"/>
+                <a:cs typeface="Courier New" pitchFamily="34" charset="-120"/>
+              </a:rPr>
+              <a:t>Optimizer + Citizen App + Analytics Dashboard"</a:t>
+            </a:r>
+            <a:endParaRPr lang="en-US" sz="900" dirty="0"/>
+          </a:p>
+          <a:p>
+            <a:pPr indent="0" marL="0">
+              <a:lnSpc>
+                <a:spcPct val="100000"/>
+              </a:lnSpc>
+              <a:buNone/>
+            </a:pPr>
+            <a:r>
+              <a:rPr lang="en-US" sz="900" dirty="0">
+                <a:solidFill>
+                  <a:srgbClr val="CBD5E1"/>
+                </a:solidFill>
+                <a:latin typeface="Courier New" pitchFamily="34" charset="0"/>
+                <a:ea typeface="Courier New" pitchFamily="34" charset="-122"/>
+                <a:cs typeface="Courier New" pitchFamily="34" charset="-120"/>
+              </a:rPr>
+              <a:t>6 components, scope = hackathon MVP</a:t>
+            </a:r>
+            <a:endParaRPr lang="en-US" sz="900" dirty="0"/>
+          </a:p>
+        </p:txBody>
+      </p:sp>
+      <p:sp>
+        <p:nvSpPr>
+          <p:cNvPr id="16" name="Shape 13"/>
+          <p:cNvSpPr/>
+          <p:nvPr/>
+        </p:nvSpPr>
+        <p:spPr>
+          <a:xfrm>
+            <a:off x="457200" y="2926080"/>
+            <a:ext cx="1508760" cy="749808"/>
+          </a:xfrm>
+          <a:prstGeom prst="roundRect">
+            <a:avLst>
+              <a:gd name="adj" fmla="val 14634"/>
+            </a:avLst>
+          </a:prstGeom>
+          <a:solidFill>
+            <a:srgbClr val="1A1A2E"/>
+          </a:solidFill>
+          <a:ln w="19050">
+            <a:solidFill>
+              <a:srgbClr val="7C3AED"/>
+            </a:solidFill>
+            <a:prstDash val="solid"/>
+          </a:ln>
+          <a:effectLst>
+            <a:outerShdw sx="100000" sy="100000" kx="0" ky="0" algn="bl" rotWithShape="0" blurRad="76200" dist="38100" dir="18900000">
+              <a:srgbClr val="000000">
+                <a:alpha val="25000"/>
+              </a:srgbClr>
+            </a:outerShdw>
+          </a:effectLst>
+        </p:spPr>
+      </p:sp>
+      <p:pic>
+        <p:nvPicPr>
+          <p:cNvPr id="17" name="Image 1" descr="preencoded.png">    </p:cNvPr>
+          <p:cNvPicPr>
+            <a:picLocks noChangeAspect="1"/>
+          </p:cNvPicPr>
+          <p:nvPr/>
+        </p:nvPicPr>
+        <p:blipFill>
+          <a:blip r:embed="rId2"/>
+          <a:stretch>
+            <a:fillRect/>
+          </a:stretch>
+        </p:blipFill>
+        <p:spPr>
+          <a:xfrm>
+            <a:off x="594360" y="2999232"/>
+            <a:ext cx="320040" cy="320040"/>
+          </a:xfrm>
+          <a:prstGeom prst="rect">
+            <a:avLst/>
+          </a:prstGeom>
+        </p:spPr>
+      </p:pic>
+      <p:sp>
+        <p:nvSpPr>
+          <p:cNvPr id="18" name="Text 14"/>
+          <p:cNvSpPr/>
+          <p:nvPr/>
+        </p:nvSpPr>
+        <p:spPr>
+          <a:xfrm>
+            <a:off x="960120" y="2971800"/>
+            <a:ext cx="914400" cy="320040"/>
+          </a:xfrm>
+          <a:prstGeom prst="rect">
+            <a:avLst/>
+          </a:prstGeom>
+          <a:noFill/>
+          <a:ln/>
+        </p:spPr>
+        <p:txBody>
+          <a:bodyPr wrap="square" lIns="0" tIns="0" rIns="0" bIns="0" rtlCol="0" anchor="ctr"/>
+          <a:lstStyle/>
+          <a:p>
+            <a:pPr indent="0" marL="0">
+              <a:buNone/>
+            </a:pPr>
+            <a:r>
+              <a:rPr lang="en-US" sz="1100" b="1" dirty="0">
+                <a:solidFill>
+                  <a:srgbClr val="7C3AED"/>
+                </a:solidFill>
+                <a:latin typeface="Calibri" pitchFamily="34" charset="0"/>
+                <a:ea typeface="Calibri" pitchFamily="34" charset="-122"/>
+                <a:cs typeface="Calibri" pitchFamily="34" charset="-120"/>
+              </a:rPr>
+              <a:t>Business Analyst</a:t>
+            </a:r>
+            <a:endParaRPr lang="en-US" sz="1100" dirty="0"/>
+          </a:p>
+        </p:txBody>
+      </p:sp>
+      <p:sp>
+        <p:nvSpPr>
+          <p:cNvPr id="19" name="Text 15"/>
+          <p:cNvSpPr/>
+          <p:nvPr/>
+        </p:nvSpPr>
+        <p:spPr>
+          <a:xfrm>
+            <a:off x="548640" y="3337560"/>
+            <a:ext cx="1325880" cy="228600"/>
+          </a:xfrm>
+          <a:prstGeom prst="rect">
+            <a:avLst/>
+          </a:prstGeom>
+          <a:noFill/>
+          <a:ln/>
+        </p:spPr>
+        <p:txBody>
+          <a:bodyPr wrap="square" lIns="0" tIns="0" rIns="0" bIns="0" rtlCol="0" anchor="ctr"/>
+          <a:lstStyle/>
+          <a:p>
+            <a:pPr algn="ctr" indent="0" marL="0">
+              <a:buNone/>
+            </a:pPr>
+            <a:r>
+              <a:rPr lang="en-US" sz="900" dirty="0">
+                <a:solidFill>
+                  <a:srgbClr val="94A3B8"/>
+                </a:solidFill>
+                <a:latin typeface="Arial" pitchFamily="34" charset="0"/>
+                <a:ea typeface="Arial" pitchFamily="34" charset="-122"/>
+                <a:cs typeface="Arial" pitchFamily="34" charset="-120"/>
+              </a:rPr>
+              <a:t>~45s</a:t>
+            </a:r>
+            <a:endParaRPr lang="en-US" sz="900" dirty="0"/>
+          </a:p>
+        </p:txBody>
+      </p:sp>
+      <p:sp>
+        <p:nvSpPr>
+          <p:cNvPr id="20" name="Text 16"/>
+          <p:cNvSpPr/>
+          <p:nvPr/>
+        </p:nvSpPr>
+        <p:spPr>
+          <a:xfrm>
+            <a:off x="1965960" y="3063240"/>
+            <a:ext cx="274320" cy="365760"/>
+          </a:xfrm>
+          <a:prstGeom prst="rect">
+            <a:avLst/>
+          </a:prstGeom>
+          <a:noFill/>
+          <a:ln/>
+        </p:spPr>
+        <p:txBody>
+          <a:bodyPr wrap="square" lIns="0" tIns="0" rIns="0" bIns="0" rtlCol="0" anchor="ctr"/>
+          <a:lstStyle/>
+          <a:p>
+            <a:pPr algn="ctr" indent="0" marL="0">
+              <a:buNone/>
+            </a:pPr>
+            <a:r>
+              <a:rPr lang="en-US" sz="1600" dirty="0">
+                <a:solidFill>
+                  <a:srgbClr val="64748B"/>
+                </a:solidFill>
+                <a:latin typeface="Arial" pitchFamily="34" charset="0"/>
+                <a:ea typeface="Arial" pitchFamily="34" charset="-122"/>
+                <a:cs typeface="Arial" pitchFamily="34" charset="-120"/>
+              </a:rPr>
+              <a:t>→</a:t>
+            </a:r>
+            <a:endParaRPr lang="en-US" sz="1600" dirty="0"/>
+          </a:p>
+        </p:txBody>
+      </p:sp>
+      <p:sp>
+        <p:nvSpPr>
+          <p:cNvPr id="21" name="Text 17"/>
+          <p:cNvSpPr/>
+          <p:nvPr/>
+        </p:nvSpPr>
+        <p:spPr>
+          <a:xfrm>
+            <a:off x="2286000" y="3017520"/>
+            <a:ext cx="2286000" cy="566928"/>
+          </a:xfrm>
+          <a:prstGeom prst="rect">
+            <a:avLst/>
+          </a:prstGeom>
+          <a:noFill/>
+          <a:ln/>
+        </p:spPr>
+        <p:txBody>
+          <a:bodyPr wrap="square" lIns="0" tIns="0" rIns="0" bIns="0" rtlCol="0" anchor="ctr"/>
+          <a:lstStyle/>
+          <a:p>
+            <a:pPr indent="0" marL="0">
+              <a:buNone/>
+            </a:pPr>
+            <a:r>
+              <a:rPr lang="en-US" sz="950" dirty="0">
+                <a:solidFill>
+                  <a:srgbClr val="94A3B8"/>
+                </a:solidFill>
+                <a:latin typeface="Arial" pitchFamily="34" charset="0"/>
+                <a:ea typeface="Arial" pitchFamily="34" charset="-122"/>
+                <a:cs typeface="Arial" pitchFamily="34" charset="-120"/>
+              </a:rPr>
+              <a:t>CEO brief</a:t>
+            </a:r>
+            <a:endParaRPr lang="en-US" sz="950" dirty="0"/>
+          </a:p>
+        </p:txBody>
+      </p:sp>
+      <p:sp>
+        <p:nvSpPr>
+          <p:cNvPr id="22" name="Text 18"/>
+          <p:cNvSpPr/>
+          <p:nvPr/>
+        </p:nvSpPr>
+        <p:spPr>
+          <a:xfrm>
+            <a:off x="4572000" y="3063240"/>
+            <a:ext cx="274320" cy="365760"/>
+          </a:xfrm>
+          <a:prstGeom prst="rect">
+            <a:avLst/>
+          </a:prstGeom>
+          <a:noFill/>
+          <a:ln/>
+        </p:spPr>
+        <p:txBody>
+          <a:bodyPr wrap="square" lIns="0" tIns="0" rIns="0" bIns="0" rtlCol="0" anchor="ctr"/>
+          <a:lstStyle/>
+          <a:p>
+            <a:pPr algn="ctr" indent="0" marL="0">
+              <a:buNone/>
+            </a:pPr>
+            <a:r>
+              <a:rPr lang="en-US" sz="1600" dirty="0">
+                <a:solidFill>
+                  <a:srgbClr val="64748B"/>
+                </a:solidFill>
+                <a:latin typeface="Arial" pitchFamily="34" charset="0"/>
+                <a:ea typeface="Arial" pitchFamily="34" charset="-122"/>
+                <a:cs typeface="Arial" pitchFamily="34" charset="-120"/>
+              </a:rPr>
+              <a:t>→</a:t>
+            </a:r>
+            <a:endParaRPr lang="en-US" sz="1600" dirty="0"/>
+          </a:p>
+        </p:txBody>
+      </p:sp>
+      <p:sp>
+        <p:nvSpPr>
+          <p:cNvPr id="23" name="Shape 19"/>
+          <p:cNvSpPr/>
+          <p:nvPr/>
+        </p:nvSpPr>
+        <p:spPr>
+          <a:xfrm>
+            <a:off x="4892040" y="2926080"/>
+            <a:ext cx="6812280" cy="749808"/>
+          </a:xfrm>
+          <a:prstGeom prst="roundRect">
+            <a:avLst>
+              <a:gd name="adj" fmla="val 14634"/>
+            </a:avLst>
+          </a:prstGeom>
+          <a:solidFill>
+            <a:srgbClr val="0D1117"/>
+          </a:solidFill>
+          <a:ln w="6350">
+            <a:solidFill>
+              <a:srgbClr val="252547"/>
+            </a:solidFill>
+            <a:prstDash val="solid"/>
+          </a:ln>
+          <a:effectLst>
+            <a:outerShdw sx="100000" sy="100000" kx="0" ky="0" algn="bl" rotWithShape="0" blurRad="76200" dist="38100" dir="18900000">
+              <a:srgbClr val="000000">
+                <a:alpha val="25000"/>
+              </a:srgbClr>
+            </a:outerShdw>
+          </a:effectLst>
+        </p:spPr>
+      </p:sp>
+      <p:sp>
+        <p:nvSpPr>
+          <p:cNvPr id="24" name="Text 20"/>
+          <p:cNvSpPr/>
+          <p:nvPr/>
+        </p:nvSpPr>
+        <p:spPr>
+          <a:xfrm>
+            <a:off x="5029200" y="2971800"/>
+            <a:ext cx="6537960" cy="658368"/>
+          </a:xfrm>
+          <a:prstGeom prst="rect">
+            <a:avLst/>
+          </a:prstGeom>
+          <a:noFill/>
+          <a:ln/>
+        </p:spPr>
+        <p:txBody>
+          <a:bodyPr wrap="square" lIns="0" tIns="0" rIns="0" bIns="0" rtlCol="0" anchor="ctr"/>
+          <a:lstStyle/>
+          <a:p>
+            <a:pPr indent="0" marL="0">
+              <a:lnSpc>
+                <a:spcPct val="100000"/>
+              </a:lnSpc>
+              <a:buNone/>
+            </a:pPr>
+            <a:r>
+              <a:rPr lang="en-US" sz="900" dirty="0">
+                <a:solidFill>
+                  <a:srgbClr val="CBD5E1"/>
+                </a:solidFill>
+                <a:latin typeface="Courier New" pitchFamily="34" charset="0"/>
+                <a:ea typeface="Courier New" pitchFamily="34" charset="-122"/>
+                <a:cs typeface="Courier New" pitchFamily="34" charset="-120"/>
+              </a:rPr>
+              <a:t>User stories: Waste collector, Municipal admin,</a:t>
+            </a:r>
+            <a:endParaRPr lang="en-US" sz="900" dirty="0"/>
+          </a:p>
+          <a:p>
+            <a:pPr indent="0" marL="0">
+              <a:lnSpc>
+                <a:spcPct val="100000"/>
+              </a:lnSpc>
+              <a:buNone/>
+            </a:pPr>
+            <a:r>
+              <a:rPr lang="en-US" sz="900" dirty="0">
+                <a:solidFill>
+                  <a:srgbClr val="CBD5E1"/>
+                </a:solidFill>
+                <a:latin typeface="Courier New" pitchFamily="34" charset="0"/>
+                <a:ea typeface="Courier New" pitchFamily="34" charset="-122"/>
+                <a:cs typeface="Courier New" pitchFamily="34" charset="-120"/>
+              </a:rPr>
+              <a:t>Citizen. 12 functional requirements.</a:t>
+            </a:r>
+            <a:endParaRPr lang="en-US" sz="900" dirty="0"/>
+          </a:p>
+          <a:p>
+            <a:pPr indent="0" marL="0">
+              <a:lnSpc>
+                <a:spcPct val="100000"/>
+              </a:lnSpc>
+              <a:buNone/>
+            </a:pPr>
+            <a:r>
+              <a:rPr lang="en-US" sz="900" dirty="0">
+                <a:solidFill>
+                  <a:srgbClr val="CBD5E1"/>
+                </a:solidFill>
+                <a:latin typeface="Courier New" pitchFamily="34" charset="0"/>
+                <a:ea typeface="Courier New" pitchFamily="34" charset="-122"/>
+                <a:cs typeface="Courier New" pitchFamily="34" charset="-120"/>
+              </a:rPr>
+              <a:t>Non-functional: &lt;2s response, Hindi/English</a:t>
+            </a:r>
+            <a:endParaRPr lang="en-US" sz="900" dirty="0"/>
+          </a:p>
+        </p:txBody>
+      </p:sp>
+      <p:sp>
+        <p:nvSpPr>
+          <p:cNvPr id="25" name="Shape 21"/>
+          <p:cNvSpPr/>
+          <p:nvPr/>
+        </p:nvSpPr>
+        <p:spPr>
+          <a:xfrm>
+            <a:off x="457200" y="3749040"/>
+            <a:ext cx="1508760" cy="749808"/>
+          </a:xfrm>
+          <a:prstGeom prst="roundRect">
+            <a:avLst>
+              <a:gd name="adj" fmla="val 14634"/>
+            </a:avLst>
+          </a:prstGeom>
+          <a:solidFill>
+            <a:srgbClr val="1A1A2E"/>
+          </a:solidFill>
+          <a:ln w="19050">
+            <a:solidFill>
+              <a:srgbClr val="00D4FF"/>
+            </a:solidFill>
+            <a:prstDash val="solid"/>
+          </a:ln>
+          <a:effectLst>
+            <a:outerShdw sx="100000" sy="100000" kx="0" ky="0" algn="bl" rotWithShape="0" blurRad="76200" dist="38100" dir="18900000">
+              <a:srgbClr val="000000">
+                <a:alpha val="25000"/>
+              </a:srgbClr>
+            </a:outerShdw>
+          </a:effectLst>
+        </p:spPr>
+      </p:sp>
+      <p:pic>
+        <p:nvPicPr>
+          <p:cNvPr id="26" name="Image 2" descr="preencoded.png">    </p:cNvPr>
+          <p:cNvPicPr>
+            <a:picLocks noChangeAspect="1"/>
+          </p:cNvPicPr>
+          <p:nvPr/>
+        </p:nvPicPr>
+        <p:blipFill>
+          <a:blip r:embed="rId3"/>
+          <a:stretch>
+            <a:fillRect/>
+          </a:stretch>
+        </p:blipFill>
+        <p:spPr>
+          <a:xfrm>
+            <a:off x="594360" y="3822192"/>
+            <a:ext cx="320040" cy="320040"/>
+          </a:xfrm>
+          <a:prstGeom prst="rect">
+            <a:avLst/>
+          </a:prstGeom>
+        </p:spPr>
+      </p:pic>
+      <p:sp>
+        <p:nvSpPr>
+          <p:cNvPr id="27" name="Text 22"/>
+          <p:cNvSpPr/>
+          <p:nvPr/>
+        </p:nvSpPr>
+        <p:spPr>
+          <a:xfrm>
+            <a:off x="960120" y="3794760"/>
+            <a:ext cx="914400" cy="320040"/>
+          </a:xfrm>
+          <a:prstGeom prst="rect">
+            <a:avLst/>
+          </a:prstGeom>
+          <a:noFill/>
+          <a:ln/>
+        </p:spPr>
+        <p:txBody>
+          <a:bodyPr wrap="square" lIns="0" tIns="0" rIns="0" bIns="0" rtlCol="0" anchor="ctr"/>
+          <a:lstStyle/>
+          <a:p>
+            <a:pPr indent="0" marL="0">
+              <a:buNone/>
+            </a:pPr>
+            <a:r>
+              <a:rPr lang="en-US" sz="1100" b="1" dirty="0">
+                <a:solidFill>
+                  <a:srgbClr val="00D4FF"/>
+                </a:solidFill>
+                <a:latin typeface="Calibri" pitchFamily="34" charset="0"/>
+                <a:ea typeface="Calibri" pitchFamily="34" charset="-122"/>
+                <a:cs typeface="Calibri" pitchFamily="34" charset="-120"/>
+              </a:rPr>
+              <a:t>Researcher</a:t>
+            </a:r>
+            <a:endParaRPr lang="en-US" sz="1100" dirty="0"/>
+          </a:p>
+        </p:txBody>
+      </p:sp>
+      <p:sp>
+        <p:nvSpPr>
+          <p:cNvPr id="28" name="Text 23"/>
+          <p:cNvSpPr/>
+          <p:nvPr/>
+        </p:nvSpPr>
+        <p:spPr>
+          <a:xfrm>
+            <a:off x="548640" y="4160520"/>
+            <a:ext cx="1325880" cy="228600"/>
+          </a:xfrm>
+          <a:prstGeom prst="rect">
+            <a:avLst/>
+          </a:prstGeom>
+          <a:noFill/>
+          <a:ln/>
+        </p:spPr>
+        <p:txBody>
+          <a:bodyPr wrap="square" lIns="0" tIns="0" rIns="0" bIns="0" rtlCol="0" anchor="ctr"/>
+          <a:lstStyle/>
+          <a:p>
+            <a:pPr algn="ctr" indent="0" marL="0">
+              <a:buNone/>
+            </a:pPr>
+            <a:r>
+              <a:rPr lang="en-US" sz="900" dirty="0">
+                <a:solidFill>
+                  <a:srgbClr val="94A3B8"/>
+                </a:solidFill>
+                <a:latin typeface="Arial" pitchFamily="34" charset="0"/>
+                <a:ea typeface="Arial" pitchFamily="34" charset="-122"/>
+                <a:cs typeface="Arial" pitchFamily="34" charset="-120"/>
+              </a:rPr>
+              <a:t>~60s</a:t>
+            </a:r>
+            <a:endParaRPr lang="en-US" sz="900" dirty="0"/>
+          </a:p>
+        </p:txBody>
+      </p:sp>
+      <p:sp>
+        <p:nvSpPr>
+          <p:cNvPr id="29" name="Text 24"/>
+          <p:cNvSpPr/>
+          <p:nvPr/>
+        </p:nvSpPr>
+        <p:spPr>
+          <a:xfrm>
+            <a:off x="1965960" y="3886200"/>
+            <a:ext cx="274320" cy="365760"/>
+          </a:xfrm>
+          <a:prstGeom prst="rect">
+            <a:avLst/>
+          </a:prstGeom>
+          <a:noFill/>
+          <a:ln/>
+        </p:spPr>
+        <p:txBody>
+          <a:bodyPr wrap="square" lIns="0" tIns="0" rIns="0" bIns="0" rtlCol="0" anchor="ctr"/>
+          <a:lstStyle/>
+          <a:p>
+            <a:pPr algn="ctr" indent="0" marL="0">
+              <a:buNone/>
+            </a:pPr>
+            <a:r>
+              <a:rPr lang="en-US" sz="1600" dirty="0">
+                <a:solidFill>
+                  <a:srgbClr val="64748B"/>
+                </a:solidFill>
+                <a:latin typeface="Arial" pitchFamily="34" charset="0"/>
+                <a:ea typeface="Arial" pitchFamily="34" charset="-122"/>
+                <a:cs typeface="Arial" pitchFamily="34" charset="-120"/>
+              </a:rPr>
+              <a:t>→</a:t>
+            </a:r>
+            <a:endParaRPr lang="en-US" sz="1600" dirty="0"/>
+          </a:p>
+        </p:txBody>
+      </p:sp>
+      <p:sp>
+        <p:nvSpPr>
+          <p:cNvPr id="30" name="Text 25"/>
+          <p:cNvSpPr/>
+          <p:nvPr/>
+        </p:nvSpPr>
+        <p:spPr>
+          <a:xfrm>
+            <a:off x="2286000" y="3840480"/>
+            <a:ext cx="2286000" cy="566928"/>
+          </a:xfrm>
+          <a:prstGeom prst="rect">
+            <a:avLst/>
+          </a:prstGeom>
+          <a:noFill/>
+          <a:ln/>
+        </p:spPr>
+        <p:txBody>
+          <a:bodyPr wrap="square" lIns="0" tIns="0" rIns="0" bIns="0" rtlCol="0" anchor="ctr"/>
+          <a:lstStyle/>
+          <a:p>
+            <a:pPr indent="0" marL="0">
+              <a:buNone/>
+            </a:pPr>
+            <a:r>
+              <a:rPr lang="en-US" sz="950" dirty="0">
+                <a:solidFill>
+                  <a:srgbClr val="94A3B8"/>
+                </a:solidFill>
+                <a:latin typeface="Arial" pitchFamily="34" charset="0"/>
+                <a:ea typeface="Arial" pitchFamily="34" charset="-122"/>
+                <a:cs typeface="Arial" pitchFamily="34" charset="-120"/>
+              </a:rPr>
+              <a:t>CEO brief + BA requirements</a:t>
+            </a:r>
+            <a:endParaRPr lang="en-US" sz="950" dirty="0"/>
+          </a:p>
+        </p:txBody>
+      </p:sp>
+      <p:sp>
+        <p:nvSpPr>
+          <p:cNvPr id="31" name="Text 26"/>
+          <p:cNvSpPr/>
+          <p:nvPr/>
+        </p:nvSpPr>
+        <p:spPr>
+          <a:xfrm>
+            <a:off x="4572000" y="3886200"/>
+            <a:ext cx="274320" cy="365760"/>
+          </a:xfrm>
+          <a:prstGeom prst="rect">
+            <a:avLst/>
+          </a:prstGeom>
+          <a:noFill/>
+          <a:ln/>
+        </p:spPr>
+        <p:txBody>
+          <a:bodyPr wrap="square" lIns="0" tIns="0" rIns="0" bIns="0" rtlCol="0" anchor="ctr"/>
+          <a:lstStyle/>
+          <a:p>
+            <a:pPr algn="ctr" indent="0" marL="0">
+              <a:buNone/>
+            </a:pPr>
+            <a:r>
+              <a:rPr lang="en-US" sz="1600" dirty="0">
+                <a:solidFill>
+                  <a:srgbClr val="64748B"/>
+                </a:solidFill>
+                <a:latin typeface="Arial" pitchFamily="34" charset="0"/>
+                <a:ea typeface="Arial" pitchFamily="34" charset="-122"/>
+                <a:cs typeface="Arial" pitchFamily="34" charset="-120"/>
+              </a:rPr>
+              <a:t>→</a:t>
+            </a:r>
+            <a:endParaRPr lang="en-US" sz="1600" dirty="0"/>
+          </a:p>
+        </p:txBody>
+      </p:sp>
+      <p:sp>
+        <p:nvSpPr>
+          <p:cNvPr id="32" name="Shape 27"/>
+          <p:cNvSpPr/>
+          <p:nvPr/>
+        </p:nvSpPr>
+        <p:spPr>
+          <a:xfrm>
+            <a:off x="4892040" y="3749040"/>
+            <a:ext cx="6812280" cy="749808"/>
+          </a:xfrm>
+          <a:prstGeom prst="roundRect">
+            <a:avLst>
+              <a:gd name="adj" fmla="val 14634"/>
+            </a:avLst>
+          </a:prstGeom>
+          <a:solidFill>
+            <a:srgbClr val="0D1117"/>
+          </a:solidFill>
+          <a:ln w="6350">
+            <a:solidFill>
+              <a:srgbClr val="252547"/>
+            </a:solidFill>
+            <a:prstDash val="solid"/>
+          </a:ln>
+          <a:effectLst>
+            <a:outerShdw sx="100000" sy="100000" kx="0" ky="0" algn="bl" rotWithShape="0" blurRad="76200" dist="38100" dir="18900000">
+              <a:srgbClr val="000000">
+                <a:alpha val="25000"/>
+              </a:srgbClr>
+            </a:outerShdw>
+          </a:effectLst>
+        </p:spPr>
+      </p:sp>
+      <p:sp>
+        <p:nvSpPr>
+          <p:cNvPr id="33" name="Text 28"/>
+          <p:cNvSpPr/>
+          <p:nvPr/>
+        </p:nvSpPr>
+        <p:spPr>
+          <a:xfrm>
+            <a:off x="5029200" y="3794760"/>
+            <a:ext cx="6537960" cy="658368"/>
+          </a:xfrm>
+          <a:prstGeom prst="rect">
+            <a:avLst/>
+          </a:prstGeom>
+          <a:noFill/>
+          <a:ln/>
+        </p:spPr>
+        <p:txBody>
+          <a:bodyPr wrap="square" lIns="0" tIns="0" rIns="0" bIns="0" rtlCol="0" anchor="ctr"/>
+          <a:lstStyle/>
+          <a:p>
+            <a:pPr indent="0" marL="0">
+              <a:lnSpc>
+                <a:spcPct val="100000"/>
+              </a:lnSpc>
+              <a:buNone/>
+            </a:pPr>
+            <a:r>
+              <a:rPr lang="en-US" sz="900" dirty="0">
+                <a:solidFill>
+                  <a:srgbClr val="CBD5E1"/>
+                </a:solidFill>
+                <a:latin typeface="Courier New" pitchFamily="34" charset="0"/>
+                <a:ea typeface="Courier New" pitchFamily="34" charset="-122"/>
+                <a:cs typeface="Courier New" pitchFamily="34" charset="-120"/>
+              </a:rPr>
+              <a:t>Found: Swachh Bharat Mission, SmartBin.io,</a:t>
+            </a:r>
+            <a:endParaRPr lang="en-US" sz="900" dirty="0"/>
+          </a:p>
+          <a:p>
+            <a:pPr indent="0" marL="0">
+              <a:lnSpc>
+                <a:spcPct val="100000"/>
+              </a:lnSpc>
+              <a:buNone/>
+            </a:pPr>
+            <a:r>
+              <a:rPr lang="en-US" sz="900" dirty="0">
+                <a:solidFill>
+                  <a:srgbClr val="CBD5E1"/>
+                </a:solidFill>
+                <a:latin typeface="Courier New" pitchFamily="34" charset="0"/>
+                <a:ea typeface="Courier New" pitchFamily="34" charset="-122"/>
+                <a:cs typeface="Courier New" pitchFamily="34" charset="-120"/>
+              </a:rPr>
+              <a:t>3 competitor apps. Tavily search: 4 API calls.</a:t>
+            </a:r>
+            <a:endParaRPr lang="en-US" sz="900" dirty="0"/>
+          </a:p>
+          <a:p>
+            <a:pPr indent="0" marL="0">
+              <a:lnSpc>
+                <a:spcPct val="100000"/>
+              </a:lnSpc>
+              <a:buNone/>
+            </a:pPr>
+            <a:r>
+              <a:rPr lang="en-US" sz="900" dirty="0">
+                <a:solidFill>
+                  <a:srgbClr val="CBD5E1"/>
+                </a:solidFill>
+                <a:latin typeface="Courier New" pitchFamily="34" charset="0"/>
+                <a:ea typeface="Courier New" pitchFamily="34" charset="-122"/>
+                <a:cs typeface="Courier New" pitchFamily="34" charset="-120"/>
+              </a:rPr>
+              <a:t>Gap: No Hindi support in existing solutions</a:t>
+            </a:r>
+            <a:endParaRPr lang="en-US" sz="900" dirty="0"/>
+          </a:p>
+        </p:txBody>
+      </p:sp>
+      <p:sp>
+        <p:nvSpPr>
+          <p:cNvPr id="34" name="Shape 29"/>
+          <p:cNvSpPr/>
+          <p:nvPr/>
+        </p:nvSpPr>
+        <p:spPr>
+          <a:xfrm>
+            <a:off x="457200" y="4572000"/>
+            <a:ext cx="1508760" cy="749808"/>
+          </a:xfrm>
+          <a:prstGeom prst="roundRect">
+            <a:avLst>
+              <a:gd name="adj" fmla="val 14634"/>
+            </a:avLst>
+          </a:prstGeom>
+          <a:solidFill>
+            <a:srgbClr val="1A1A2E"/>
+          </a:solidFill>
+          <a:ln w="19050">
+            <a:solidFill>
+              <a:srgbClr val="10B981"/>
+            </a:solidFill>
+            <a:prstDash val="solid"/>
+          </a:ln>
+          <a:effectLst>
+            <a:outerShdw sx="100000" sy="100000" kx="0" ky="0" algn="bl" rotWithShape="0" blurRad="76200" dist="38100" dir="18900000">
+              <a:srgbClr val="000000">
+                <a:alpha val="25000"/>
+              </a:srgbClr>
+            </a:outerShdw>
+          </a:effectLst>
+        </p:spPr>
+      </p:sp>
+      <p:pic>
+        <p:nvPicPr>
+          <p:cNvPr id="35" name="Image 3" descr="preencoded.png">    </p:cNvPr>
+          <p:cNvPicPr>
+            <a:picLocks noChangeAspect="1"/>
+          </p:cNvPicPr>
+          <p:nvPr/>
+        </p:nvPicPr>
+        <p:blipFill>
+          <a:blip r:embed="rId4"/>
+          <a:stretch>
+            <a:fillRect/>
+          </a:stretch>
+        </p:blipFill>
+        <p:spPr>
+          <a:xfrm>
+            <a:off x="594360" y="4645152"/>
+            <a:ext cx="320040" cy="320040"/>
+          </a:xfrm>
+          <a:prstGeom prst="rect">
+            <a:avLst/>
+          </a:prstGeom>
+        </p:spPr>
+      </p:pic>
+      <p:sp>
+        <p:nvSpPr>
+          <p:cNvPr id="36" name="Text 30"/>
+          <p:cNvSpPr/>
+          <p:nvPr/>
+        </p:nvSpPr>
+        <p:spPr>
+          <a:xfrm>
+            <a:off x="960120" y="4617720"/>
+            <a:ext cx="914400" cy="320040"/>
+          </a:xfrm>
+          <a:prstGeom prst="rect">
+            <a:avLst/>
+          </a:prstGeom>
+          <a:noFill/>
+          <a:ln/>
+        </p:spPr>
+        <p:txBody>
+          <a:bodyPr wrap="square" lIns="0" tIns="0" rIns="0" bIns="0" rtlCol="0" anchor="ctr"/>
+          <a:lstStyle/>
+          <a:p>
+            <a:pPr indent="0" marL="0">
+              <a:buNone/>
+            </a:pPr>
+            <a:r>
+              <a:rPr lang="en-US" sz="1100" b="1" dirty="0">
+                <a:solidFill>
+                  <a:srgbClr val="10B981"/>
+                </a:solidFill>
+                <a:latin typeface="Calibri" pitchFamily="34" charset="0"/>
+                <a:ea typeface="Calibri" pitchFamily="34" charset="-122"/>
+                <a:cs typeface="Calibri" pitchFamily="34" charset="-120"/>
+              </a:rPr>
+              <a:t>Architect</a:t>
+            </a:r>
+            <a:endParaRPr lang="en-US" sz="1100" dirty="0"/>
+          </a:p>
+        </p:txBody>
+      </p:sp>
+      <p:sp>
+        <p:nvSpPr>
+          <p:cNvPr id="37" name="Text 31"/>
+          <p:cNvSpPr/>
+          <p:nvPr/>
+        </p:nvSpPr>
+        <p:spPr>
+          <a:xfrm>
+            <a:off x="548640" y="4983480"/>
+            <a:ext cx="1325880" cy="228600"/>
+          </a:xfrm>
+          <a:prstGeom prst="rect">
+            <a:avLst/>
+          </a:prstGeom>
+          <a:noFill/>
+          <a:ln/>
+        </p:spPr>
+        <p:txBody>
+          <a:bodyPr wrap="square" lIns="0" tIns="0" rIns="0" bIns="0" rtlCol="0" anchor="ctr"/>
+          <a:lstStyle/>
+          <a:p>
+            <a:pPr algn="ctr" indent="0" marL="0">
+              <a:buNone/>
+            </a:pPr>
+            <a:r>
+              <a:rPr lang="en-US" sz="900" dirty="0">
+                <a:solidFill>
+                  <a:srgbClr val="94A3B8"/>
+                </a:solidFill>
+                <a:latin typeface="Arial" pitchFamily="34" charset="0"/>
+                <a:ea typeface="Arial" pitchFamily="34" charset="-122"/>
+                <a:cs typeface="Arial" pitchFamily="34" charset="-120"/>
+              </a:rPr>
+              <a:t>~15s</a:t>
+            </a:r>
+            <a:endParaRPr lang="en-US" sz="900" dirty="0"/>
+          </a:p>
+        </p:txBody>
+      </p:sp>
+      <p:sp>
+        <p:nvSpPr>
+          <p:cNvPr id="38" name="Text 32"/>
+          <p:cNvSpPr/>
+          <p:nvPr/>
+        </p:nvSpPr>
+        <p:spPr>
+          <a:xfrm>
+            <a:off x="1965960" y="4709160"/>
+            <a:ext cx="274320" cy="365760"/>
+          </a:xfrm>
+          <a:prstGeom prst="rect">
+            <a:avLst/>
+          </a:prstGeom>
+          <a:noFill/>
+          <a:ln/>
+        </p:spPr>
+        <p:txBody>
+          <a:bodyPr wrap="square" lIns="0" tIns="0" rIns="0" bIns="0" rtlCol="0" anchor="ctr"/>
+          <a:lstStyle/>
+          <a:p>
+            <a:pPr algn="ctr" indent="0" marL="0">
+              <a:buNone/>
+            </a:pPr>
+            <a:r>
+              <a:rPr lang="en-US" sz="1600" dirty="0">
+                <a:solidFill>
+                  <a:srgbClr val="64748B"/>
+                </a:solidFill>
+                <a:latin typeface="Arial" pitchFamily="34" charset="0"/>
+                <a:ea typeface="Arial" pitchFamily="34" charset="-122"/>
+                <a:cs typeface="Arial" pitchFamily="34" charset="-120"/>
+              </a:rPr>
+              <a:t>→</a:t>
+            </a:r>
+            <a:endParaRPr lang="en-US" sz="1600" dirty="0"/>
+          </a:p>
+        </p:txBody>
+      </p:sp>
+      <p:sp>
+        <p:nvSpPr>
+          <p:cNvPr id="39" name="Text 33"/>
+          <p:cNvSpPr/>
+          <p:nvPr/>
+        </p:nvSpPr>
+        <p:spPr>
+          <a:xfrm>
+            <a:off x="2286000" y="4663440"/>
+            <a:ext cx="2286000" cy="566928"/>
+          </a:xfrm>
+          <a:prstGeom prst="rect">
+            <a:avLst/>
+          </a:prstGeom>
+          <a:noFill/>
+          <a:ln/>
+        </p:spPr>
+        <p:txBody>
+          <a:bodyPr wrap="square" lIns="0" tIns="0" rIns="0" bIns="0" rtlCol="0" anchor="ctr"/>
+          <a:lstStyle/>
+          <a:p>
+            <a:pPr indent="0" marL="0">
+              <a:buNone/>
+            </a:pPr>
+            <a:r>
+              <a:rPr lang="en-US" sz="950" dirty="0">
+                <a:solidFill>
+                  <a:srgbClr val="94A3B8"/>
+                </a:solidFill>
+                <a:latin typeface="Arial" pitchFamily="34" charset="0"/>
+                <a:ea typeface="Arial" pitchFamily="34" charset="-122"/>
+                <a:cs typeface="Arial" pitchFamily="34" charset="-120"/>
+              </a:rPr>
+              <a:t>All 3 previous outputs</a:t>
+            </a:r>
+            <a:endParaRPr lang="en-US" sz="950" dirty="0"/>
+          </a:p>
+        </p:txBody>
+      </p:sp>
+      <p:sp>
+        <p:nvSpPr>
+          <p:cNvPr id="40" name="Text 34"/>
+          <p:cNvSpPr/>
+          <p:nvPr/>
+        </p:nvSpPr>
+        <p:spPr>
+          <a:xfrm>
+            <a:off x="4572000" y="4709160"/>
+            <a:ext cx="274320" cy="365760"/>
+          </a:xfrm>
+          <a:prstGeom prst="rect">
+            <a:avLst/>
+          </a:prstGeom>
+          <a:noFill/>
+          <a:ln/>
+        </p:spPr>
+        <p:txBody>
+          <a:bodyPr wrap="square" lIns="0" tIns="0" rIns="0" bIns="0" rtlCol="0" anchor="ctr"/>
+          <a:lstStyle/>
+          <a:p>
+            <a:pPr algn="ctr" indent="0" marL="0">
+              <a:buNone/>
+            </a:pPr>
+            <a:r>
+              <a:rPr lang="en-US" sz="1600" dirty="0">
+                <a:solidFill>
+                  <a:srgbClr val="64748B"/>
+                </a:solidFill>
+                <a:latin typeface="Arial" pitchFamily="34" charset="0"/>
+                <a:ea typeface="Arial" pitchFamily="34" charset="-122"/>
+                <a:cs typeface="Arial" pitchFamily="34" charset="-120"/>
+              </a:rPr>
+              <a:t>→</a:t>
+            </a:r>
+            <a:endParaRPr lang="en-US" sz="1600" dirty="0"/>
+          </a:p>
+        </p:txBody>
+      </p:sp>
+      <p:sp>
+        <p:nvSpPr>
+          <p:cNvPr id="41" name="Shape 35"/>
+          <p:cNvSpPr/>
+          <p:nvPr/>
+        </p:nvSpPr>
+        <p:spPr>
+          <a:xfrm>
+            <a:off x="4892040" y="4572000"/>
+            <a:ext cx="6812280" cy="749808"/>
+          </a:xfrm>
+          <a:prstGeom prst="roundRect">
+            <a:avLst>
+              <a:gd name="adj" fmla="val 14634"/>
+            </a:avLst>
+          </a:prstGeom>
+          <a:solidFill>
+            <a:srgbClr val="0D1117"/>
+          </a:solidFill>
+          <a:ln w="6350">
+            <a:solidFill>
+              <a:srgbClr val="252547"/>
+            </a:solidFill>
+            <a:prstDash val="solid"/>
+          </a:ln>
+          <a:effectLst>
+            <a:outerShdw sx="100000" sy="100000" kx="0" ky="0" algn="bl" rotWithShape="0" blurRad="76200" dist="38100" dir="18900000">
+              <a:srgbClr val="000000">
+                <a:alpha val="25000"/>
+              </a:srgbClr>
+            </a:outerShdw>
+          </a:effectLst>
+        </p:spPr>
+      </p:sp>
+      <p:sp>
+        <p:nvSpPr>
+          <p:cNvPr id="42" name="Text 36"/>
+          <p:cNvSpPr/>
+          <p:nvPr/>
+        </p:nvSpPr>
+        <p:spPr>
+          <a:xfrm>
+            <a:off x="5029200" y="4617720"/>
+            <a:ext cx="6537960" cy="658368"/>
+          </a:xfrm>
+          <a:prstGeom prst="rect">
+            <a:avLst/>
+          </a:prstGeom>
+          <a:noFill/>
+          <a:ln/>
+        </p:spPr>
+        <p:txBody>
+          <a:bodyPr wrap="square" lIns="0" tIns="0" rIns="0" bIns="0" rtlCol="0" anchor="ctr"/>
+          <a:lstStyle/>
+          <a:p>
+            <a:pPr indent="0" marL="0">
+              <a:lnSpc>
+                <a:spcPct val="100000"/>
+              </a:lnSpc>
+              <a:buNone/>
+            </a:pPr>
+            <a:r>
+              <a:rPr lang="en-US" sz="900" dirty="0">
+                <a:solidFill>
+                  <a:srgbClr val="CBD5E1"/>
+                </a:solidFill>
+                <a:latin typeface="Courier New" pitchFamily="34" charset="0"/>
+                <a:ea typeface="Courier New" pitchFamily="34" charset="-122"/>
+                <a:cs typeface="Courier New" pitchFamily="34" charset="-120"/>
+              </a:rPr>
+              <a:t>Stack: React + FastAPI + SQLite</a:t>
+            </a:r>
+            <a:endParaRPr lang="en-US" sz="900" dirty="0"/>
+          </a:p>
+          <a:p>
+            <a:pPr indent="0" marL="0">
+              <a:lnSpc>
+                <a:spcPct val="100000"/>
+              </a:lnSpc>
+              <a:buNone/>
+            </a:pPr>
+            <a:r>
+              <a:rPr lang="en-US" sz="900" dirty="0">
+                <a:solidFill>
+                  <a:srgbClr val="CBD5E1"/>
+                </a:solidFill>
+                <a:latin typeface="Courier New" pitchFamily="34" charset="0"/>
+                <a:ea typeface="Courier New" pitchFamily="34" charset="-122"/>
+                <a:cs typeface="Courier New" pitchFamily="34" charset="-120"/>
+              </a:rPr>
+              <a:t>14 files planned. IoT simulator module.</a:t>
+            </a:r>
+            <a:endParaRPr lang="en-US" sz="900" dirty="0"/>
+          </a:p>
+          <a:p>
+            <a:pPr indent="0" marL="0">
+              <a:lnSpc>
+                <a:spcPct val="100000"/>
+              </a:lnSpc>
+              <a:buNone/>
+            </a:pPr>
+            <a:r>
+              <a:rPr lang="en-US" sz="900" dirty="0">
+                <a:solidFill>
+                  <a:srgbClr val="CBD5E1"/>
+                </a:solidFill>
+                <a:latin typeface="Courier New" pitchFamily="34" charset="0"/>
+                <a:ea typeface="Courier New" pitchFamily="34" charset="-122"/>
+                <a:cs typeface="Courier New" pitchFamily="34" charset="-120"/>
+              </a:rPr>
+              <a:t>API-first design, mobile-responsive</a:t>
+            </a:r>
+            <a:endParaRPr lang="en-US" sz="900" dirty="0"/>
+          </a:p>
+        </p:txBody>
+      </p:sp>
+      <p:sp>
+        <p:nvSpPr>
+          <p:cNvPr id="43" name="Shape 37"/>
+          <p:cNvSpPr/>
+          <p:nvPr/>
+        </p:nvSpPr>
+        <p:spPr>
+          <a:xfrm>
+            <a:off x="457200" y="5394960"/>
+            <a:ext cx="1508760" cy="749808"/>
+          </a:xfrm>
+          <a:prstGeom prst="roundRect">
+            <a:avLst>
+              <a:gd name="adj" fmla="val 14634"/>
+            </a:avLst>
+          </a:prstGeom>
+          <a:solidFill>
+            <a:srgbClr val="1A1A2E"/>
+          </a:solidFill>
+          <a:ln w="19050">
+            <a:solidFill>
+              <a:srgbClr val="EC4899"/>
+            </a:solidFill>
+            <a:prstDash val="solid"/>
+          </a:ln>
+          <a:effectLst>
+            <a:outerShdw sx="100000" sy="100000" kx="0" ky="0" algn="bl" rotWithShape="0" blurRad="76200" dist="38100" dir="18900000">
+              <a:srgbClr val="000000">
+                <a:alpha val="25000"/>
+              </a:srgbClr>
+            </a:outerShdw>
+          </a:effectLst>
+        </p:spPr>
+      </p:sp>
+      <p:pic>
+        <p:nvPicPr>
+          <p:cNvPr id="44" name="Image 4" descr="preencoded.png">    </p:cNvPr>
+          <p:cNvPicPr>
+            <a:picLocks noChangeAspect="1"/>
+          </p:cNvPicPr>
+          <p:nvPr/>
+        </p:nvPicPr>
+        <p:blipFill>
+          <a:blip r:embed="rId5"/>
+          <a:stretch>
+            <a:fillRect/>
+          </a:stretch>
+        </p:blipFill>
+        <p:spPr>
+          <a:xfrm>
+            <a:off x="594360" y="5468112"/>
+            <a:ext cx="320040" cy="320040"/>
+          </a:xfrm>
+          <a:prstGeom prst="rect">
+            <a:avLst/>
+          </a:prstGeom>
+        </p:spPr>
+      </p:pic>
+      <p:sp>
+        <p:nvSpPr>
+          <p:cNvPr id="45" name="Text 38"/>
+          <p:cNvSpPr/>
+          <p:nvPr/>
+        </p:nvSpPr>
+        <p:spPr>
+          <a:xfrm>
+            <a:off x="960120" y="5440680"/>
+            <a:ext cx="914400" cy="320040"/>
+          </a:xfrm>
+          <a:prstGeom prst="rect">
+            <a:avLst/>
+          </a:prstGeom>
+          <a:noFill/>
+          <a:ln/>
+        </p:spPr>
+        <p:txBody>
+          <a:bodyPr wrap="square" lIns="0" tIns="0" rIns="0" bIns="0" rtlCol="0" anchor="ctr"/>
+          <a:lstStyle/>
+          <a:p>
+            <a:pPr indent="0" marL="0">
+              <a:buNone/>
+            </a:pPr>
+            <a:r>
+              <a:rPr lang="en-US" sz="1100" b="1" dirty="0">
+                <a:solidFill>
+                  <a:srgbClr val="EC4899"/>
+                </a:solidFill>
+                <a:latin typeface="Calibri" pitchFamily="34" charset="0"/>
+                <a:ea typeface="Calibri" pitchFamily="34" charset="-122"/>
+                <a:cs typeface="Calibri" pitchFamily="34" charset="-120"/>
+              </a:rPr>
+              <a:t>Engineer</a:t>
+            </a:r>
+            <a:endParaRPr lang="en-US" sz="1100" dirty="0"/>
+          </a:p>
+        </p:txBody>
+      </p:sp>
+      <p:sp>
+        <p:nvSpPr>
+          <p:cNvPr id="46" name="Text 39"/>
+          <p:cNvSpPr/>
+          <p:nvPr/>
+        </p:nvSpPr>
+        <p:spPr>
+          <a:xfrm>
+            <a:off x="548640" y="5806440"/>
+            <a:ext cx="1325880" cy="228600"/>
+          </a:xfrm>
+          <a:prstGeom prst="rect">
+            <a:avLst/>
+          </a:prstGeom>
+          <a:noFill/>
+          <a:ln/>
+        </p:spPr>
+        <p:txBody>
+          <a:bodyPr wrap="square" lIns="0" tIns="0" rIns="0" bIns="0" rtlCol="0" anchor="ctr"/>
+          <a:lstStyle/>
+          <a:p>
+            <a:pPr algn="ctr" indent="0" marL="0">
+              <a:buNone/>
+            </a:pPr>
+            <a:r>
+              <a:rPr lang="en-US" sz="900" dirty="0">
+                <a:solidFill>
+                  <a:srgbClr val="94A3B8"/>
+                </a:solidFill>
+                <a:latin typeface="Arial" pitchFamily="34" charset="0"/>
+                <a:ea typeface="Arial" pitchFamily="34" charset="-122"/>
+                <a:cs typeface="Arial" pitchFamily="34" charset="-120"/>
+              </a:rPr>
+              <a:t>~3 min</a:t>
+            </a:r>
+            <a:endParaRPr lang="en-US" sz="900" dirty="0"/>
+          </a:p>
+        </p:txBody>
+      </p:sp>
+      <p:sp>
+        <p:nvSpPr>
+          <p:cNvPr id="47" name="Text 40"/>
+          <p:cNvSpPr/>
+          <p:nvPr/>
+        </p:nvSpPr>
+        <p:spPr>
+          <a:xfrm>
+            <a:off x="1965960" y="5532120"/>
+            <a:ext cx="274320" cy="365760"/>
+          </a:xfrm>
+          <a:prstGeom prst="rect">
+            <a:avLst/>
+          </a:prstGeom>
+          <a:noFill/>
+          <a:ln/>
+        </p:spPr>
+        <p:txBody>
+          <a:bodyPr wrap="square" lIns="0" tIns="0" rIns="0" bIns="0" rtlCol="0" anchor="ctr"/>
+          <a:lstStyle/>
+          <a:p>
+            <a:pPr algn="ctr" indent="0" marL="0">
+              <a:buNone/>
+            </a:pPr>
+            <a:r>
+              <a:rPr lang="en-US" sz="1600" dirty="0">
+                <a:solidFill>
+                  <a:srgbClr val="64748B"/>
+                </a:solidFill>
+                <a:latin typeface="Arial" pitchFamily="34" charset="0"/>
+                <a:ea typeface="Arial" pitchFamily="34" charset="-122"/>
+                <a:cs typeface="Arial" pitchFamily="34" charset="-120"/>
+              </a:rPr>
+              <a:t>→</a:t>
+            </a:r>
+            <a:endParaRPr lang="en-US" sz="1600" dirty="0"/>
+          </a:p>
+        </p:txBody>
+      </p:sp>
+      <p:sp>
+        <p:nvSpPr>
+          <p:cNvPr id="48" name="Text 41"/>
+          <p:cNvSpPr/>
+          <p:nvPr/>
+        </p:nvSpPr>
+        <p:spPr>
+          <a:xfrm>
+            <a:off x="2286000" y="5486400"/>
+            <a:ext cx="2286000" cy="566928"/>
+          </a:xfrm>
+          <a:prstGeom prst="rect">
+            <a:avLst/>
+          </a:prstGeom>
+          <a:noFill/>
+          <a:ln/>
+        </p:spPr>
+        <p:txBody>
+          <a:bodyPr wrap="square" lIns="0" tIns="0" rIns="0" bIns="0" rtlCol="0" anchor="ctr"/>
+          <a:lstStyle/>
+          <a:p>
+            <a:pPr indent="0" marL="0">
+              <a:buNone/>
+            </a:pPr>
+            <a:r>
+              <a:rPr lang="en-US" sz="950" dirty="0">
+                <a:solidFill>
+                  <a:srgbClr val="94A3B8"/>
+                </a:solidFill>
+                <a:latin typeface="Arial" pitchFamily="34" charset="0"/>
+                <a:ea typeface="Arial" pitchFamily="34" charset="-122"/>
+                <a:cs typeface="Arial" pitchFamily="34" charset="-120"/>
+              </a:rPr>
+              <a:t>All 4 previous outputs</a:t>
+            </a:r>
+            <a:endParaRPr lang="en-US" sz="950" dirty="0"/>
+          </a:p>
+        </p:txBody>
+      </p:sp>
+      <p:sp>
+        <p:nvSpPr>
+          <p:cNvPr id="49" name="Text 42"/>
+          <p:cNvSpPr/>
+          <p:nvPr/>
+        </p:nvSpPr>
+        <p:spPr>
+          <a:xfrm>
+            <a:off x="4572000" y="5532120"/>
+            <a:ext cx="274320" cy="365760"/>
+          </a:xfrm>
+          <a:prstGeom prst="rect">
+            <a:avLst/>
+          </a:prstGeom>
+          <a:noFill/>
+          <a:ln/>
+        </p:spPr>
+        <p:txBody>
+          <a:bodyPr wrap="square" lIns="0" tIns="0" rIns="0" bIns="0" rtlCol="0" anchor="ctr"/>
+          <a:lstStyle/>
+          <a:p>
+            <a:pPr algn="ctr" indent="0" marL="0">
+              <a:buNone/>
+            </a:pPr>
+            <a:r>
+              <a:rPr lang="en-US" sz="1600" dirty="0">
+                <a:solidFill>
+                  <a:srgbClr val="64748B"/>
+                </a:solidFill>
+                <a:latin typeface="Arial" pitchFamily="34" charset="0"/>
+                <a:ea typeface="Arial" pitchFamily="34" charset="-122"/>
+                <a:cs typeface="Arial" pitchFamily="34" charset="-120"/>
+              </a:rPr>
+              <a:t>→</a:t>
+            </a:r>
+            <a:endParaRPr lang="en-US" sz="1600" dirty="0"/>
+          </a:p>
+        </p:txBody>
+      </p:sp>
+      <p:sp>
+        <p:nvSpPr>
+          <p:cNvPr id="50" name="Shape 43"/>
+          <p:cNvSpPr/>
+          <p:nvPr/>
+        </p:nvSpPr>
+        <p:spPr>
+          <a:xfrm>
+            <a:off x="4892040" y="5394960"/>
+            <a:ext cx="6812280" cy="749808"/>
+          </a:xfrm>
+          <a:prstGeom prst="roundRect">
+            <a:avLst>
+              <a:gd name="adj" fmla="val 14634"/>
+            </a:avLst>
+          </a:prstGeom>
+          <a:solidFill>
+            <a:srgbClr val="0D1117"/>
+          </a:solidFill>
+          <a:ln w="6350">
+            <a:solidFill>
+              <a:srgbClr val="252547"/>
+            </a:solidFill>
+            <a:prstDash val="solid"/>
+          </a:ln>
+          <a:effectLst>
+            <a:outerShdw sx="100000" sy="100000" kx="0" ky="0" algn="bl" rotWithShape="0" blurRad="76200" dist="38100" dir="18900000">
+              <a:srgbClr val="000000">
+                <a:alpha val="25000"/>
+              </a:srgbClr>
+            </a:outerShdw>
+          </a:effectLst>
+        </p:spPr>
+      </p:sp>
+      <p:sp>
+        <p:nvSpPr>
+          <p:cNvPr id="51" name="Text 44"/>
+          <p:cNvSpPr/>
+          <p:nvPr/>
+        </p:nvSpPr>
+        <p:spPr>
+          <a:xfrm>
+            <a:off x="5029200" y="5440680"/>
+            <a:ext cx="6537960" cy="658368"/>
+          </a:xfrm>
+          <a:prstGeom prst="rect">
+            <a:avLst/>
+          </a:prstGeom>
+          <a:noFill/>
+          <a:ln/>
+        </p:spPr>
+        <p:txBody>
+          <a:bodyPr wrap="square" lIns="0" tIns="0" rIns="0" bIns="0" rtlCol="0" anchor="ctr"/>
+          <a:lstStyle/>
+          <a:p>
+            <a:pPr indent="0" marL="0">
+              <a:lnSpc>
+                <a:spcPct val="100000"/>
+              </a:lnSpc>
+              <a:buNone/>
+            </a:pPr>
+            <a:r>
+              <a:rPr lang="en-US" sz="900" dirty="0">
+                <a:solidFill>
+                  <a:srgbClr val="CBD5E1"/>
+                </a:solidFill>
+                <a:latin typeface="Courier New" pitchFamily="34" charset="0"/>
+                <a:ea typeface="Courier New" pitchFamily="34" charset="-122"/>
+                <a:cs typeface="Courier New" pitchFamily="34" charset="-120"/>
+              </a:rPr>
+              <a:t>16,000 tokens of code. 14 files:</a:t>
+            </a:r>
+            <a:endParaRPr lang="en-US" sz="900" dirty="0"/>
+          </a:p>
+          <a:p>
+            <a:pPr indent="0" marL="0">
+              <a:lnSpc>
+                <a:spcPct val="100000"/>
+              </a:lnSpc>
+              <a:buNone/>
+            </a:pPr>
+            <a:r>
+              <a:rPr lang="en-US" sz="900" dirty="0">
+                <a:solidFill>
+                  <a:srgbClr val="CBD5E1"/>
+                </a:solidFill>
+                <a:latin typeface="Courier New" pitchFamily="34" charset="0"/>
+                <a:ea typeface="Courier New" pitchFamily="34" charset="-122"/>
+                <a:cs typeface="Courier New" pitchFamily="34" charset="-120"/>
+              </a:rPr>
+              <a:t>App.jsx, api.py, models.py, IoT simulator,</a:t>
+            </a:r>
+            <a:endParaRPr lang="en-US" sz="900" dirty="0"/>
+          </a:p>
+          <a:p>
+            <a:pPr indent="0" marL="0">
+              <a:lnSpc>
+                <a:spcPct val="100000"/>
+              </a:lnSpc>
+              <a:buNone/>
+            </a:pPr>
+            <a:r>
+              <a:rPr lang="en-US" sz="900" dirty="0">
+                <a:solidFill>
+                  <a:srgbClr val="CBD5E1"/>
+                </a:solidFill>
+                <a:latin typeface="Courier New" pitchFamily="34" charset="0"/>
+                <a:ea typeface="Courier New" pitchFamily="34" charset="-122"/>
+                <a:cs typeface="Courier New" pitchFamily="34" charset="-120"/>
+              </a:rPr>
+              <a:t>dashboard components. Downloadable .zip</a:t>
+            </a:r>
+            <a:endParaRPr lang="en-US" sz="900" dirty="0"/>
+          </a:p>
+        </p:txBody>
+      </p:sp>
+      <p:sp>
+        <p:nvSpPr>
+          <p:cNvPr id="52" name="Shape 45"/>
+          <p:cNvSpPr/>
+          <p:nvPr/>
+        </p:nvSpPr>
+        <p:spPr>
+          <a:xfrm>
+            <a:off x="457200" y="6217920"/>
+            <a:ext cx="1508760" cy="749808"/>
+          </a:xfrm>
+          <a:prstGeom prst="roundRect">
+            <a:avLst>
+              <a:gd name="adj" fmla="val 14634"/>
+            </a:avLst>
+          </a:prstGeom>
+          <a:solidFill>
+            <a:srgbClr val="1A1A2E"/>
+          </a:solidFill>
+          <a:ln w="19050">
+            <a:solidFill>
+              <a:srgbClr val="F59E0B"/>
+            </a:solidFill>
+            <a:prstDash val="solid"/>
+          </a:ln>
+          <a:effectLst>
+            <a:outerShdw sx="100000" sy="100000" kx="0" ky="0" algn="bl" rotWithShape="0" blurRad="76200" dist="38100" dir="18900000">
+              <a:srgbClr val="000000">
+                <a:alpha val="25000"/>
+              </a:srgbClr>
+            </a:outerShdw>
+          </a:effectLst>
+        </p:spPr>
+      </p:sp>
+      <p:pic>
+        <p:nvPicPr>
+          <p:cNvPr id="53" name="Image 5" descr="preencoded.png">    </p:cNvPr>
+          <p:cNvPicPr>
+            <a:picLocks noChangeAspect="1"/>
+          </p:cNvPicPr>
+          <p:nvPr/>
+        </p:nvPicPr>
+        <p:blipFill>
+          <a:blip r:embed="rId6"/>
+          <a:stretch>
+            <a:fillRect/>
+          </a:stretch>
+        </p:blipFill>
+        <p:spPr>
+          <a:xfrm>
+            <a:off x="594360" y="6291072"/>
+            <a:ext cx="320040" cy="320040"/>
+          </a:xfrm>
+          <a:prstGeom prst="rect">
+            <a:avLst/>
+          </a:prstGeom>
+        </p:spPr>
+      </p:pic>
+      <p:sp>
+        <p:nvSpPr>
+          <p:cNvPr id="54" name="Text 46"/>
+          <p:cNvSpPr/>
+          <p:nvPr/>
+        </p:nvSpPr>
+        <p:spPr>
+          <a:xfrm>
+            <a:off x="960120" y="6263640"/>
+            <a:ext cx="914400" cy="320040"/>
+          </a:xfrm>
+          <a:prstGeom prst="rect">
+            <a:avLst/>
+          </a:prstGeom>
+          <a:noFill/>
+          <a:ln/>
+        </p:spPr>
+        <p:txBody>
+          <a:bodyPr wrap="square" lIns="0" tIns="0" rIns="0" bIns="0" rtlCol="0" anchor="ctr"/>
+          <a:lstStyle/>
+          <a:p>
+            <a:pPr indent="0" marL="0">
+              <a:buNone/>
+            </a:pPr>
+            <a:r>
+              <a:rPr lang="en-US" sz="1100" b="1" dirty="0">
+                <a:solidFill>
+                  <a:srgbClr val="F59E0B"/>
+                </a:solidFill>
+                <a:latin typeface="Calibri" pitchFamily="34" charset="0"/>
+                <a:ea typeface="Calibri" pitchFamily="34" charset="-122"/>
+                <a:cs typeface="Calibri" pitchFamily="34" charset="-120"/>
+              </a:rPr>
+              <a:t>PPT</a:t>
+            </a:r>
+            <a:endParaRPr lang="en-US" sz="1100" dirty="0"/>
+          </a:p>
+        </p:txBody>
+      </p:sp>
+      <p:sp>
+        <p:nvSpPr>
+          <p:cNvPr id="55" name="Text 47"/>
+          <p:cNvSpPr/>
+          <p:nvPr/>
+        </p:nvSpPr>
+        <p:spPr>
+          <a:xfrm>
+            <a:off x="548640" y="6629400"/>
+            <a:ext cx="1325880" cy="228600"/>
+          </a:xfrm>
+          <a:prstGeom prst="rect">
+            <a:avLst/>
+          </a:prstGeom>
+          <a:noFill/>
+          <a:ln/>
+        </p:spPr>
+        <p:txBody>
+          <a:bodyPr wrap="square" lIns="0" tIns="0" rIns="0" bIns="0" rtlCol="0" anchor="ctr"/>
+          <a:lstStyle/>
+          <a:p>
+            <a:pPr algn="ctr" indent="0" marL="0">
+              <a:buNone/>
+            </a:pPr>
+            <a:r>
+              <a:rPr lang="en-US" sz="900" dirty="0">
+                <a:solidFill>
+                  <a:srgbClr val="94A3B8"/>
+                </a:solidFill>
+                <a:latin typeface="Arial" pitchFamily="34" charset="0"/>
+                <a:ea typeface="Arial" pitchFamily="34" charset="-122"/>
+                <a:cs typeface="Arial" pitchFamily="34" charset="-120"/>
+              </a:rPr>
+              <a:t>~30s</a:t>
+            </a:r>
+            <a:endParaRPr lang="en-US" sz="900" dirty="0"/>
+          </a:p>
+        </p:txBody>
+      </p:sp>
+      <p:sp>
+        <p:nvSpPr>
+          <p:cNvPr id="56" name="Text 48"/>
+          <p:cNvSpPr/>
+          <p:nvPr/>
+        </p:nvSpPr>
+        <p:spPr>
+          <a:xfrm>
+            <a:off x="1965960" y="6355080"/>
+            <a:ext cx="274320" cy="365760"/>
+          </a:xfrm>
+          <a:prstGeom prst="rect">
+            <a:avLst/>
+          </a:prstGeom>
+          <a:noFill/>
+          <a:ln/>
+        </p:spPr>
+        <p:txBody>
+          <a:bodyPr wrap="square" lIns="0" tIns="0" rIns="0" bIns="0" rtlCol="0" anchor="ctr"/>
+          <a:lstStyle/>
+          <a:p>
+            <a:pPr algn="ctr" indent="0" marL="0">
+              <a:buNone/>
+            </a:pPr>
+            <a:r>
+              <a:rPr lang="en-US" sz="1600" dirty="0">
+                <a:solidFill>
+                  <a:srgbClr val="64748B"/>
+                </a:solidFill>
+                <a:latin typeface="Arial" pitchFamily="34" charset="0"/>
+                <a:ea typeface="Arial" pitchFamily="34" charset="-122"/>
+                <a:cs typeface="Arial" pitchFamily="34" charset="-120"/>
+              </a:rPr>
+              <a:t>→</a:t>
+            </a:r>
+            <a:endParaRPr lang="en-US" sz="1600" dirty="0"/>
+          </a:p>
+        </p:txBody>
+      </p:sp>
+      <p:sp>
+        <p:nvSpPr>
+          <p:cNvPr id="57" name="Text 49"/>
+          <p:cNvSpPr/>
+          <p:nvPr/>
+        </p:nvSpPr>
+        <p:spPr>
+          <a:xfrm>
+            <a:off x="2286000" y="6309360"/>
+            <a:ext cx="2286000" cy="566928"/>
+          </a:xfrm>
+          <a:prstGeom prst="rect">
+            <a:avLst/>
+          </a:prstGeom>
+          <a:noFill/>
+          <a:ln/>
+        </p:spPr>
+        <p:txBody>
+          <a:bodyPr wrap="square" lIns="0" tIns="0" rIns="0" bIns="0" rtlCol="0" anchor="ctr"/>
+          <a:lstStyle/>
+          <a:p>
+            <a:pPr indent="0" marL="0">
+              <a:buNone/>
+            </a:pPr>
+            <a:r>
+              <a:rPr lang="en-US" sz="950" dirty="0">
+                <a:solidFill>
+                  <a:srgbClr val="94A3B8"/>
+                </a:solidFill>
+                <a:latin typeface="Arial" pitchFamily="34" charset="0"/>
+                <a:ea typeface="Arial" pitchFamily="34" charset="-122"/>
+                <a:cs typeface="Arial" pitchFamily="34" charset="-120"/>
+              </a:rPr>
+              <a:t>All 5 previous outputs</a:t>
+            </a:r>
+            <a:endParaRPr lang="en-US" sz="950" dirty="0"/>
+          </a:p>
+        </p:txBody>
+      </p:sp>
+      <p:sp>
+        <p:nvSpPr>
+          <p:cNvPr id="58" name="Text 50"/>
+          <p:cNvSpPr/>
+          <p:nvPr/>
+        </p:nvSpPr>
+        <p:spPr>
+          <a:xfrm>
+            <a:off x="4572000" y="6355080"/>
+            <a:ext cx="274320" cy="365760"/>
+          </a:xfrm>
+          <a:prstGeom prst="rect">
+            <a:avLst/>
+          </a:prstGeom>
+          <a:noFill/>
+          <a:ln/>
+        </p:spPr>
+        <p:txBody>
+          <a:bodyPr wrap="square" lIns="0" tIns="0" rIns="0" bIns="0" rtlCol="0" anchor="ctr"/>
+          <a:lstStyle/>
+          <a:p>
+            <a:pPr algn="ctr" indent="0" marL="0">
+              <a:buNone/>
+            </a:pPr>
+            <a:r>
+              <a:rPr lang="en-US" sz="1600" dirty="0">
+                <a:solidFill>
+                  <a:srgbClr val="64748B"/>
+                </a:solidFill>
+                <a:latin typeface="Arial" pitchFamily="34" charset="0"/>
+                <a:ea typeface="Arial" pitchFamily="34" charset="-122"/>
+                <a:cs typeface="Arial" pitchFamily="34" charset="-120"/>
+              </a:rPr>
+              <a:t>→</a:t>
+            </a:r>
+            <a:endParaRPr lang="en-US" sz="1600" dirty="0"/>
+          </a:p>
+        </p:txBody>
+      </p:sp>
+      <p:sp>
+        <p:nvSpPr>
+          <p:cNvPr id="59" name="Shape 51"/>
+          <p:cNvSpPr/>
+          <p:nvPr/>
+        </p:nvSpPr>
+        <p:spPr>
+          <a:xfrm>
+            <a:off x="4892040" y="6217920"/>
+            <a:ext cx="6812280" cy="749808"/>
+          </a:xfrm>
+          <a:prstGeom prst="roundRect">
+            <a:avLst>
+              <a:gd name="adj" fmla="val 14634"/>
+            </a:avLst>
+          </a:prstGeom>
+          <a:solidFill>
+            <a:srgbClr val="0D1117"/>
+          </a:solidFill>
+          <a:ln w="6350">
+            <a:solidFill>
+              <a:srgbClr val="252547"/>
+            </a:solidFill>
+            <a:prstDash val="solid"/>
+          </a:ln>
+          <a:effectLst>
+            <a:outerShdw sx="100000" sy="100000" kx="0" ky="0" algn="bl" rotWithShape="0" blurRad="76200" dist="38100" dir="18900000">
+              <a:srgbClr val="000000">
+                <a:alpha val="25000"/>
+              </a:srgbClr>
+            </a:outerShdw>
+          </a:effectLst>
+        </p:spPr>
+      </p:sp>
+      <p:sp>
+        <p:nvSpPr>
+          <p:cNvPr id="60" name="Text 52"/>
+          <p:cNvSpPr/>
+          <p:nvPr/>
+        </p:nvSpPr>
+        <p:spPr>
+          <a:xfrm>
+            <a:off x="5029200" y="6263640"/>
+            <a:ext cx="6537960" cy="658368"/>
+          </a:xfrm>
+          <a:prstGeom prst="rect">
+            <a:avLst/>
+          </a:prstGeom>
+          <a:noFill/>
+          <a:ln/>
+        </p:spPr>
+        <p:txBody>
+          <a:bodyPr wrap="square" lIns="0" tIns="0" rIns="0" bIns="0" rtlCol="0" anchor="ctr"/>
+          <a:lstStyle/>
+          <a:p>
+            <a:pPr indent="0" marL="0">
+              <a:lnSpc>
+                <a:spcPct val="100000"/>
+              </a:lnSpc>
+              <a:buNone/>
+            </a:pPr>
+            <a:r>
+              <a:rPr lang="en-US" sz="900" dirty="0">
+                <a:solidFill>
+                  <a:srgbClr val="CBD5E1"/>
+                </a:solidFill>
+                <a:latin typeface="Courier New" pitchFamily="34" charset="0"/>
+                <a:ea typeface="Courier New" pitchFamily="34" charset="-122"/>
+                <a:cs typeface="Courier New" pitchFamily="34" charset="-120"/>
+              </a:rPr>
+              <a:t>10-slide pitch deck: Problem, Solution,</a:t>
+            </a:r>
+            <a:endParaRPr lang="en-US" sz="900" dirty="0"/>
+          </a:p>
+          <a:p>
+            <a:pPr indent="0" marL="0">
+              <a:lnSpc>
+                <a:spcPct val="100000"/>
+              </a:lnSpc>
+              <a:buNone/>
+            </a:pPr>
+            <a:r>
+              <a:rPr lang="en-US" sz="900" dirty="0">
+                <a:solidFill>
+                  <a:srgbClr val="CBD5E1"/>
+                </a:solidFill>
+                <a:latin typeface="Courier New" pitchFamily="34" charset="0"/>
+                <a:ea typeface="Courier New" pitchFamily="34" charset="-122"/>
+                <a:cs typeface="Courier New" pitchFamily="34" charset="-120"/>
+              </a:rPr>
+              <a:t>Architecture, Demo screenshots, Tech stack,</a:t>
+            </a:r>
+            <a:endParaRPr lang="en-US" sz="900" dirty="0"/>
+          </a:p>
+          <a:p>
+            <a:pPr indent="0" marL="0">
+              <a:lnSpc>
+                <a:spcPct val="100000"/>
+              </a:lnSpc>
+              <a:buNone/>
+            </a:pPr>
+            <a:r>
+              <a:rPr lang="en-US" sz="900" dirty="0">
+                <a:solidFill>
+                  <a:srgbClr val="CBD5E1"/>
+                </a:solidFill>
+                <a:latin typeface="Courier New" pitchFamily="34" charset="0"/>
+                <a:ea typeface="Courier New" pitchFamily="34" charset="-122"/>
+                <a:cs typeface="Courier New" pitchFamily="34" charset="-120"/>
+              </a:rPr>
+              <a:t>Team, Timeline. Generated as .pptx</a:t>
+            </a:r>
+            <a:endParaRPr lang="en-US" sz="900" dirty="0"/>
+          </a:p>
+        </p:txBody>
+      </p:sp>
+    </p:spTree>
+  </p:cSld>
+  <p:clrMapOvr>
+    <a:masterClrMapping/>
+  </p:clrMapOvr>
+</p:sld>
+</file>
+
+<file path=ppt/slides/slide16.xml><?xml version="1.0" encoding="utf-8"?>
+<p:sld xmlns:a="http://schemas.openxmlformats.org/drawingml/2006/main" xmlns:r="http://schemas.openxmlformats.org/officeDocument/2006/relationships" xmlns:p="http://schemas.openxmlformats.org/presentationml/2006/main">
+  <p:cSld name="Slide 16">
+    <p:bg>
+      <p:bgPr>
+        <a:solidFill>
+          <a:srgbClr val="0F0F23"/>
+        </a:solidFill>
+      </p:bgPr>
+    </p:bg>
+    <p:spTree>
+      <p:nvGrpSpPr>
+        <p:cNvPr id="1" name=""/>
+        <p:cNvGrpSpPr/>
+        <p:nvPr/>
+      </p:nvGrpSpPr>
+      <p:grpSpPr>
+        <a:xfrm>
+          <a:off x="0" y="0"/>
+          <a:ext cx="0" cy="0"/>
+          <a:chOff x="0" y="0"/>
+          <a:chExt cx="0" cy="0"/>
+        </a:xfrm>
+      </p:grpSpPr>
+      <p:sp>
+        <p:nvSpPr>
+          <p:cNvPr id="2" name="Text 0"/>
+          <p:cNvSpPr/>
+          <p:nvPr/>
+        </p:nvSpPr>
+        <p:spPr>
+          <a:xfrm>
+            <a:off x="10972800" y="6492240"/>
+            <a:ext cx="731520" cy="228600"/>
+          </a:xfrm>
+          <a:prstGeom prst="rect">
+            <a:avLst/>
+          </a:prstGeom>
+          <a:noFill/>
+          <a:ln/>
+        </p:spPr>
+        <p:txBody>
+          <a:bodyPr wrap="square" lIns="0" tIns="0" rIns="0" bIns="0" rtlCol="0" anchor="ctr"/>
+          <a:lstStyle/>
+          <a:p>
+            <a:pPr algn="r" indent="0" marL="0">
+              <a:buNone/>
+            </a:pPr>
+            <a:r>
+              <a:rPr lang="en-US" sz="900" dirty="0">
+                <a:solidFill>
+                  <a:srgbClr val="64748B"/>
+                </a:solidFill>
+                <a:latin typeface="Arial" pitchFamily="34" charset="0"/>
+                <a:ea typeface="Arial" pitchFamily="34" charset="-122"/>
+                <a:cs typeface="Arial" pitchFamily="34" charset="-120"/>
+              </a:rPr>
+              <a:t>16/17</a:t>
+            </a:r>
+            <a:endParaRPr lang="en-US" sz="900" dirty="0"/>
+          </a:p>
+        </p:txBody>
+      </p:sp>
+      <p:sp>
+        <p:nvSpPr>
+          <p:cNvPr id="3" name="Text 1"/>
+          <p:cNvSpPr/>
+          <p:nvPr/>
+        </p:nvSpPr>
+        <p:spPr>
+          <a:xfrm>
+            <a:off x="640080" y="228600"/>
+            <a:ext cx="10881360" cy="594360"/>
+          </a:xfrm>
+          <a:prstGeom prst="rect">
+            <a:avLst/>
+          </a:prstGeom>
+          <a:noFill/>
+          <a:ln/>
+        </p:spPr>
+        <p:txBody>
+          <a:bodyPr wrap="square" lIns="0" tIns="0" rIns="0" bIns="0" rtlCol="0" anchor="ctr"/>
+          <a:lstStyle/>
+          <a:p>
+            <a:pPr indent="0" marL="0">
+              <a:buNone/>
+            </a:pPr>
+            <a:r>
+              <a:rPr lang="en-US" sz="3600" b="1" dirty="0">
+                <a:solidFill>
+                  <a:srgbClr val="FFFFFF"/>
+                </a:solidFill>
+                <a:latin typeface="Calibri" pitchFamily="34" charset="0"/>
+                <a:ea typeface="Calibri" pitchFamily="34" charset="-122"/>
+                <a:cs typeface="Calibri" pitchFamily="34" charset="-120"/>
+              </a:rPr>
+              <a:t>Meet Our 6 AI Agents</a:t>
+            </a:r>
+            <a:endParaRPr lang="en-US" sz="3600" dirty="0"/>
+          </a:p>
+        </p:txBody>
+      </p:sp>
+      <p:sp>
+        <p:nvSpPr>
+          <p:cNvPr id="4" name="Text 2"/>
+          <p:cNvSpPr/>
+          <p:nvPr/>
+        </p:nvSpPr>
+        <p:spPr>
+          <a:xfrm>
+            <a:off x="640080" y="822960"/>
+            <a:ext cx="10881360" cy="320040"/>
+          </a:xfrm>
+          <a:prstGeom prst="rect">
+            <a:avLst/>
+          </a:prstGeom>
+          <a:noFill/>
+          <a:ln/>
+        </p:spPr>
+        <p:txBody>
+          <a:bodyPr wrap="square" lIns="0" tIns="0" rIns="0" bIns="0" rtlCol="0" anchor="ctr"/>
+          <a:lstStyle/>
+          <a:p>
+            <a:pPr indent="0" marL="0">
+              <a:buNone/>
+            </a:pPr>
+            <a:r>
+              <a:rPr lang="en-US" sz="1300" dirty="0">
+                <a:solidFill>
+                  <a:srgbClr val="94A3B8"/>
+                </a:solidFill>
+                <a:latin typeface="Arial" pitchFamily="34" charset="0"/>
+                <a:ea typeface="Arial" pitchFamily="34" charset="-122"/>
+                <a:cs typeface="Arial" pitchFamily="34" charset="-120"/>
+              </a:rPr>
+              <a:t>Each agent has a specialized role, model, and output format</a:t>
+            </a:r>
+            <a:endParaRPr lang="en-US" sz="1300" dirty="0"/>
+          </a:p>
+        </p:txBody>
+      </p:sp>
+      <p:sp>
+        <p:nvSpPr>
+          <p:cNvPr id="5" name="Shape 3"/>
+          <p:cNvSpPr/>
+          <p:nvPr/>
+        </p:nvSpPr>
+        <p:spPr>
+          <a:xfrm>
+            <a:off x="457200" y="1280160"/>
+            <a:ext cx="3520440" cy="2331720"/>
+          </a:xfrm>
+          <a:prstGeom prst="roundRect">
+            <a:avLst>
+              <a:gd name="adj" fmla="val 4706"/>
+            </a:avLst>
+          </a:prstGeom>
+          <a:solidFill>
+            <a:srgbClr val="1A1A2E"/>
+          </a:solidFill>
+          <a:ln w="19050">
+            <a:solidFill>
+              <a:srgbClr val="F59E0B"/>
+            </a:solidFill>
+            <a:prstDash val="solid"/>
+          </a:ln>
+          <a:effectLst>
+            <a:outerShdw sx="100000" sy="100000" kx="0" ky="0" algn="bl" rotWithShape="0" blurRad="76200" dist="38100" dir="18900000">
+              <a:srgbClr val="000000">
+                <a:alpha val="25000"/>
+              </a:srgbClr>
+            </a:outerShdw>
+          </a:effectLst>
+        </p:spPr>
+      </p:sp>
+      <p:sp>
+        <p:nvSpPr>
+          <p:cNvPr id="6" name="Shape 4"/>
+          <p:cNvSpPr/>
+          <p:nvPr/>
+        </p:nvSpPr>
+        <p:spPr>
+          <a:xfrm>
+            <a:off x="594360" y="1389888"/>
+            <a:ext cx="411480" cy="411480"/>
+          </a:xfrm>
+          <a:prstGeom prst="ellipse">
+            <a:avLst/>
+          </a:prstGeom>
+          <a:solidFill>
+            <a:srgbClr val="F59E0B">
+              <a:alpha val="20000"/>
+            </a:srgbClr>
+          </a:solidFill>
+          <a:ln w="19050">
+            <a:solidFill>
+              <a:srgbClr val="F59E0B"/>
+            </a:solidFill>
+            <a:prstDash val="solid"/>
+          </a:ln>
+        </p:spPr>
+      </p:sp>
+      <p:pic>
+        <p:nvPicPr>
+          <p:cNvPr id="7" name="Image 0" descr="preencoded.png">    </p:cNvPr>
+          <p:cNvPicPr>
+            <a:picLocks noChangeAspect="1"/>
+          </p:cNvPicPr>
+          <p:nvPr/>
+        </p:nvPicPr>
+        <p:blipFill>
+          <a:blip r:embed="rId1"/>
+          <a:stretch>
+            <a:fillRect/>
+          </a:stretch>
+        </p:blipFill>
+        <p:spPr>
+          <a:xfrm>
+            <a:off x="684886" y="1480414"/>
+            <a:ext cx="230429" cy="230429"/>
+          </a:xfrm>
+          <a:prstGeom prst="rect">
+            <a:avLst/>
+          </a:prstGeom>
+        </p:spPr>
+      </p:pic>
+      <p:sp>
+        <p:nvSpPr>
+          <p:cNvPr id="8" name="Text 5"/>
+          <p:cNvSpPr/>
+          <p:nvPr/>
+        </p:nvSpPr>
+        <p:spPr>
+          <a:xfrm>
+            <a:off x="1097280" y="1389888"/>
+            <a:ext cx="2286000" cy="274320"/>
+          </a:xfrm>
+          <a:prstGeom prst="rect">
+            <a:avLst/>
+          </a:prstGeom>
+          <a:noFill/>
+          <a:ln/>
+        </p:spPr>
+        <p:txBody>
+          <a:bodyPr wrap="square" lIns="0" tIns="0" rIns="0" bIns="0" rtlCol="0" anchor="ctr"/>
+          <a:lstStyle/>
+          <a:p>
+            <a:pPr indent="0" marL="0">
+              <a:buNone/>
+            </a:pPr>
+            <a:r>
+              <a:rPr lang="en-US" sz="1400" b="1" dirty="0">
+                <a:solidFill>
+                  <a:srgbClr val="F59E0B"/>
+                </a:solidFill>
+                <a:latin typeface="Calibri" pitchFamily="34" charset="0"/>
+                <a:ea typeface="Calibri" pitchFamily="34" charset="-122"/>
+                <a:cs typeface="Calibri" pitchFamily="34" charset="-120"/>
+              </a:rPr>
+              <a:t>CEO Agent</a:t>
+            </a:r>
+            <a:endParaRPr lang="en-US" sz="1400" dirty="0"/>
+          </a:p>
+        </p:txBody>
+      </p:sp>
+      <p:sp>
+        <p:nvSpPr>
+          <p:cNvPr id="9" name="Text 6"/>
+          <p:cNvSpPr/>
+          <p:nvPr/>
+        </p:nvSpPr>
+        <p:spPr>
+          <a:xfrm>
+            <a:off x="1097280" y="1664208"/>
+            <a:ext cx="2286000" cy="182880"/>
+          </a:xfrm>
+          <a:prstGeom prst="rect">
+            <a:avLst/>
+          </a:prstGeom>
+          <a:noFill/>
+          <a:ln/>
+        </p:spPr>
+        <p:txBody>
+          <a:bodyPr wrap="square" lIns="0" tIns="0" rIns="0" bIns="0" rtlCol="0" anchor="ctr"/>
+          <a:lstStyle/>
+          <a:p>
+            <a:pPr indent="0" marL="0">
+              <a:buNone/>
+            </a:pPr>
+            <a:r>
+              <a:rPr lang="en-US" sz="900" i="1" dirty="0">
+                <a:solidFill>
+                  <a:srgbClr val="94A3B8"/>
+                </a:solidFill>
+                <a:latin typeface="Arial" pitchFamily="34" charset="0"/>
+                <a:ea typeface="Arial" pitchFamily="34" charset="-122"/>
+                <a:cs typeface="Arial" pitchFamily="34" charset="-120"/>
+              </a:rPr>
+              <a:t>Project Manager</a:t>
+            </a:r>
+            <a:endParaRPr lang="en-US" sz="900" dirty="0"/>
+          </a:p>
+        </p:txBody>
+      </p:sp>
+      <p:sp>
+        <p:nvSpPr>
+          <p:cNvPr id="10" name="Text 7"/>
+          <p:cNvSpPr/>
+          <p:nvPr/>
+        </p:nvSpPr>
+        <p:spPr>
+          <a:xfrm>
+            <a:off x="594360" y="1920240"/>
+            <a:ext cx="1417320" cy="201168"/>
+          </a:xfrm>
+          <a:prstGeom prst="rect">
+            <a:avLst/>
+          </a:prstGeom>
+          <a:noFill/>
+          <a:ln/>
+        </p:spPr>
+        <p:txBody>
+          <a:bodyPr wrap="square" lIns="0" tIns="0" rIns="0" bIns="0" rtlCol="0" anchor="ctr"/>
+          <a:lstStyle/>
+          <a:p>
+            <a:pPr indent="0" marL="0">
+              <a:buNone/>
+            </a:pPr>
+            <a:r>
+              <a:rPr lang="en-US" sz="850" dirty="0">
+                <a:solidFill>
+                  <a:srgbClr val="00D4FF"/>
+                </a:solidFill>
+                <a:latin typeface="Arial" pitchFamily="34" charset="0"/>
+                <a:ea typeface="Arial" pitchFamily="34" charset="-122"/>
+                <a:cs typeface="Arial" pitchFamily="34" charset="-120"/>
+              </a:rPr>
+              <a:t>Gemma 4 27B</a:t>
+            </a:r>
+            <a:endParaRPr lang="en-US" sz="850" dirty="0"/>
+          </a:p>
+        </p:txBody>
+      </p:sp>
+      <p:sp>
+        <p:nvSpPr>
+          <p:cNvPr id="11" name="Text 8"/>
+          <p:cNvSpPr/>
+          <p:nvPr/>
+        </p:nvSpPr>
+        <p:spPr>
+          <a:xfrm>
+            <a:off x="2103120" y="1920240"/>
+            <a:ext cx="1371600" cy="201168"/>
+          </a:xfrm>
+          <a:prstGeom prst="rect">
+            <a:avLst/>
+          </a:prstGeom>
+          <a:noFill/>
+          <a:ln/>
+        </p:spPr>
+        <p:txBody>
+          <a:bodyPr wrap="square" lIns="0" tIns="0" rIns="0" bIns="0" rtlCol="0" anchor="ctr"/>
+          <a:lstStyle/>
+          <a:p>
+            <a:pPr indent="0" marL="0">
+              <a:buNone/>
+            </a:pPr>
+            <a:r>
+              <a:rPr lang="en-US" sz="850" dirty="0">
+                <a:solidFill>
+                  <a:srgbClr val="F59E0B"/>
+                </a:solidFill>
+                <a:latin typeface="Arial" pitchFamily="34" charset="0"/>
+                <a:ea typeface="Arial" pitchFamily="34" charset="-122"/>
+                <a:cs typeface="Arial" pitchFamily="34" charset="-120"/>
+              </a:rPr>
+              <a:t>None (auto)</a:t>
+            </a:r>
+            <a:endParaRPr lang="en-US" sz="850" dirty="0"/>
+          </a:p>
+        </p:txBody>
+      </p:sp>
+      <p:sp>
+        <p:nvSpPr>
+          <p:cNvPr id="12" name="Text 9"/>
+          <p:cNvSpPr/>
+          <p:nvPr/>
+        </p:nvSpPr>
+        <p:spPr>
+          <a:xfrm>
+            <a:off x="594360" y="2194560"/>
+            <a:ext cx="3246120" cy="822960"/>
+          </a:xfrm>
+          <a:prstGeom prst="rect">
+            <a:avLst/>
+          </a:prstGeom>
+          <a:noFill/>
+          <a:ln/>
+        </p:spPr>
+        <p:txBody>
+          <a:bodyPr wrap="square" lIns="0" tIns="0" rIns="0" bIns="0" rtlCol="0" anchor="ctr"/>
+          <a:lstStyle/>
+          <a:p>
+            <a:pPr indent="0" marL="0">
+              <a:lnSpc>
+                <a:spcPct val="115000"/>
+              </a:lnSpc>
+              <a:buNone/>
+            </a:pPr>
+            <a:r>
+              <a:rPr lang="en-US" sz="1100" dirty="0">
+                <a:solidFill>
+                  <a:srgbClr val="CBD5E1"/>
+                </a:solidFill>
+                <a:latin typeface="Arial" pitchFamily="34" charset="0"/>
+                <a:ea typeface="Arial" pitchFamily="34" charset="-122"/>
+                <a:cs typeface="Arial" pitchFamily="34" charset="-120"/>
+              </a:rPr>
+              <a:t>Takes a vague problem statement and creates a structured project brief with features, users, scope, and risks.</a:t>
+            </a:r>
+            <a:endParaRPr lang="en-US" sz="1100" dirty="0"/>
+          </a:p>
+        </p:txBody>
+      </p:sp>
+      <p:sp>
+        <p:nvSpPr>
+          <p:cNvPr id="13" name="Text 10"/>
+          <p:cNvSpPr/>
+          <p:nvPr/>
+        </p:nvSpPr>
+        <p:spPr>
+          <a:xfrm>
+            <a:off x="594360" y="3108960"/>
+            <a:ext cx="3246120" cy="228600"/>
+          </a:xfrm>
+          <a:prstGeom prst="rect">
+            <a:avLst/>
+          </a:prstGeom>
+          <a:noFill/>
+          <a:ln/>
+        </p:spPr>
+        <p:txBody>
+          <a:bodyPr wrap="square" lIns="0" tIns="0" rIns="0" bIns="0" rtlCol="0" anchor="ctr"/>
+          <a:lstStyle/>
+          <a:p>
+            <a:pPr indent="0" marL="0">
+              <a:buNone/>
+            </a:pPr>
+            <a:r>
+              <a:rPr lang="en-US" sz="1000" b="1" dirty="0">
+                <a:solidFill>
+                  <a:srgbClr val="94A3B8"/>
+                </a:solidFill>
+                <a:latin typeface="Arial" pitchFamily="34" charset="0"/>
+                <a:ea typeface="Arial" pitchFamily="34" charset="-122"/>
+                <a:cs typeface="Arial" pitchFamily="34" charset="-120"/>
+              </a:rPr>
+              <a:t>Output: </a:t>
+            </a:r>
+            <a:pPr indent="0" marL="0">
+              <a:buNone/>
+            </a:pPr>
+            <a:r>
+              <a:rPr lang="en-US" sz="1000" dirty="0">
+                <a:solidFill>
+                  <a:srgbClr val="CBD5E1"/>
+                </a:solidFill>
+                <a:latin typeface="Arial" pitchFamily="34" charset="0"/>
+                <a:ea typeface="Arial" pitchFamily="34" charset="-122"/>
+                <a:cs typeface="Arial" pitchFamily="34" charset="-120"/>
+              </a:rPr>
+              <a:t>8-field JSON brief</a:t>
+            </a:r>
+            <a:endParaRPr lang="en-US" sz="1000" dirty="0"/>
+          </a:p>
+        </p:txBody>
+      </p:sp>
+      <p:sp>
+        <p:nvSpPr>
+          <p:cNvPr id="14" name="Shape 11"/>
+          <p:cNvSpPr/>
+          <p:nvPr/>
+        </p:nvSpPr>
+        <p:spPr>
+          <a:xfrm>
+            <a:off x="4251960" y="1280160"/>
+            <a:ext cx="3520440" cy="2331720"/>
+          </a:xfrm>
+          <a:prstGeom prst="roundRect">
+            <a:avLst>
+              <a:gd name="adj" fmla="val 4706"/>
+            </a:avLst>
+          </a:prstGeom>
+          <a:solidFill>
+            <a:srgbClr val="1A1A2E"/>
+          </a:solidFill>
+          <a:ln w="19050">
+            <a:solidFill>
+              <a:srgbClr val="7C3AED"/>
+            </a:solidFill>
+            <a:prstDash val="solid"/>
+          </a:ln>
+          <a:effectLst>
+            <a:outerShdw sx="100000" sy="100000" kx="0" ky="0" algn="bl" rotWithShape="0" blurRad="76200" dist="38100" dir="18900000">
+              <a:srgbClr val="000000">
+                <a:alpha val="25000"/>
+              </a:srgbClr>
+            </a:outerShdw>
+          </a:effectLst>
+        </p:spPr>
+      </p:sp>
+      <p:sp>
+        <p:nvSpPr>
+          <p:cNvPr id="15" name="Shape 12"/>
+          <p:cNvSpPr/>
+          <p:nvPr/>
+        </p:nvSpPr>
+        <p:spPr>
+          <a:xfrm>
+            <a:off x="4389120" y="1389888"/>
+            <a:ext cx="411480" cy="411480"/>
+          </a:xfrm>
+          <a:prstGeom prst="ellipse">
+            <a:avLst/>
+          </a:prstGeom>
+          <a:solidFill>
+            <a:srgbClr val="7C3AED">
+              <a:alpha val="20000"/>
+            </a:srgbClr>
+          </a:solidFill>
+          <a:ln w="19050">
+            <a:solidFill>
+              <a:srgbClr val="7C3AED"/>
+            </a:solidFill>
+            <a:prstDash val="solid"/>
+          </a:ln>
+        </p:spPr>
+      </p:sp>
+      <p:pic>
+        <p:nvPicPr>
+          <p:cNvPr id="16" name="Image 1" descr="preencoded.png">    </p:cNvPr>
+          <p:cNvPicPr>
+            <a:picLocks noChangeAspect="1"/>
+          </p:cNvPicPr>
+          <p:nvPr/>
+        </p:nvPicPr>
+        <p:blipFill>
+          <a:blip r:embed="rId2"/>
+          <a:stretch>
+            <a:fillRect/>
+          </a:stretch>
+        </p:blipFill>
+        <p:spPr>
+          <a:xfrm>
+            <a:off x="4479646" y="1480414"/>
+            <a:ext cx="230429" cy="230429"/>
+          </a:xfrm>
+          <a:prstGeom prst="rect">
+            <a:avLst/>
+          </a:prstGeom>
+        </p:spPr>
+      </p:pic>
+      <p:sp>
+        <p:nvSpPr>
+          <p:cNvPr id="17" name="Text 13"/>
+          <p:cNvSpPr/>
+          <p:nvPr/>
+        </p:nvSpPr>
+        <p:spPr>
+          <a:xfrm>
+            <a:off x="4892040" y="1389888"/>
+            <a:ext cx="2286000" cy="274320"/>
+          </a:xfrm>
+          <a:prstGeom prst="rect">
+            <a:avLst/>
+          </a:prstGeom>
+          <a:noFill/>
+          <a:ln/>
+        </p:spPr>
+        <p:txBody>
+          <a:bodyPr wrap="square" lIns="0" tIns="0" rIns="0" bIns="0" rtlCol="0" anchor="ctr"/>
+          <a:lstStyle/>
+          <a:p>
+            <a:pPr indent="0" marL="0">
+              <a:buNone/>
+            </a:pPr>
+            <a:r>
+              <a:rPr lang="en-US" sz="1400" b="1" dirty="0">
+                <a:solidFill>
+                  <a:srgbClr val="7C3AED"/>
+                </a:solidFill>
+                <a:latin typeface="Calibri" pitchFamily="34" charset="0"/>
+                <a:ea typeface="Calibri" pitchFamily="34" charset="-122"/>
+                <a:cs typeface="Calibri" pitchFamily="34" charset="-120"/>
+              </a:rPr>
+              <a:t>Business Analyst</a:t>
+            </a:r>
+            <a:endParaRPr lang="en-US" sz="1400" dirty="0"/>
+          </a:p>
+        </p:txBody>
+      </p:sp>
+      <p:sp>
+        <p:nvSpPr>
+          <p:cNvPr id="18" name="Text 14"/>
+          <p:cNvSpPr/>
+          <p:nvPr/>
+        </p:nvSpPr>
+        <p:spPr>
+          <a:xfrm>
+            <a:off x="4892040" y="1664208"/>
+            <a:ext cx="2286000" cy="182880"/>
+          </a:xfrm>
+          <a:prstGeom prst="rect">
+            <a:avLst/>
+          </a:prstGeom>
+          <a:noFill/>
+          <a:ln/>
+        </p:spPr>
+        <p:txBody>
+          <a:bodyPr wrap="square" lIns="0" tIns="0" rIns="0" bIns="0" rtlCol="0" anchor="ctr"/>
+          <a:lstStyle/>
+          <a:p>
+            <a:pPr indent="0" marL="0">
+              <a:buNone/>
+            </a:pPr>
+            <a:r>
+              <a:rPr lang="en-US" sz="900" i="1" dirty="0">
+                <a:solidFill>
+                  <a:srgbClr val="94A3B8"/>
+                </a:solidFill>
+                <a:latin typeface="Arial" pitchFamily="34" charset="0"/>
+                <a:ea typeface="Arial" pitchFamily="34" charset="-122"/>
+                <a:cs typeface="Arial" pitchFamily="34" charset="-120"/>
+              </a:rPr>
+              <a:t>Requirements Engineer</a:t>
+            </a:r>
+            <a:endParaRPr lang="en-US" sz="900" dirty="0"/>
+          </a:p>
+        </p:txBody>
+      </p:sp>
+      <p:sp>
+        <p:nvSpPr>
+          <p:cNvPr id="19" name="Text 15"/>
+          <p:cNvSpPr/>
+          <p:nvPr/>
+        </p:nvSpPr>
+        <p:spPr>
+          <a:xfrm>
+            <a:off x="4389120" y="1920240"/>
+            <a:ext cx="1417320" cy="201168"/>
+          </a:xfrm>
+          <a:prstGeom prst="rect">
+            <a:avLst/>
+          </a:prstGeom>
+          <a:noFill/>
+          <a:ln/>
+        </p:spPr>
+        <p:txBody>
+          <a:bodyPr wrap="square" lIns="0" tIns="0" rIns="0" bIns="0" rtlCol="0" anchor="ctr"/>
+          <a:lstStyle/>
+          <a:p>
+            <a:pPr indent="0" marL="0">
+              <a:buNone/>
+            </a:pPr>
+            <a:r>
+              <a:rPr lang="en-US" sz="850" dirty="0">
+                <a:solidFill>
+                  <a:srgbClr val="00D4FF"/>
+                </a:solidFill>
+                <a:latin typeface="Arial" pitchFamily="34" charset="0"/>
+                <a:ea typeface="Arial" pitchFamily="34" charset="-122"/>
+                <a:cs typeface="Arial" pitchFamily="34" charset="-120"/>
+              </a:rPr>
+              <a:t>Gemma 4 27B</a:t>
+            </a:r>
+            <a:endParaRPr lang="en-US" sz="850" dirty="0"/>
+          </a:p>
+        </p:txBody>
+      </p:sp>
+      <p:sp>
+        <p:nvSpPr>
+          <p:cNvPr id="20" name="Text 16"/>
+          <p:cNvSpPr/>
+          <p:nvPr/>
+        </p:nvSpPr>
+        <p:spPr>
+          <a:xfrm>
+            <a:off x="5897880" y="1920240"/>
+            <a:ext cx="1371600" cy="201168"/>
+          </a:xfrm>
+          <a:prstGeom prst="rect">
+            <a:avLst/>
+          </a:prstGeom>
+          <a:noFill/>
+          <a:ln/>
+        </p:spPr>
+        <p:txBody>
+          <a:bodyPr wrap="square" lIns="0" tIns="0" rIns="0" bIns="0" rtlCol="0" anchor="ctr"/>
+          <a:lstStyle/>
+          <a:p>
+            <a:pPr indent="0" marL="0">
+              <a:buNone/>
+            </a:pPr>
+            <a:r>
+              <a:rPr lang="en-US" sz="850" dirty="0">
+                <a:solidFill>
+                  <a:srgbClr val="F59E0B"/>
+                </a:solidFill>
+                <a:latin typeface="Arial" pitchFamily="34" charset="0"/>
+                <a:ea typeface="Arial" pitchFamily="34" charset="-122"/>
+                <a:cs typeface="Arial" pitchFamily="34" charset="-120"/>
+              </a:rPr>
+              <a:t>Gate 1</a:t>
+            </a:r>
+            <a:endParaRPr lang="en-US" sz="850" dirty="0"/>
+          </a:p>
+        </p:txBody>
+      </p:sp>
+      <p:sp>
+        <p:nvSpPr>
+          <p:cNvPr id="21" name="Text 17"/>
+          <p:cNvSpPr/>
+          <p:nvPr/>
+        </p:nvSpPr>
+        <p:spPr>
+          <a:xfrm>
+            <a:off x="4389120" y="2194560"/>
+            <a:ext cx="3246120" cy="822960"/>
+          </a:xfrm>
+          <a:prstGeom prst="rect">
+            <a:avLst/>
+          </a:prstGeom>
+          <a:noFill/>
+          <a:ln/>
+        </p:spPr>
+        <p:txBody>
+          <a:bodyPr wrap="square" lIns="0" tIns="0" rIns="0" bIns="0" rtlCol="0" anchor="ctr"/>
+          <a:lstStyle/>
+          <a:p>
+            <a:pPr indent="0" marL="0">
+              <a:lnSpc>
+                <a:spcPct val="115000"/>
+              </a:lnSpc>
+              <a:buNone/>
+            </a:pPr>
+            <a:r>
+              <a:rPr lang="en-US" sz="1100" dirty="0">
+                <a:solidFill>
+                  <a:srgbClr val="CBD5E1"/>
+                </a:solidFill>
+                <a:latin typeface="Arial" pitchFamily="34" charset="0"/>
+                <a:ea typeface="Arial" pitchFamily="34" charset="-122"/>
+                <a:cs typeface="Arial" pitchFamily="34" charset="-120"/>
+              </a:rPr>
+              <a:t>Defines user stories, functional requirements, personas, and acceptance criteria for the project.</a:t>
+            </a:r>
+            <a:endParaRPr lang="en-US" sz="1100" dirty="0"/>
+          </a:p>
+        </p:txBody>
+      </p:sp>
+      <p:sp>
+        <p:nvSpPr>
+          <p:cNvPr id="22" name="Text 18"/>
+          <p:cNvSpPr/>
+          <p:nvPr/>
+        </p:nvSpPr>
+        <p:spPr>
+          <a:xfrm>
+            <a:off x="4389120" y="3108960"/>
+            <a:ext cx="3246120" cy="228600"/>
+          </a:xfrm>
+          <a:prstGeom prst="rect">
+            <a:avLst/>
+          </a:prstGeom>
+          <a:noFill/>
+          <a:ln/>
+        </p:spPr>
+        <p:txBody>
+          <a:bodyPr wrap="square" lIns="0" tIns="0" rIns="0" bIns="0" rtlCol="0" anchor="ctr"/>
+          <a:lstStyle/>
+          <a:p>
+            <a:pPr indent="0" marL="0">
+              <a:buNone/>
+            </a:pPr>
+            <a:r>
+              <a:rPr lang="en-US" sz="1000" b="1" dirty="0">
+                <a:solidFill>
+                  <a:srgbClr val="94A3B8"/>
+                </a:solidFill>
+                <a:latin typeface="Arial" pitchFamily="34" charset="0"/>
+                <a:ea typeface="Arial" pitchFamily="34" charset="-122"/>
+                <a:cs typeface="Arial" pitchFamily="34" charset="-120"/>
+              </a:rPr>
+              <a:t>Output: </a:t>
+            </a:r>
+            <a:pPr indent="0" marL="0">
+              <a:buNone/>
+            </a:pPr>
+            <a:r>
+              <a:rPr lang="en-US" sz="1000" dirty="0">
+                <a:solidFill>
+                  <a:srgbClr val="CBD5E1"/>
+                </a:solidFill>
+                <a:latin typeface="Arial" pitchFamily="34" charset="0"/>
+                <a:ea typeface="Arial" pitchFamily="34" charset="-122"/>
+                <a:cs typeface="Arial" pitchFamily="34" charset="-120"/>
+              </a:rPr>
+              <a:t>8-field requirements doc</a:t>
+            </a:r>
+            <a:endParaRPr lang="en-US" sz="1000" dirty="0"/>
+          </a:p>
+        </p:txBody>
+      </p:sp>
+      <p:sp>
+        <p:nvSpPr>
+          <p:cNvPr id="23" name="Shape 19"/>
+          <p:cNvSpPr/>
+          <p:nvPr/>
+        </p:nvSpPr>
+        <p:spPr>
+          <a:xfrm>
+            <a:off x="8046720" y="1280160"/>
+            <a:ext cx="3520440" cy="2331720"/>
+          </a:xfrm>
+          <a:prstGeom prst="roundRect">
+            <a:avLst>
+              <a:gd name="adj" fmla="val 4706"/>
+            </a:avLst>
+          </a:prstGeom>
+          <a:solidFill>
+            <a:srgbClr val="1A1A2E"/>
+          </a:solidFill>
+          <a:ln w="19050">
+            <a:solidFill>
+              <a:srgbClr val="00D4FF"/>
+            </a:solidFill>
+            <a:prstDash val="solid"/>
+          </a:ln>
+          <a:effectLst>
+            <a:outerShdw sx="100000" sy="100000" kx="0" ky="0" algn="bl" rotWithShape="0" blurRad="76200" dist="38100" dir="18900000">
+              <a:srgbClr val="000000">
+                <a:alpha val="25000"/>
+              </a:srgbClr>
+            </a:outerShdw>
+          </a:effectLst>
+        </p:spPr>
+      </p:sp>
+      <p:sp>
+        <p:nvSpPr>
+          <p:cNvPr id="24" name="Shape 20"/>
+          <p:cNvSpPr/>
+          <p:nvPr/>
+        </p:nvSpPr>
+        <p:spPr>
+          <a:xfrm>
+            <a:off x="8183880" y="1389888"/>
+            <a:ext cx="411480" cy="411480"/>
+          </a:xfrm>
+          <a:prstGeom prst="ellipse">
+            <a:avLst/>
+          </a:prstGeom>
+          <a:solidFill>
+            <a:srgbClr val="00D4FF">
+              <a:alpha val="20000"/>
+            </a:srgbClr>
+          </a:solidFill>
+          <a:ln w="19050">
+            <a:solidFill>
+              <a:srgbClr val="00D4FF"/>
+            </a:solidFill>
+            <a:prstDash val="solid"/>
+          </a:ln>
+        </p:spPr>
+      </p:sp>
+      <p:pic>
+        <p:nvPicPr>
+          <p:cNvPr id="25" name="Image 2" descr="preencoded.png">    </p:cNvPr>
+          <p:cNvPicPr>
+            <a:picLocks noChangeAspect="1"/>
+          </p:cNvPicPr>
+          <p:nvPr/>
+        </p:nvPicPr>
+        <p:blipFill>
+          <a:blip r:embed="rId3"/>
+          <a:stretch>
+            <a:fillRect/>
+          </a:stretch>
+        </p:blipFill>
+        <p:spPr>
+          <a:xfrm>
+            <a:off x="8274406" y="1480414"/>
+            <a:ext cx="230429" cy="230429"/>
+          </a:xfrm>
+          <a:prstGeom prst="rect">
+            <a:avLst/>
+          </a:prstGeom>
+        </p:spPr>
+      </p:pic>
+      <p:sp>
+        <p:nvSpPr>
+          <p:cNvPr id="26" name="Text 21"/>
+          <p:cNvSpPr/>
+          <p:nvPr/>
+        </p:nvSpPr>
+        <p:spPr>
+          <a:xfrm>
+            <a:off x="8686800" y="1389888"/>
+            <a:ext cx="2286000" cy="274320"/>
+          </a:xfrm>
+          <a:prstGeom prst="rect">
+            <a:avLst/>
+          </a:prstGeom>
+          <a:noFill/>
+          <a:ln/>
+        </p:spPr>
+        <p:txBody>
+          <a:bodyPr wrap="square" lIns="0" tIns="0" rIns="0" bIns="0" rtlCol="0" anchor="ctr"/>
+          <a:lstStyle/>
+          <a:p>
+            <a:pPr indent="0" marL="0">
+              <a:buNone/>
+            </a:pPr>
+            <a:r>
+              <a:rPr lang="en-US" sz="1400" b="1" dirty="0">
+                <a:solidFill>
+                  <a:srgbClr val="00D4FF"/>
+                </a:solidFill>
+                <a:latin typeface="Calibri" pitchFamily="34" charset="0"/>
+                <a:ea typeface="Calibri" pitchFamily="34" charset="-122"/>
+                <a:cs typeface="Calibri" pitchFamily="34" charset="-120"/>
+              </a:rPr>
+              <a:t>Researcher</a:t>
+            </a:r>
+            <a:endParaRPr lang="en-US" sz="1400" dirty="0"/>
+          </a:p>
+        </p:txBody>
+      </p:sp>
+      <p:sp>
+        <p:nvSpPr>
+          <p:cNvPr id="27" name="Text 22"/>
+          <p:cNvSpPr/>
+          <p:nvPr/>
+        </p:nvSpPr>
+        <p:spPr>
+          <a:xfrm>
+            <a:off x="8686800" y="1664208"/>
+            <a:ext cx="2286000" cy="182880"/>
+          </a:xfrm>
+          <a:prstGeom prst="rect">
+            <a:avLst/>
+          </a:prstGeom>
+          <a:noFill/>
+          <a:ln/>
+        </p:spPr>
+        <p:txBody>
+          <a:bodyPr wrap="square" lIns="0" tIns="0" rIns="0" bIns="0" rtlCol="0" anchor="ctr"/>
+          <a:lstStyle/>
+          <a:p>
+            <a:pPr indent="0" marL="0">
+              <a:buNone/>
+            </a:pPr>
+            <a:r>
+              <a:rPr lang="en-US" sz="900" i="1" dirty="0">
+                <a:solidFill>
+                  <a:srgbClr val="94A3B8"/>
+                </a:solidFill>
+                <a:latin typeface="Arial" pitchFamily="34" charset="0"/>
+                <a:ea typeface="Arial" pitchFamily="34" charset="-122"/>
+                <a:cs typeface="Arial" pitchFamily="34" charset="-120"/>
+              </a:rPr>
+              <a:t>Market Investigator</a:t>
+            </a:r>
+            <a:endParaRPr lang="en-US" sz="900" dirty="0"/>
+          </a:p>
+        </p:txBody>
+      </p:sp>
+      <p:sp>
+        <p:nvSpPr>
+          <p:cNvPr id="28" name="Text 23"/>
+          <p:cNvSpPr/>
+          <p:nvPr/>
+        </p:nvSpPr>
+        <p:spPr>
+          <a:xfrm>
+            <a:off x="8183880" y="1920240"/>
+            <a:ext cx="1417320" cy="201168"/>
+          </a:xfrm>
+          <a:prstGeom prst="rect">
+            <a:avLst/>
+          </a:prstGeom>
+          <a:noFill/>
+          <a:ln/>
+        </p:spPr>
+        <p:txBody>
+          <a:bodyPr wrap="square" lIns="0" tIns="0" rIns="0" bIns="0" rtlCol="0" anchor="ctr"/>
+          <a:lstStyle/>
+          <a:p>
+            <a:pPr indent="0" marL="0">
+              <a:buNone/>
+            </a:pPr>
+            <a:r>
+              <a:rPr lang="en-US" sz="850" dirty="0">
+                <a:solidFill>
+                  <a:srgbClr val="00D4FF"/>
+                </a:solidFill>
+                <a:latin typeface="Arial" pitchFamily="34" charset="0"/>
+                <a:ea typeface="Arial" pitchFamily="34" charset="-122"/>
+                <a:cs typeface="Arial" pitchFamily="34" charset="-120"/>
+              </a:rPr>
+              <a:t>Gemma 4 27B</a:t>
+            </a:r>
+            <a:endParaRPr lang="en-US" sz="850" dirty="0"/>
+          </a:p>
+        </p:txBody>
+      </p:sp>
+      <p:sp>
+        <p:nvSpPr>
+          <p:cNvPr id="29" name="Text 24"/>
+          <p:cNvSpPr/>
+          <p:nvPr/>
+        </p:nvSpPr>
+        <p:spPr>
+          <a:xfrm>
+            <a:off x="9692640" y="1920240"/>
+            <a:ext cx="1371600" cy="201168"/>
+          </a:xfrm>
+          <a:prstGeom prst="rect">
+            <a:avLst/>
+          </a:prstGeom>
+          <a:noFill/>
+          <a:ln/>
+        </p:spPr>
+        <p:txBody>
+          <a:bodyPr wrap="square" lIns="0" tIns="0" rIns="0" bIns="0" rtlCol="0" anchor="ctr"/>
+          <a:lstStyle/>
+          <a:p>
+            <a:pPr indent="0" marL="0">
+              <a:buNone/>
+            </a:pPr>
+            <a:r>
+              <a:rPr lang="en-US" sz="850" dirty="0">
+                <a:solidFill>
+                  <a:srgbClr val="F59E0B"/>
+                </a:solidFill>
+                <a:latin typeface="Arial" pitchFamily="34" charset="0"/>
+                <a:ea typeface="Arial" pitchFamily="34" charset="-122"/>
+                <a:cs typeface="Arial" pitchFamily="34" charset="-120"/>
+              </a:rPr>
+              <a:t>Gate 2</a:t>
+            </a:r>
+            <a:endParaRPr lang="en-US" sz="850" dirty="0"/>
+          </a:p>
+        </p:txBody>
+      </p:sp>
+      <p:sp>
+        <p:nvSpPr>
+          <p:cNvPr id="30" name="Text 25"/>
+          <p:cNvSpPr/>
+          <p:nvPr/>
+        </p:nvSpPr>
+        <p:spPr>
+          <a:xfrm>
+            <a:off x="8183880" y="2194560"/>
+            <a:ext cx="3246120" cy="822960"/>
+          </a:xfrm>
+          <a:prstGeom prst="rect">
+            <a:avLst/>
+          </a:prstGeom>
+          <a:noFill/>
+          <a:ln/>
+        </p:spPr>
+        <p:txBody>
+          <a:bodyPr wrap="square" lIns="0" tIns="0" rIns="0" bIns="0" rtlCol="0" anchor="ctr"/>
+          <a:lstStyle/>
+          <a:p>
+            <a:pPr indent="0" marL="0">
+              <a:lnSpc>
+                <a:spcPct val="115000"/>
+              </a:lnSpc>
+              <a:buNone/>
+            </a:pPr>
+            <a:r>
+              <a:rPr lang="en-US" sz="1100" dirty="0">
+                <a:solidFill>
+                  <a:srgbClr val="CBD5E1"/>
+                </a:solidFill>
+                <a:latin typeface="Arial" pitchFamily="34" charset="0"/>
+                <a:ea typeface="Arial" pitchFamily="34" charset="-122"/>
+                <a:cs typeface="Arial" pitchFamily="34" charset="-120"/>
+              </a:rPr>
+              <a:t>Searches the real web via Tavily API. Finds competitors, govt schemes, APIs, and market gaps.</a:t>
+            </a:r>
+            <a:endParaRPr lang="en-US" sz="1100" dirty="0"/>
+          </a:p>
+        </p:txBody>
+      </p:sp>
+      <p:sp>
+        <p:nvSpPr>
+          <p:cNvPr id="31" name="Text 26"/>
+          <p:cNvSpPr/>
+          <p:nvPr/>
+        </p:nvSpPr>
+        <p:spPr>
+          <a:xfrm>
+            <a:off x="8183880" y="3108960"/>
+            <a:ext cx="3246120" cy="228600"/>
+          </a:xfrm>
+          <a:prstGeom prst="rect">
+            <a:avLst/>
+          </a:prstGeom>
+          <a:noFill/>
+          <a:ln/>
+        </p:spPr>
+        <p:txBody>
+          <a:bodyPr wrap="square" lIns="0" tIns="0" rIns="0" bIns="0" rtlCol="0" anchor="ctr"/>
+          <a:lstStyle/>
+          <a:p>
+            <a:pPr indent="0" marL="0">
+              <a:buNone/>
+            </a:pPr>
+            <a:r>
+              <a:rPr lang="en-US" sz="1000" b="1" dirty="0">
+                <a:solidFill>
+                  <a:srgbClr val="94A3B8"/>
+                </a:solidFill>
+                <a:latin typeface="Arial" pitchFamily="34" charset="0"/>
+                <a:ea typeface="Arial" pitchFamily="34" charset="-122"/>
+                <a:cs typeface="Arial" pitchFamily="34" charset="-120"/>
+              </a:rPr>
+              <a:t>Output: </a:t>
+            </a:r>
+            <a:pPr indent="0" marL="0">
+              <a:buNone/>
+            </a:pPr>
+            <a:r>
+              <a:rPr lang="en-US" sz="1000" dirty="0">
+                <a:solidFill>
+                  <a:srgbClr val="CBD5E1"/>
+                </a:solidFill>
+                <a:latin typeface="Arial" pitchFamily="34" charset="0"/>
+                <a:ea typeface="Arial" pitchFamily="34" charset="-122"/>
+                <a:cs typeface="Arial" pitchFamily="34" charset="-120"/>
+              </a:rPr>
+              <a:t>Research report + URLs</a:t>
+            </a:r>
+            <a:endParaRPr lang="en-US" sz="1000" dirty="0"/>
+          </a:p>
+        </p:txBody>
+      </p:sp>
+      <p:sp>
+        <p:nvSpPr>
+          <p:cNvPr id="32" name="Shape 27"/>
+          <p:cNvSpPr/>
+          <p:nvPr/>
+        </p:nvSpPr>
+        <p:spPr>
+          <a:xfrm>
+            <a:off x="457200" y="3886200"/>
+            <a:ext cx="3520440" cy="2331720"/>
+          </a:xfrm>
+          <a:prstGeom prst="roundRect">
+            <a:avLst>
+              <a:gd name="adj" fmla="val 4706"/>
+            </a:avLst>
+          </a:prstGeom>
+          <a:solidFill>
+            <a:srgbClr val="1A1A2E"/>
+          </a:solidFill>
+          <a:ln w="19050">
+            <a:solidFill>
+              <a:srgbClr val="10B981"/>
+            </a:solidFill>
+            <a:prstDash val="solid"/>
+          </a:ln>
+          <a:effectLst>
+            <a:outerShdw sx="100000" sy="100000" kx="0" ky="0" algn="bl" rotWithShape="0" blurRad="76200" dist="38100" dir="18900000">
+              <a:srgbClr val="000000">
+                <a:alpha val="25000"/>
+              </a:srgbClr>
+            </a:outerShdw>
+          </a:effectLst>
+        </p:spPr>
+      </p:sp>
+      <p:sp>
+        <p:nvSpPr>
+          <p:cNvPr id="33" name="Shape 28"/>
+          <p:cNvSpPr/>
+          <p:nvPr/>
+        </p:nvSpPr>
+        <p:spPr>
+          <a:xfrm>
+            <a:off x="594360" y="3995928"/>
+            <a:ext cx="411480" cy="411480"/>
+          </a:xfrm>
+          <a:prstGeom prst="ellipse">
+            <a:avLst/>
+          </a:prstGeom>
+          <a:solidFill>
+            <a:srgbClr val="10B981">
+              <a:alpha val="20000"/>
+            </a:srgbClr>
+          </a:solidFill>
+          <a:ln w="19050">
+            <a:solidFill>
+              <a:srgbClr val="10B981"/>
+            </a:solidFill>
+            <a:prstDash val="solid"/>
+          </a:ln>
+        </p:spPr>
+      </p:sp>
+      <p:pic>
+        <p:nvPicPr>
+          <p:cNvPr id="34" name="Image 3" descr="preencoded.png">    </p:cNvPr>
+          <p:cNvPicPr>
+            <a:picLocks noChangeAspect="1"/>
+          </p:cNvPicPr>
+          <p:nvPr/>
+        </p:nvPicPr>
+        <p:blipFill>
+          <a:blip r:embed="rId4"/>
+          <a:stretch>
+            <a:fillRect/>
+          </a:stretch>
+        </p:blipFill>
+        <p:spPr>
+          <a:xfrm>
+            <a:off x="684886" y="4086454"/>
+            <a:ext cx="230429" cy="230429"/>
+          </a:xfrm>
+          <a:prstGeom prst="rect">
+            <a:avLst/>
+          </a:prstGeom>
+        </p:spPr>
+      </p:pic>
+      <p:sp>
+        <p:nvSpPr>
+          <p:cNvPr id="35" name="Text 29"/>
+          <p:cNvSpPr/>
+          <p:nvPr/>
+        </p:nvSpPr>
+        <p:spPr>
+          <a:xfrm>
+            <a:off x="1097280" y="3995928"/>
+            <a:ext cx="2286000" cy="274320"/>
+          </a:xfrm>
+          <a:prstGeom prst="rect">
+            <a:avLst/>
+          </a:prstGeom>
+          <a:noFill/>
+          <a:ln/>
+        </p:spPr>
+        <p:txBody>
+          <a:bodyPr wrap="square" lIns="0" tIns="0" rIns="0" bIns="0" rtlCol="0" anchor="ctr"/>
+          <a:lstStyle/>
+          <a:p>
+            <a:pPr indent="0" marL="0">
+              <a:buNone/>
+            </a:pPr>
+            <a:r>
+              <a:rPr lang="en-US" sz="1400" b="1" dirty="0">
+                <a:solidFill>
+                  <a:srgbClr val="10B981"/>
+                </a:solidFill>
+                <a:latin typeface="Calibri" pitchFamily="34" charset="0"/>
+                <a:ea typeface="Calibri" pitchFamily="34" charset="-122"/>
+                <a:cs typeface="Calibri" pitchFamily="34" charset="-120"/>
+              </a:rPr>
+              <a:t>Architect</a:t>
+            </a:r>
+            <a:endParaRPr lang="en-US" sz="1400" dirty="0"/>
+          </a:p>
+        </p:txBody>
+      </p:sp>
+      <p:sp>
+        <p:nvSpPr>
+          <p:cNvPr id="36" name="Text 30"/>
+          <p:cNvSpPr/>
+          <p:nvPr/>
+        </p:nvSpPr>
+        <p:spPr>
+          <a:xfrm>
+            <a:off x="1097280" y="4270248"/>
+            <a:ext cx="2286000" cy="182880"/>
+          </a:xfrm>
+          <a:prstGeom prst="rect">
+            <a:avLst/>
+          </a:prstGeom>
+          <a:noFill/>
+          <a:ln/>
+        </p:spPr>
+        <p:txBody>
+          <a:bodyPr wrap="square" lIns="0" tIns="0" rIns="0" bIns="0" rtlCol="0" anchor="ctr"/>
+          <a:lstStyle/>
+          <a:p>
+            <a:pPr indent="0" marL="0">
+              <a:buNone/>
+            </a:pPr>
+            <a:r>
+              <a:rPr lang="en-US" sz="900" i="1" dirty="0">
+                <a:solidFill>
+                  <a:srgbClr val="94A3B8"/>
+                </a:solidFill>
+                <a:latin typeface="Arial" pitchFamily="34" charset="0"/>
+                <a:ea typeface="Arial" pitchFamily="34" charset="-122"/>
+                <a:cs typeface="Arial" pitchFamily="34" charset="-120"/>
+              </a:rPr>
+              <a:t>System Designer</a:t>
+            </a:r>
+            <a:endParaRPr lang="en-US" sz="900" dirty="0"/>
+          </a:p>
+        </p:txBody>
+      </p:sp>
+      <p:sp>
+        <p:nvSpPr>
+          <p:cNvPr id="37" name="Text 31"/>
+          <p:cNvSpPr/>
+          <p:nvPr/>
+        </p:nvSpPr>
+        <p:spPr>
+          <a:xfrm>
+            <a:off x="594360" y="4526280"/>
+            <a:ext cx="1417320" cy="201168"/>
+          </a:xfrm>
+          <a:prstGeom prst="rect">
+            <a:avLst/>
+          </a:prstGeom>
+          <a:noFill/>
+          <a:ln/>
+        </p:spPr>
+        <p:txBody>
+          <a:bodyPr wrap="square" lIns="0" tIns="0" rIns="0" bIns="0" rtlCol="0" anchor="ctr"/>
+          <a:lstStyle/>
+          <a:p>
+            <a:pPr indent="0" marL="0">
+              <a:buNone/>
+            </a:pPr>
+            <a:r>
+              <a:rPr lang="en-US" sz="850" dirty="0">
+                <a:solidFill>
+                  <a:srgbClr val="00D4FF"/>
+                </a:solidFill>
+                <a:latin typeface="Arial" pitchFamily="34" charset="0"/>
+                <a:ea typeface="Arial" pitchFamily="34" charset="-122"/>
+                <a:cs typeface="Arial" pitchFamily="34" charset="-120"/>
+              </a:rPr>
+              <a:t>Gemma 4 27B</a:t>
+            </a:r>
+            <a:endParaRPr lang="en-US" sz="850" dirty="0"/>
+          </a:p>
+        </p:txBody>
+      </p:sp>
+      <p:sp>
+        <p:nvSpPr>
+          <p:cNvPr id="38" name="Text 32"/>
+          <p:cNvSpPr/>
+          <p:nvPr/>
+        </p:nvSpPr>
+        <p:spPr>
+          <a:xfrm>
+            <a:off x="2103120" y="4526280"/>
+            <a:ext cx="1371600" cy="201168"/>
+          </a:xfrm>
+          <a:prstGeom prst="rect">
+            <a:avLst/>
+          </a:prstGeom>
+          <a:noFill/>
+          <a:ln/>
+        </p:spPr>
+        <p:txBody>
+          <a:bodyPr wrap="square" lIns="0" tIns="0" rIns="0" bIns="0" rtlCol="0" anchor="ctr"/>
+          <a:lstStyle/>
+          <a:p>
+            <a:pPr indent="0" marL="0">
+              <a:buNone/>
+            </a:pPr>
+            <a:r>
+              <a:rPr lang="en-US" sz="850" dirty="0">
+                <a:solidFill>
+                  <a:srgbClr val="F59E0B"/>
+                </a:solidFill>
+                <a:latin typeface="Arial" pitchFamily="34" charset="0"/>
+                <a:ea typeface="Arial" pitchFamily="34" charset="-122"/>
+                <a:cs typeface="Arial" pitchFamily="34" charset="-120"/>
+              </a:rPr>
+              <a:t>Gate 3</a:t>
+            </a:r>
+            <a:endParaRPr lang="en-US" sz="850" dirty="0"/>
+          </a:p>
+        </p:txBody>
+      </p:sp>
+      <p:sp>
+        <p:nvSpPr>
+          <p:cNvPr id="39" name="Text 33"/>
+          <p:cNvSpPr/>
+          <p:nvPr/>
+        </p:nvSpPr>
+        <p:spPr>
+          <a:xfrm>
+            <a:off x="594360" y="4800600"/>
+            <a:ext cx="3246120" cy="822960"/>
+          </a:xfrm>
+          <a:prstGeom prst="rect">
+            <a:avLst/>
+          </a:prstGeom>
+          <a:noFill/>
+          <a:ln/>
+        </p:spPr>
+        <p:txBody>
+          <a:bodyPr wrap="square" lIns="0" tIns="0" rIns="0" bIns="0" rtlCol="0" anchor="ctr"/>
+          <a:lstStyle/>
+          <a:p>
+            <a:pPr indent="0" marL="0">
+              <a:lnSpc>
+                <a:spcPct val="115000"/>
+              </a:lnSpc>
+              <a:buNone/>
+            </a:pPr>
+            <a:r>
+              <a:rPr lang="en-US" sz="1100" dirty="0">
+                <a:solidFill>
+                  <a:srgbClr val="CBD5E1"/>
+                </a:solidFill>
+                <a:latin typeface="Arial" pitchFamily="34" charset="0"/>
+                <a:ea typeface="Arial" pitchFamily="34" charset="-122"/>
+                <a:cs typeface="Arial" pitchFamily="34" charset="-120"/>
+              </a:rPr>
+              <a:t>Designs the technical stack, file structure, API endpoints, and database schema.</a:t>
+            </a:r>
+            <a:endParaRPr lang="en-US" sz="1100" dirty="0"/>
+          </a:p>
+        </p:txBody>
+      </p:sp>
+      <p:sp>
+        <p:nvSpPr>
+          <p:cNvPr id="40" name="Text 34"/>
+          <p:cNvSpPr/>
+          <p:nvPr/>
+        </p:nvSpPr>
+        <p:spPr>
+          <a:xfrm>
+            <a:off x="594360" y="5715000"/>
+            <a:ext cx="3246120" cy="228600"/>
+          </a:xfrm>
+          <a:prstGeom prst="rect">
+            <a:avLst/>
+          </a:prstGeom>
+          <a:noFill/>
+          <a:ln/>
+        </p:spPr>
+        <p:txBody>
+          <a:bodyPr wrap="square" lIns="0" tIns="0" rIns="0" bIns="0" rtlCol="0" anchor="ctr"/>
+          <a:lstStyle/>
+          <a:p>
+            <a:pPr indent="0" marL="0">
+              <a:buNone/>
+            </a:pPr>
+            <a:r>
+              <a:rPr lang="en-US" sz="1000" b="1" dirty="0">
+                <a:solidFill>
+                  <a:srgbClr val="94A3B8"/>
+                </a:solidFill>
+                <a:latin typeface="Arial" pitchFamily="34" charset="0"/>
+                <a:ea typeface="Arial" pitchFamily="34" charset="-122"/>
+                <a:cs typeface="Arial" pitchFamily="34" charset="-120"/>
+              </a:rPr>
+              <a:t>Output: </a:t>
+            </a:r>
+            <a:pPr indent="0" marL="0">
+              <a:buNone/>
+            </a:pPr>
+            <a:r>
+              <a:rPr lang="en-US" sz="1000" dirty="0">
+                <a:solidFill>
+                  <a:srgbClr val="CBD5E1"/>
+                </a:solidFill>
+                <a:latin typeface="Arial" pitchFamily="34" charset="0"/>
+                <a:ea typeface="Arial" pitchFamily="34" charset="-122"/>
+                <a:cs typeface="Arial" pitchFamily="34" charset="-120"/>
+              </a:rPr>
+              <a:t>Technical spec + file plan</a:t>
+            </a:r>
+            <a:endParaRPr lang="en-US" sz="1000" dirty="0"/>
+          </a:p>
+        </p:txBody>
+      </p:sp>
+      <p:sp>
+        <p:nvSpPr>
+          <p:cNvPr id="41" name="Shape 35"/>
+          <p:cNvSpPr/>
+          <p:nvPr/>
+        </p:nvSpPr>
+        <p:spPr>
+          <a:xfrm>
+            <a:off x="4251960" y="3886200"/>
+            <a:ext cx="3520440" cy="2331720"/>
+          </a:xfrm>
+          <a:prstGeom prst="roundRect">
+            <a:avLst>
+              <a:gd name="adj" fmla="val 4706"/>
+            </a:avLst>
+          </a:prstGeom>
+          <a:solidFill>
+            <a:srgbClr val="1A1A2E"/>
+          </a:solidFill>
+          <a:ln w="19050">
+            <a:solidFill>
+              <a:srgbClr val="EC4899"/>
+            </a:solidFill>
+            <a:prstDash val="solid"/>
+          </a:ln>
+          <a:effectLst>
+            <a:outerShdw sx="100000" sy="100000" kx="0" ky="0" algn="bl" rotWithShape="0" blurRad="76200" dist="38100" dir="18900000">
+              <a:srgbClr val="000000">
+                <a:alpha val="25000"/>
+              </a:srgbClr>
+            </a:outerShdw>
+          </a:effectLst>
+        </p:spPr>
+      </p:sp>
+      <p:sp>
+        <p:nvSpPr>
+          <p:cNvPr id="42" name="Shape 36"/>
+          <p:cNvSpPr/>
+          <p:nvPr/>
+        </p:nvSpPr>
+        <p:spPr>
+          <a:xfrm>
+            <a:off x="4389120" y="3995928"/>
+            <a:ext cx="411480" cy="411480"/>
+          </a:xfrm>
+          <a:prstGeom prst="ellipse">
+            <a:avLst/>
+          </a:prstGeom>
+          <a:solidFill>
+            <a:srgbClr val="EC4899">
+              <a:alpha val="20000"/>
+            </a:srgbClr>
+          </a:solidFill>
+          <a:ln w="19050">
+            <a:solidFill>
+              <a:srgbClr val="EC4899"/>
+            </a:solidFill>
+            <a:prstDash val="solid"/>
+          </a:ln>
+        </p:spPr>
+      </p:sp>
+      <p:pic>
+        <p:nvPicPr>
+          <p:cNvPr id="43" name="Image 4" descr="preencoded.png">    </p:cNvPr>
+          <p:cNvPicPr>
+            <a:picLocks noChangeAspect="1"/>
+          </p:cNvPicPr>
+          <p:nvPr/>
+        </p:nvPicPr>
+        <p:blipFill>
+          <a:blip r:embed="rId5"/>
+          <a:stretch>
+            <a:fillRect/>
+          </a:stretch>
+        </p:blipFill>
+        <p:spPr>
+          <a:xfrm>
+            <a:off x="4479646" y="4086454"/>
+            <a:ext cx="230429" cy="230429"/>
+          </a:xfrm>
+          <a:prstGeom prst="rect">
+            <a:avLst/>
+          </a:prstGeom>
+        </p:spPr>
+      </p:pic>
+      <p:sp>
+        <p:nvSpPr>
+          <p:cNvPr id="44" name="Text 37"/>
+          <p:cNvSpPr/>
+          <p:nvPr/>
+        </p:nvSpPr>
+        <p:spPr>
+          <a:xfrm>
+            <a:off x="4892040" y="3995928"/>
+            <a:ext cx="2286000" cy="274320"/>
+          </a:xfrm>
+          <a:prstGeom prst="rect">
+            <a:avLst/>
+          </a:prstGeom>
+          <a:noFill/>
+          <a:ln/>
+        </p:spPr>
+        <p:txBody>
+          <a:bodyPr wrap="square" lIns="0" tIns="0" rIns="0" bIns="0" rtlCol="0" anchor="ctr"/>
+          <a:lstStyle/>
+          <a:p>
+            <a:pPr indent="0" marL="0">
+              <a:buNone/>
+            </a:pPr>
+            <a:r>
+              <a:rPr lang="en-US" sz="1400" b="1" dirty="0">
+                <a:solidFill>
+                  <a:srgbClr val="EC4899"/>
+                </a:solidFill>
+                <a:latin typeface="Calibri" pitchFamily="34" charset="0"/>
+                <a:ea typeface="Calibri" pitchFamily="34" charset="-122"/>
+                <a:cs typeface="Calibri" pitchFamily="34" charset="-120"/>
+              </a:rPr>
+              <a:t>Engineer</a:t>
+            </a:r>
+            <a:endParaRPr lang="en-US" sz="1400" dirty="0"/>
+          </a:p>
+        </p:txBody>
+      </p:sp>
+      <p:sp>
+        <p:nvSpPr>
+          <p:cNvPr id="45" name="Text 38"/>
+          <p:cNvSpPr/>
+          <p:nvPr/>
+        </p:nvSpPr>
+        <p:spPr>
+          <a:xfrm>
+            <a:off x="4892040" y="4270248"/>
+            <a:ext cx="2286000" cy="182880"/>
+          </a:xfrm>
+          <a:prstGeom prst="rect">
+            <a:avLst/>
+          </a:prstGeom>
+          <a:noFill/>
+          <a:ln/>
+        </p:spPr>
+        <p:txBody>
+          <a:bodyPr wrap="square" lIns="0" tIns="0" rIns="0" bIns="0" rtlCol="0" anchor="ctr"/>
+          <a:lstStyle/>
+          <a:p>
+            <a:pPr indent="0" marL="0">
+              <a:buNone/>
+            </a:pPr>
+            <a:r>
+              <a:rPr lang="en-US" sz="900" i="1" dirty="0">
+                <a:solidFill>
+                  <a:srgbClr val="94A3B8"/>
+                </a:solidFill>
+                <a:latin typeface="Arial" pitchFamily="34" charset="0"/>
+                <a:ea typeface="Arial" pitchFamily="34" charset="-122"/>
+                <a:cs typeface="Arial" pitchFamily="34" charset="-120"/>
+              </a:rPr>
+              <a:t>Code Generator</a:t>
+            </a:r>
+            <a:endParaRPr lang="en-US" sz="900" dirty="0"/>
+          </a:p>
+        </p:txBody>
+      </p:sp>
+      <p:sp>
+        <p:nvSpPr>
+          <p:cNvPr id="46" name="Text 39"/>
+          <p:cNvSpPr/>
+          <p:nvPr/>
+        </p:nvSpPr>
+        <p:spPr>
+          <a:xfrm>
+            <a:off x="4389120" y="4526280"/>
+            <a:ext cx="1417320" cy="201168"/>
+          </a:xfrm>
+          <a:prstGeom prst="rect">
+            <a:avLst/>
+          </a:prstGeom>
+          <a:noFill/>
+          <a:ln/>
+        </p:spPr>
+        <p:txBody>
+          <a:bodyPr wrap="square" lIns="0" tIns="0" rIns="0" bIns="0" rtlCol="0" anchor="ctr"/>
+          <a:lstStyle/>
+          <a:p>
+            <a:pPr indent="0" marL="0">
+              <a:buNone/>
+            </a:pPr>
+            <a:r>
+              <a:rPr lang="en-US" sz="850" dirty="0">
+                <a:solidFill>
+                  <a:srgbClr val="00D4FF"/>
+                </a:solidFill>
+                <a:latin typeface="Arial" pitchFamily="34" charset="0"/>
+                <a:ea typeface="Arial" pitchFamily="34" charset="-122"/>
+                <a:cs typeface="Arial" pitchFamily="34" charset="-120"/>
+              </a:rPr>
+              <a:t>Claude Sonnet 4</a:t>
+            </a:r>
+            <a:endParaRPr lang="en-US" sz="850" dirty="0"/>
+          </a:p>
+        </p:txBody>
+      </p:sp>
+      <p:sp>
+        <p:nvSpPr>
+          <p:cNvPr id="47" name="Text 40"/>
+          <p:cNvSpPr/>
+          <p:nvPr/>
+        </p:nvSpPr>
+        <p:spPr>
+          <a:xfrm>
+            <a:off x="5897880" y="4526280"/>
+            <a:ext cx="1371600" cy="201168"/>
+          </a:xfrm>
+          <a:prstGeom prst="rect">
+            <a:avLst/>
+          </a:prstGeom>
+          <a:noFill/>
+          <a:ln/>
+        </p:spPr>
+        <p:txBody>
+          <a:bodyPr wrap="square" lIns="0" tIns="0" rIns="0" bIns="0" rtlCol="0" anchor="ctr"/>
+          <a:lstStyle/>
+          <a:p>
+            <a:pPr indent="0" marL="0">
+              <a:buNone/>
+            </a:pPr>
+            <a:r>
+              <a:rPr lang="en-US" sz="850" dirty="0">
+                <a:solidFill>
+                  <a:srgbClr val="F59E0B"/>
+                </a:solidFill>
+                <a:latin typeface="Arial" pitchFamily="34" charset="0"/>
+                <a:ea typeface="Arial" pitchFamily="34" charset="-122"/>
+                <a:cs typeface="Arial" pitchFamily="34" charset="-120"/>
+              </a:rPr>
+              <a:t>Gate 4</a:t>
+            </a:r>
+            <a:endParaRPr lang="en-US" sz="850" dirty="0"/>
+          </a:p>
+        </p:txBody>
+      </p:sp>
+      <p:sp>
+        <p:nvSpPr>
+          <p:cNvPr id="48" name="Text 41"/>
+          <p:cNvSpPr/>
+          <p:nvPr/>
+        </p:nvSpPr>
+        <p:spPr>
+          <a:xfrm>
+            <a:off x="4389120" y="4800600"/>
+            <a:ext cx="3246120" cy="822960"/>
+          </a:xfrm>
+          <a:prstGeom prst="rect">
+            <a:avLst/>
+          </a:prstGeom>
+          <a:noFill/>
+          <a:ln/>
+        </p:spPr>
+        <p:txBody>
+          <a:bodyPr wrap="square" lIns="0" tIns="0" rIns="0" bIns="0" rtlCol="0" anchor="ctr"/>
+          <a:lstStyle/>
+          <a:p>
+            <a:pPr indent="0" marL="0">
+              <a:lnSpc>
+                <a:spcPct val="115000"/>
+              </a:lnSpc>
+              <a:buNone/>
+            </a:pPr>
+            <a:r>
+              <a:rPr lang="en-US" sz="1100" dirty="0">
+                <a:solidFill>
+                  <a:srgbClr val="CBD5E1"/>
+                </a:solidFill>
+                <a:latin typeface="Arial" pitchFamily="34" charset="0"/>
+                <a:ea typeface="Arial" pitchFamily="34" charset="-122"/>
+                <a:cs typeface="Arial" pitchFamily="34" charset="-120"/>
+              </a:rPr>
+              <a:t>Generates a complete runnable codebase — frontend, backend, configs, README. Up to 16K tokens.</a:t>
+            </a:r>
+            <a:endParaRPr lang="en-US" sz="1100" dirty="0"/>
+          </a:p>
+        </p:txBody>
+      </p:sp>
+      <p:sp>
+        <p:nvSpPr>
+          <p:cNvPr id="49" name="Text 42"/>
+          <p:cNvSpPr/>
+          <p:nvPr/>
+        </p:nvSpPr>
+        <p:spPr>
+          <a:xfrm>
+            <a:off x="4389120" y="5715000"/>
+            <a:ext cx="3246120" cy="228600"/>
+          </a:xfrm>
+          <a:prstGeom prst="rect">
+            <a:avLst/>
+          </a:prstGeom>
+          <a:noFill/>
+          <a:ln/>
+        </p:spPr>
+        <p:txBody>
+          <a:bodyPr wrap="square" lIns="0" tIns="0" rIns="0" bIns="0" rtlCol="0" anchor="ctr"/>
+          <a:lstStyle/>
+          <a:p>
+            <a:pPr indent="0" marL="0">
+              <a:buNone/>
+            </a:pPr>
+            <a:r>
+              <a:rPr lang="en-US" sz="1000" b="1" dirty="0">
+                <a:solidFill>
+                  <a:srgbClr val="94A3B8"/>
+                </a:solidFill>
+                <a:latin typeface="Arial" pitchFamily="34" charset="0"/>
+                <a:ea typeface="Arial" pitchFamily="34" charset="-122"/>
+                <a:cs typeface="Arial" pitchFamily="34" charset="-120"/>
+              </a:rPr>
+              <a:t>Output: </a:t>
+            </a:r>
+            <a:pPr indent="0" marL="0">
+              <a:buNone/>
+            </a:pPr>
+            <a:r>
+              <a:rPr lang="en-US" sz="1000" dirty="0">
+                <a:solidFill>
+                  <a:srgbClr val="CBD5E1"/>
+                </a:solidFill>
+                <a:latin typeface="Arial" pitchFamily="34" charset="0"/>
+                <a:ea typeface="Arial" pitchFamily="34" charset="-122"/>
+                <a:cs typeface="Arial" pitchFamily="34" charset="-120"/>
+              </a:rPr>
+              <a:t>.zip with all project files</a:t>
+            </a:r>
+            <a:endParaRPr lang="en-US" sz="1000" dirty="0"/>
+          </a:p>
+        </p:txBody>
+      </p:sp>
+      <p:sp>
+        <p:nvSpPr>
+          <p:cNvPr id="50" name="Shape 43"/>
+          <p:cNvSpPr/>
+          <p:nvPr/>
+        </p:nvSpPr>
+        <p:spPr>
+          <a:xfrm>
+            <a:off x="8046720" y="3886200"/>
+            <a:ext cx="3520440" cy="2331720"/>
+          </a:xfrm>
+          <a:prstGeom prst="roundRect">
+            <a:avLst>
+              <a:gd name="adj" fmla="val 4706"/>
+            </a:avLst>
+          </a:prstGeom>
+          <a:solidFill>
+            <a:srgbClr val="1A1A2E"/>
+          </a:solidFill>
+          <a:ln w="19050">
+            <a:solidFill>
+              <a:srgbClr val="F59E0B"/>
+            </a:solidFill>
+            <a:prstDash val="solid"/>
+          </a:ln>
+          <a:effectLst>
+            <a:outerShdw sx="100000" sy="100000" kx="0" ky="0" algn="bl" rotWithShape="0" blurRad="76200" dist="38100" dir="18900000">
+              <a:srgbClr val="000000">
+                <a:alpha val="25000"/>
+              </a:srgbClr>
+            </a:outerShdw>
+          </a:effectLst>
+        </p:spPr>
+      </p:sp>
+      <p:sp>
+        <p:nvSpPr>
+          <p:cNvPr id="51" name="Shape 44"/>
+          <p:cNvSpPr/>
+          <p:nvPr/>
+        </p:nvSpPr>
+        <p:spPr>
+          <a:xfrm>
+            <a:off x="8183880" y="3995928"/>
+            <a:ext cx="411480" cy="411480"/>
+          </a:xfrm>
+          <a:prstGeom prst="ellipse">
+            <a:avLst/>
+          </a:prstGeom>
+          <a:solidFill>
+            <a:srgbClr val="F59E0B">
+              <a:alpha val="20000"/>
+            </a:srgbClr>
+          </a:solidFill>
+          <a:ln w="19050">
+            <a:solidFill>
+              <a:srgbClr val="F59E0B"/>
+            </a:solidFill>
+            <a:prstDash val="solid"/>
+          </a:ln>
+        </p:spPr>
+      </p:sp>
+      <p:pic>
+        <p:nvPicPr>
+          <p:cNvPr id="52" name="Image 5" descr="preencoded.png">    </p:cNvPr>
+          <p:cNvPicPr>
+            <a:picLocks noChangeAspect="1"/>
+          </p:cNvPicPr>
+          <p:nvPr/>
+        </p:nvPicPr>
+        <p:blipFill>
+          <a:blip r:embed="rId6"/>
+          <a:stretch>
+            <a:fillRect/>
+          </a:stretch>
+        </p:blipFill>
+        <p:spPr>
+          <a:xfrm>
+            <a:off x="8274406" y="4086454"/>
+            <a:ext cx="230429" cy="230429"/>
+          </a:xfrm>
+          <a:prstGeom prst="rect">
+            <a:avLst/>
+          </a:prstGeom>
+        </p:spPr>
+      </p:pic>
+      <p:sp>
+        <p:nvSpPr>
+          <p:cNvPr id="53" name="Text 45"/>
+          <p:cNvSpPr/>
+          <p:nvPr/>
+        </p:nvSpPr>
+        <p:spPr>
+          <a:xfrm>
+            <a:off x="8686800" y="3995928"/>
+            <a:ext cx="2286000" cy="274320"/>
+          </a:xfrm>
+          <a:prstGeom prst="rect">
+            <a:avLst/>
+          </a:prstGeom>
+          <a:noFill/>
+          <a:ln/>
+        </p:spPr>
+        <p:txBody>
+          <a:bodyPr wrap="square" lIns="0" tIns="0" rIns="0" bIns="0" rtlCol="0" anchor="ctr"/>
+          <a:lstStyle/>
+          <a:p>
+            <a:pPr indent="0" marL="0">
+              <a:buNone/>
+            </a:pPr>
+            <a:r>
+              <a:rPr lang="en-US" sz="1400" b="1" dirty="0">
+                <a:solidFill>
+                  <a:srgbClr val="F59E0B"/>
+                </a:solidFill>
+                <a:latin typeface="Calibri" pitchFamily="34" charset="0"/>
+                <a:ea typeface="Calibri" pitchFamily="34" charset="-122"/>
+                <a:cs typeface="Calibri" pitchFamily="34" charset="-120"/>
+              </a:rPr>
+              <a:t>PPT Agent</a:t>
+            </a:r>
+            <a:endParaRPr lang="en-US" sz="1400" dirty="0"/>
+          </a:p>
+        </p:txBody>
+      </p:sp>
+      <p:sp>
+        <p:nvSpPr>
+          <p:cNvPr id="54" name="Text 46"/>
+          <p:cNvSpPr/>
+          <p:nvPr/>
+        </p:nvSpPr>
+        <p:spPr>
+          <a:xfrm>
+            <a:off x="8686800" y="4270248"/>
+            <a:ext cx="2286000" cy="182880"/>
+          </a:xfrm>
+          <a:prstGeom prst="rect">
+            <a:avLst/>
+          </a:prstGeom>
+          <a:noFill/>
+          <a:ln/>
+        </p:spPr>
+        <p:txBody>
+          <a:bodyPr wrap="square" lIns="0" tIns="0" rIns="0" bIns="0" rtlCol="0" anchor="ctr"/>
+          <a:lstStyle/>
+          <a:p>
+            <a:pPr indent="0" marL="0">
+              <a:buNone/>
+            </a:pPr>
+            <a:r>
+              <a:rPr lang="en-US" sz="900" i="1" dirty="0">
+                <a:solidFill>
+                  <a:srgbClr val="94A3B8"/>
+                </a:solidFill>
+                <a:latin typeface="Arial" pitchFamily="34" charset="0"/>
+                <a:ea typeface="Arial" pitchFamily="34" charset="-122"/>
+                <a:cs typeface="Arial" pitchFamily="34" charset="-120"/>
+              </a:rPr>
+              <a:t>Presentation Creator</a:t>
+            </a:r>
+            <a:endParaRPr lang="en-US" sz="900" dirty="0"/>
+          </a:p>
+        </p:txBody>
+      </p:sp>
+      <p:sp>
+        <p:nvSpPr>
+          <p:cNvPr id="55" name="Text 47"/>
+          <p:cNvSpPr/>
+          <p:nvPr/>
+        </p:nvSpPr>
+        <p:spPr>
+          <a:xfrm>
+            <a:off x="8183880" y="4526280"/>
+            <a:ext cx="1417320" cy="201168"/>
+          </a:xfrm>
+          <a:prstGeom prst="rect">
+            <a:avLst/>
+          </a:prstGeom>
+          <a:noFill/>
+          <a:ln/>
+        </p:spPr>
+        <p:txBody>
+          <a:bodyPr wrap="square" lIns="0" tIns="0" rIns="0" bIns="0" rtlCol="0" anchor="ctr"/>
+          <a:lstStyle/>
+          <a:p>
+            <a:pPr indent="0" marL="0">
+              <a:buNone/>
+            </a:pPr>
+            <a:r>
+              <a:rPr lang="en-US" sz="850" dirty="0">
+                <a:solidFill>
+                  <a:srgbClr val="00D4FF"/>
+                </a:solidFill>
+                <a:latin typeface="Arial" pitchFamily="34" charset="0"/>
+                <a:ea typeface="Arial" pitchFamily="34" charset="-122"/>
+                <a:cs typeface="Arial" pitchFamily="34" charset="-120"/>
+              </a:rPr>
+              <a:t>Gemma 4 27B</a:t>
+            </a:r>
+            <a:endParaRPr lang="en-US" sz="850" dirty="0"/>
+          </a:p>
+        </p:txBody>
+      </p:sp>
+      <p:sp>
+        <p:nvSpPr>
+          <p:cNvPr id="56" name="Text 48"/>
+          <p:cNvSpPr/>
+          <p:nvPr/>
+        </p:nvSpPr>
+        <p:spPr>
+          <a:xfrm>
+            <a:off x="9692640" y="4526280"/>
+            <a:ext cx="1371600" cy="201168"/>
+          </a:xfrm>
+          <a:prstGeom prst="rect">
+            <a:avLst/>
+          </a:prstGeom>
+          <a:noFill/>
+          <a:ln/>
+        </p:spPr>
+        <p:txBody>
+          <a:bodyPr wrap="square" lIns="0" tIns="0" rIns="0" bIns="0" rtlCol="0" anchor="ctr"/>
+          <a:lstStyle/>
+          <a:p>
+            <a:pPr indent="0" marL="0">
+              <a:buNone/>
+            </a:pPr>
+            <a:r>
+              <a:rPr lang="en-US" sz="850" dirty="0">
+                <a:solidFill>
+                  <a:srgbClr val="F59E0B"/>
+                </a:solidFill>
+                <a:latin typeface="Arial" pitchFamily="34" charset="0"/>
+                <a:ea typeface="Arial" pitchFamily="34" charset="-122"/>
+                <a:cs typeface="Arial" pitchFamily="34" charset="-120"/>
+              </a:rPr>
+              <a:t>None (auto)</a:t>
+            </a:r>
+            <a:endParaRPr lang="en-US" sz="850" dirty="0"/>
+          </a:p>
+        </p:txBody>
+      </p:sp>
+      <p:sp>
+        <p:nvSpPr>
+          <p:cNvPr id="57" name="Text 49"/>
+          <p:cNvSpPr/>
+          <p:nvPr/>
+        </p:nvSpPr>
+        <p:spPr>
+          <a:xfrm>
+            <a:off x="8183880" y="4800600"/>
+            <a:ext cx="3246120" cy="822960"/>
+          </a:xfrm>
+          <a:prstGeom prst="rect">
+            <a:avLst/>
+          </a:prstGeom>
+          <a:noFill/>
+          <a:ln/>
+        </p:spPr>
+        <p:txBody>
+          <a:bodyPr wrap="square" lIns="0" tIns="0" rIns="0" bIns="0" rtlCol="0" anchor="ctr"/>
+          <a:lstStyle/>
+          <a:p>
+            <a:pPr indent="0" marL="0">
+              <a:lnSpc>
+                <a:spcPct val="115000"/>
+              </a:lnSpc>
+              <a:buNone/>
+            </a:pPr>
+            <a:r>
+              <a:rPr lang="en-US" sz="1100" dirty="0">
+                <a:solidFill>
+                  <a:srgbClr val="CBD5E1"/>
+                </a:solidFill>
+                <a:latin typeface="Arial" pitchFamily="34" charset="0"/>
+                <a:ea typeface="Arial" pitchFamily="34" charset="-122"/>
+                <a:cs typeface="Arial" pitchFamily="34" charset="-120"/>
+              </a:rPr>
+              <a:t>Synthesizes all 5 previous outputs into a 10-slide pitch deck for hackathon judges.</a:t>
+            </a:r>
+            <a:endParaRPr lang="en-US" sz="1100" dirty="0"/>
+          </a:p>
+        </p:txBody>
+      </p:sp>
+      <p:sp>
+        <p:nvSpPr>
+          <p:cNvPr id="58" name="Text 50"/>
+          <p:cNvSpPr/>
+          <p:nvPr/>
+        </p:nvSpPr>
+        <p:spPr>
+          <a:xfrm>
+            <a:off x="8183880" y="5715000"/>
+            <a:ext cx="3246120" cy="228600"/>
+          </a:xfrm>
+          <a:prstGeom prst="rect">
+            <a:avLst/>
+          </a:prstGeom>
+          <a:noFill/>
+          <a:ln/>
+        </p:spPr>
+        <p:txBody>
+          <a:bodyPr wrap="square" lIns="0" tIns="0" rIns="0" bIns="0" rtlCol="0" anchor="ctr"/>
+          <a:lstStyle/>
+          <a:p>
+            <a:pPr indent="0" marL="0">
+              <a:buNone/>
+            </a:pPr>
+            <a:r>
+              <a:rPr lang="en-US" sz="1000" b="1" dirty="0">
+                <a:solidFill>
+                  <a:srgbClr val="94A3B8"/>
+                </a:solidFill>
+                <a:latin typeface="Arial" pitchFamily="34" charset="0"/>
+                <a:ea typeface="Arial" pitchFamily="34" charset="-122"/>
+                <a:cs typeface="Arial" pitchFamily="34" charset="-120"/>
+              </a:rPr>
+              <a:t>Output: </a:t>
+            </a:r>
+            <a:pPr indent="0" marL="0">
+              <a:buNone/>
+            </a:pPr>
+            <a:r>
+              <a:rPr lang="en-US" sz="1000" dirty="0">
+                <a:solidFill>
+                  <a:srgbClr val="CBD5E1"/>
+                </a:solidFill>
+                <a:latin typeface="Arial" pitchFamily="34" charset="0"/>
+                <a:ea typeface="Arial" pitchFamily="34" charset="-122"/>
+                <a:cs typeface="Arial" pitchFamily="34" charset="-120"/>
+              </a:rPr>
+              <a:t>.pptx presentation file</a:t>
+            </a:r>
+            <a:endParaRPr lang="en-US" sz="1000" dirty="0"/>
+          </a:p>
+        </p:txBody>
+      </p:sp>
+    </p:spTree>
+  </p:cSld>
+  <p:clrMapOvr>
+    <a:masterClrMapping/>
+  </p:clrMapOvr>
+</p:sld>
+</file>
+
+<file path=ppt/slides/slide17.xml><?xml version="1.0" encoding="utf-8"?>
+<p:sld xmlns:a="http://schemas.openxmlformats.org/drawingml/2006/main" xmlns:r="http://schemas.openxmlformats.org/officeDocument/2006/relationships" xmlns:p="http://schemas.openxmlformats.org/presentationml/2006/main">
+  <p:cSld name="Slide 17">
+    <p:bg>
+      <p:bgPr>
+        <a:solidFill>
+          <a:srgbClr val="0F0F23"/>
+        </a:solidFill>
+      </p:bgPr>
+    </p:bg>
+    <p:spTree>
+      <p:nvGrpSpPr>
+        <p:cNvPr id="1" name=""/>
+        <p:cNvGrpSpPr/>
+        <p:nvPr/>
+      </p:nvGrpSpPr>
+      <p:grpSpPr>
+        <a:xfrm>
+          <a:off x="0" y="0"/>
+          <a:ext cx="0" cy="0"/>
+          <a:chOff x="0" y="0"/>
+          <a:chExt cx="0" cy="0"/>
+        </a:xfrm>
+      </p:grpSpPr>
+      <p:sp>
+        <p:nvSpPr>
+          <p:cNvPr id="2" name="Text 0"/>
+          <p:cNvSpPr/>
+          <p:nvPr/>
+        </p:nvSpPr>
+        <p:spPr>
+          <a:xfrm>
+            <a:off x="10972800" y="6492240"/>
+            <a:ext cx="731520" cy="228600"/>
+          </a:xfrm>
+          <a:prstGeom prst="rect">
+            <a:avLst/>
+          </a:prstGeom>
+          <a:noFill/>
+          <a:ln/>
+        </p:spPr>
+        <p:txBody>
+          <a:bodyPr wrap="square" lIns="0" tIns="0" rIns="0" bIns="0" rtlCol="0" anchor="ctr"/>
+          <a:lstStyle/>
+          <a:p>
+            <a:pPr algn="r" indent="0" marL="0">
+              <a:buNone/>
+            </a:pPr>
+            <a:r>
+              <a:rPr lang="en-US" sz="900" dirty="0">
+                <a:solidFill>
+                  <a:srgbClr val="64748B"/>
+                </a:solidFill>
+                <a:latin typeface="Arial" pitchFamily="34" charset="0"/>
+                <a:ea typeface="Arial" pitchFamily="34" charset="-122"/>
+                <a:cs typeface="Arial" pitchFamily="34" charset="-120"/>
+              </a:rPr>
+              <a:t>17/17</a:t>
             </a:r>
             <a:endParaRPr lang="en-US" sz="900" dirty="0"/>
           </a:p>
@@ -10261,7 +16538,7 @@
                 <a:ea typeface="Arial" pitchFamily="34" charset="-122"/>
                 <a:cs typeface="Arial" pitchFamily="34" charset="-120"/>
               </a:rPr>
-              <a:t>2/14</a:t>
+              <a:t>2/17</a:t>
             </a:r>
             <a:endParaRPr lang="en-US" sz="900" dirty="0"/>
           </a:p>
@@ -11370,7 +17647,7 @@
                 <a:ea typeface="Arial" pitchFamily="34" charset="-122"/>
                 <a:cs typeface="Arial" pitchFamily="34" charset="-120"/>
               </a:rPr>
-              <a:t>3/14</a:t>
+              <a:t>3/17</a:t>
             </a:r>
             <a:endParaRPr lang="en-US" sz="900" dirty="0"/>
           </a:p>
@@ -12819,7 +19096,7 @@
                 <a:ea typeface="Arial" pitchFamily="34" charset="-122"/>
                 <a:cs typeface="Arial" pitchFamily="34" charset="-120"/>
               </a:rPr>
-              <a:t>4/14</a:t>
+              <a:t>4/17</a:t>
             </a:r>
             <a:endParaRPr lang="en-US" sz="900" dirty="0"/>
           </a:p>
@@ -14193,7 +20470,7 @@
                 <a:ea typeface="Arial" pitchFamily="34" charset="-122"/>
                 <a:cs typeface="Arial" pitchFamily="34" charset="-120"/>
               </a:rPr>
-              <a:t>5/14</a:t>
+              <a:t>5/17</a:t>
             </a:r>
             <a:endParaRPr lang="en-US" sz="900" dirty="0"/>
           </a:p>
@@ -15338,7 +21615,7 @@
                 <a:ea typeface="Arial" pitchFamily="34" charset="-122"/>
                 <a:cs typeface="Arial" pitchFamily="34" charset="-120"/>
               </a:rPr>
-              <a:t>6/14</a:t>
+              <a:t>6/17</a:t>
             </a:r>
             <a:endParaRPr lang="en-US" sz="900" dirty="0"/>
           </a:p>
@@ -17016,7 +23293,7 @@
                 <a:ea typeface="Arial" pitchFamily="34" charset="-122"/>
                 <a:cs typeface="Arial" pitchFamily="34" charset="-120"/>
               </a:rPr>
-              <a:t>7/14</a:t>
+              <a:t>7/17</a:t>
             </a:r>
             <a:endParaRPr lang="en-US" sz="900" dirty="0"/>
           </a:p>
@@ -18410,7 +24687,7 @@
                 <a:ea typeface="Arial" pitchFamily="34" charset="-122"/>
                 <a:cs typeface="Arial" pitchFamily="34" charset="-120"/>
               </a:rPr>
-              <a:t>8/14</a:t>
+              <a:t>8/17</a:t>
             </a:r>
             <a:endParaRPr lang="en-US" sz="900" dirty="0"/>
           </a:p>
@@ -19806,7 +26083,7 @@
                 <a:ea typeface="Arial" pitchFamily="34" charset="-122"/>
                 <a:cs typeface="Arial" pitchFamily="34" charset="-120"/>
               </a:rPr>
-              <a:t>9/14</a:t>
+              <a:t>9/17</a:t>
             </a:r>
             <a:endParaRPr lang="en-US" sz="900" dirty="0"/>
           </a:p>
